--- a/slides/Lecture_Chapter13.pptx
+++ b/slides/Lecture_Chapter13.pptx
@@ -126,7 +126,7 @@
   <p:extLst>
     <p:ext uri="{521415D9-36F7-43E2-AB2F-B90AF26B5E84}">
       <p14:sectionLst xmlns:p14="http://schemas.microsoft.com/office/powerpoint/2010/main">
-        <p14:section name="Default Section" id="{83286E67-F0F0-421C-8F74-7B93ABA17FBF}">
+        <p14:section name="Policy Gradient Methods" id="{83286E67-F0F0-421C-8F74-7B93ABA17FBF}">
           <p14:sldIdLst>
             <p14:sldId id="256"/>
             <p14:sldId id="313"/>
@@ -322,7 +322,7 @@
           <a:p>
             <a:fld id="{3E22BF2E-04DA-469E-97C5-BB68A0368813}" type="datetimeFigureOut">
               <a:rPr lang="en-US" smtClean="0"/>
-              <a:t>4/22/2026</a:t>
+              <a:t>10/15/26</a:t>
             </a:fld>
             <a:endParaRPr lang="en-US"/>
           </a:p>
@@ -520,7 +520,7 @@
           <a:p>
             <a:fld id="{3E22BF2E-04DA-469E-97C5-BB68A0368813}" type="datetimeFigureOut">
               <a:rPr lang="en-US" smtClean="0"/>
-              <a:t>4/22/2026</a:t>
+              <a:t>10/15/26</a:t>
             </a:fld>
             <a:endParaRPr lang="en-US"/>
           </a:p>
@@ -728,7 +728,7 @@
           <a:p>
             <a:fld id="{3E22BF2E-04DA-469E-97C5-BB68A0368813}" type="datetimeFigureOut">
               <a:rPr lang="en-US" smtClean="0"/>
-              <a:t>4/22/2026</a:t>
+              <a:t>10/15/26</a:t>
             </a:fld>
             <a:endParaRPr lang="en-US"/>
           </a:p>
@@ -936,7 +936,7 @@
           <a:p>
             <a:fld id="{3E22BF2E-04DA-469E-97C5-BB68A0368813}" type="datetimeFigureOut">
               <a:rPr lang="en-US" smtClean="0"/>
-              <a:t>4/22/2026</a:t>
+              <a:t>10/15/26</a:t>
             </a:fld>
             <a:endParaRPr lang="en-US"/>
           </a:p>
@@ -1211,7 +1211,7 @@
           <a:p>
             <a:fld id="{3E22BF2E-04DA-469E-97C5-BB68A0368813}" type="datetimeFigureOut">
               <a:rPr lang="en-US" smtClean="0"/>
-              <a:t>4/22/2026</a:t>
+              <a:t>10/15/26</a:t>
             </a:fld>
             <a:endParaRPr lang="en-US"/>
           </a:p>
@@ -1476,7 +1476,7 @@
           <a:p>
             <a:fld id="{3E22BF2E-04DA-469E-97C5-BB68A0368813}" type="datetimeFigureOut">
               <a:rPr lang="en-US" smtClean="0"/>
-              <a:t>4/22/2026</a:t>
+              <a:t>10/15/26</a:t>
             </a:fld>
             <a:endParaRPr lang="en-US"/>
           </a:p>
@@ -1888,7 +1888,7 @@
           <a:p>
             <a:fld id="{3E22BF2E-04DA-469E-97C5-BB68A0368813}" type="datetimeFigureOut">
               <a:rPr lang="en-US" smtClean="0"/>
-              <a:t>4/22/2026</a:t>
+              <a:t>10/15/26</a:t>
             </a:fld>
             <a:endParaRPr lang="en-US"/>
           </a:p>
@@ -2029,7 +2029,7 @@
           <a:p>
             <a:fld id="{3E22BF2E-04DA-469E-97C5-BB68A0368813}" type="datetimeFigureOut">
               <a:rPr lang="en-US" smtClean="0"/>
-              <a:t>4/22/2026</a:t>
+              <a:t>10/15/26</a:t>
             </a:fld>
             <a:endParaRPr lang="en-US"/>
           </a:p>
@@ -2142,7 +2142,7 @@
           <a:p>
             <a:fld id="{3E22BF2E-04DA-469E-97C5-BB68A0368813}" type="datetimeFigureOut">
               <a:rPr lang="en-US" smtClean="0"/>
-              <a:t>4/22/2026</a:t>
+              <a:t>10/15/26</a:t>
             </a:fld>
             <a:endParaRPr lang="en-US"/>
           </a:p>
@@ -2453,7 +2453,7 @@
           <a:p>
             <a:fld id="{3E22BF2E-04DA-469E-97C5-BB68A0368813}" type="datetimeFigureOut">
               <a:rPr lang="en-US" smtClean="0"/>
-              <a:t>4/22/2026</a:t>
+              <a:t>10/15/26</a:t>
             </a:fld>
             <a:endParaRPr lang="en-US"/>
           </a:p>
@@ -2741,7 +2741,7 @@
           <a:p>
             <a:fld id="{3E22BF2E-04DA-469E-97C5-BB68A0368813}" type="datetimeFigureOut">
               <a:rPr lang="en-US" smtClean="0"/>
-              <a:t>4/22/2026</a:t>
+              <a:t>10/15/26</a:t>
             </a:fld>
             <a:endParaRPr lang="en-US"/>
           </a:p>
@@ -2982,7 +2982,7 @@
           <a:p>
             <a:fld id="{3E22BF2E-04DA-469E-97C5-BB68A0368813}" type="datetimeFigureOut">
               <a:rPr lang="en-US" smtClean="0"/>
-              <a:t>4/22/2026</a:t>
+              <a:t>10/15/26</a:t>
             </a:fld>
             <a:endParaRPr lang="en-US"/>
           </a:p>
@@ -3685,92 +3685,6 @@
       </p:sp>
       <p:sp>
         <p:nvSpPr>
-          <p:cNvPr id="3" name="Subtitle 2">
-            <a:extLst>
-              <a:ext uri="{FF2B5EF4-FFF2-40B4-BE49-F238E27FC236}">
-                <a16:creationId xmlns:a16="http://schemas.microsoft.com/office/drawing/2014/main" id="{7FFF10C2-8C10-0E89-D285-D614C36EEE69}"/>
-              </a:ext>
-            </a:extLst>
-          </p:cNvPr>
-          <p:cNvSpPr>
-            <a:spLocks noGrp="1"/>
-          </p:cNvSpPr>
-          <p:nvPr>
-            <p:ph type="subTitle" idx="1"/>
-          </p:nvPr>
-        </p:nvSpPr>
-        <p:spPr>
-          <a:xfrm>
-            <a:off x="477982" y="4868822"/>
-            <a:ext cx="4169519" cy="1443894"/>
-          </a:xfrm>
-        </p:spPr>
-        <p:txBody>
-          <a:bodyPr>
-            <a:normAutofit fontScale="92500"/>
-          </a:bodyPr>
-          <a:lstStyle/>
-          <a:p>
-            <a:pPr algn="l"/>
-            <a:r>
-              <a:rPr lang="en-US" sz="1700" dirty="0">
-                <a:solidFill>
-                  <a:schemeClr val="bg1"/>
-                </a:solidFill>
-              </a:rPr>
-              <a:t>Michael Hahsler, SMU</a:t>
-            </a:r>
-          </a:p>
-          <a:p>
-            <a:pPr algn="l"/>
-            <a:r>
-              <a:rPr lang="en-US" sz="1300" dirty="0">
-                <a:solidFill>
-                  <a:schemeClr val="bg1"/>
-                </a:solidFill>
-              </a:rPr>
-              <a:t>With figures from Sutton/Barto*</a:t>
-            </a:r>
-          </a:p>
-          <a:p>
-            <a:pPr algn="l"/>
-            <a:endParaRPr lang="en-US" sz="1300" dirty="0">
-              <a:solidFill>
-                <a:schemeClr val="bg1"/>
-              </a:solidFill>
-            </a:endParaRPr>
-          </a:p>
-          <a:p>
-            <a:pPr algn="l"/>
-            <a:r>
-              <a:rPr lang="en-US" sz="1300" dirty="0">
-                <a:solidFill>
-                  <a:schemeClr val="bg1"/>
-                </a:solidFill>
-              </a:rPr>
-              <a:t>*Sutton and Barto, Reinforcement Learning: An Introduction, 2</a:t>
-            </a:r>
-            <a:r>
-              <a:rPr lang="en-US" sz="1300" baseline="30000" dirty="0">
-                <a:solidFill>
-                  <a:schemeClr val="bg1"/>
-                </a:solidFill>
-              </a:rPr>
-              <a:t>nd</a:t>
-            </a:r>
-            <a:r>
-              <a:rPr lang="en-US" sz="1300" dirty="0">
-                <a:solidFill>
-                  <a:schemeClr val="bg1"/>
-                </a:solidFill>
-              </a:rPr>
-              <a:t> edition, MIT Press, Cambridge, MA, 2018</a:t>
-            </a:r>
-          </a:p>
-        </p:txBody>
-      </p:sp>
-      <p:sp>
-        <p:nvSpPr>
           <p:cNvPr id="14" name="Rectangle 13">
             <a:extLst>
               <a:ext uri="{FF2B5EF4-FFF2-40B4-BE49-F238E27FC236}">
@@ -3837,6 +3751,56 @@
           </a:p>
         </p:txBody>
       </p:sp>
+      <p:pic>
+        <p:nvPicPr>
+          <p:cNvPr id="6" name="Picture 5">
+            <a:extLst>
+              <a:ext uri="{FF2B5EF4-FFF2-40B4-BE49-F238E27FC236}">
+                <a16:creationId xmlns:a16="http://schemas.microsoft.com/office/drawing/2014/main" id="{8AD28C7D-14A3-CFEB-3DEC-2E01272844F2}"/>
+              </a:ext>
+              <a:ext uri="{C183D7F6-B498-43B3-948B-1728B52AA6E4}">
+                <adec:decorative xmlns:adec="http://schemas.microsoft.com/office/drawing/2017/decorative" val="1"/>
+              </a:ext>
+            </a:extLst>
+          </p:cNvPr>
+          <p:cNvPicPr>
+            <a:picLocks noChangeAspect="1" noChangeArrowheads="1"/>
+          </p:cNvPicPr>
+          <p:nvPr/>
+        </p:nvPicPr>
+        <p:blipFill>
+          <a:blip r:embed="rId3">
+            <a:extLst>
+              <a:ext uri="{28A0092B-C50C-407E-A947-70E740481C1C}">
+                <a14:useLocalDpi xmlns:a14="http://schemas.microsoft.com/office/drawing/2010/main" val="0"/>
+              </a:ext>
+            </a:extLst>
+          </a:blip>
+          <a:srcRect/>
+          <a:stretch>
+            <a:fillRect/>
+          </a:stretch>
+        </p:blipFill>
+        <p:spPr bwMode="auto">
+          <a:xfrm>
+            <a:off x="7869289" y="209383"/>
+            <a:ext cx="4182403" cy="1000945"/>
+          </a:xfrm>
+          <a:prstGeom prst="rect">
+            <a:avLst/>
+          </a:prstGeom>
+          <a:noFill/>
+          <a:extLst>
+            <a:ext uri="{909E8E84-426E-40DD-AFC4-6F175D3DCCD1}">
+              <a14:hiddenFill xmlns:a14="http://schemas.microsoft.com/office/drawing/2010/main">
+                <a:solidFill>
+                  <a:srgbClr val="FFFFFF"/>
+                </a:solidFill>
+              </a14:hiddenFill>
+            </a:ext>
+          </a:extLst>
+        </p:spPr>
+      </p:pic>
       <p:sp>
         <p:nvSpPr>
           <p:cNvPr id="16" name="Rectangle 15">
@@ -3930,88 +3894,104 @@
           </a:p>
         </p:txBody>
       </p:sp>
-      <p:pic>
-        <p:nvPicPr>
-          <p:cNvPr id="4" name="object 23">
-            <a:hlinkClick r:id="rId3"/>
+      <p:sp>
+        <p:nvSpPr>
+          <p:cNvPr id="3" name="Subtitle 2">
             <a:extLst>
               <a:ext uri="{FF2B5EF4-FFF2-40B4-BE49-F238E27FC236}">
-                <a16:creationId xmlns:a16="http://schemas.microsoft.com/office/drawing/2014/main" id="{3CBD6548-3D4E-9A40-CA35-355261D4E92C}"/>
+                <a16:creationId xmlns:a16="http://schemas.microsoft.com/office/drawing/2014/main" id="{7FFF10C2-8C10-0E89-D285-D614C36EEE69}"/>
+              </a:ext>
+              <a:ext uri="{C183D7F6-B498-43B3-948B-1728B52AA6E4}">
+                <adec:decorative xmlns:adec="http://schemas.microsoft.com/office/drawing/2017/decorative" val="1"/>
               </a:ext>
             </a:extLst>
           </p:cNvPr>
-          <p:cNvPicPr/>
-          <p:nvPr/>
-        </p:nvPicPr>
-        <p:blipFill>
-          <a:blip r:embed="rId4" cstate="print"/>
-          <a:stretch>
-            <a:fillRect/>
-          </a:stretch>
-        </p:blipFill>
+          <p:cNvSpPr>
+            <a:spLocks noGrp="1"/>
+          </p:cNvSpPr>
+          <p:nvPr>
+            <p:ph type="subTitle" idx="1"/>
+          </p:nvPr>
+        </p:nvSpPr>
         <p:spPr>
           <a:xfrm>
-            <a:off x="10961016" y="6265038"/>
-            <a:ext cx="1037459" cy="383579"/>
+            <a:off x="477982" y="4868822"/>
+            <a:ext cx="4169519" cy="1443894"/>
           </a:xfrm>
-          <a:prstGeom prst="rect">
-            <a:avLst/>
-          </a:prstGeom>
         </p:spPr>
-      </p:pic>
-      <p:pic>
-        <p:nvPicPr>
-          <p:cNvPr id="6" name="Picture 5">
-            <a:extLst>
-              <a:ext uri="{FF2B5EF4-FFF2-40B4-BE49-F238E27FC236}">
-                <a16:creationId xmlns:a16="http://schemas.microsoft.com/office/drawing/2014/main" id="{8AD28C7D-14A3-CFEB-3DEC-2E01272844F2}"/>
-              </a:ext>
-            </a:extLst>
-          </p:cNvPr>
-          <p:cNvPicPr>
-            <a:picLocks noChangeAspect="1" noChangeArrowheads="1"/>
-          </p:cNvPicPr>
-          <p:nvPr/>
-        </p:nvPicPr>
-        <p:blipFill>
-          <a:blip r:embed="rId5">
-            <a:extLst>
-              <a:ext uri="{28A0092B-C50C-407E-A947-70E740481C1C}">
-                <a14:useLocalDpi xmlns:a14="http://schemas.microsoft.com/office/drawing/2010/main" val="0"/>
-              </a:ext>
-            </a:extLst>
-          </a:blip>
-          <a:srcRect/>
-          <a:stretch>
-            <a:fillRect/>
-          </a:stretch>
-        </p:blipFill>
-        <p:spPr bwMode="auto">
-          <a:xfrm>
-            <a:off x="7869289" y="209383"/>
-            <a:ext cx="4182403" cy="1000945"/>
-          </a:xfrm>
-          <a:prstGeom prst="rect">
-            <a:avLst/>
-          </a:prstGeom>
-          <a:noFill/>
-          <a:extLst>
-            <a:ext uri="{909E8E84-426E-40DD-AFC4-6F175D3DCCD1}">
-              <a14:hiddenFill xmlns:a14="http://schemas.microsoft.com/office/drawing/2010/main">
+        <p:txBody>
+          <a:bodyPr>
+            <a:normAutofit fontScale="92500"/>
+          </a:bodyPr>
+          <a:lstStyle/>
+          <a:p>
+            <a:pPr algn="l"/>
+            <a:r>
+              <a:rPr lang="en-US" sz="1700" dirty="0">
                 <a:solidFill>
-                  <a:srgbClr val="FFFFFF"/>
+                  <a:schemeClr val="bg1"/>
                 </a:solidFill>
-              </a14:hiddenFill>
-            </a:ext>
-          </a:extLst>
-        </p:spPr>
-      </p:pic>
+              </a:rPr>
+              <a:t>Michael Hahsler, SMU</a:t>
+            </a:r>
+          </a:p>
+          <a:p>
+            <a:pPr algn="l"/>
+            <a:r>
+              <a:rPr lang="en-US" sz="1300" dirty="0">
+                <a:solidFill>
+                  <a:schemeClr val="bg1"/>
+                </a:solidFill>
+              </a:rPr>
+              <a:t>With figures from Sutton/Barto*</a:t>
+            </a:r>
+          </a:p>
+          <a:p>
+            <a:pPr algn="l"/>
+            <a:endParaRPr lang="en-US" sz="1300" dirty="0">
+              <a:solidFill>
+                <a:schemeClr val="bg1"/>
+              </a:solidFill>
+            </a:endParaRPr>
+          </a:p>
+          <a:p>
+            <a:pPr algn="l"/>
+            <a:r>
+              <a:rPr lang="en-US" sz="1300" dirty="0">
+                <a:solidFill>
+                  <a:schemeClr val="bg1"/>
+                </a:solidFill>
+              </a:rPr>
+              <a:t>*Sutton and Barto, Reinforcement Learning: An Introduction, 2</a:t>
+            </a:r>
+            <a:r>
+              <a:rPr lang="en-US" sz="1300" baseline="30000" dirty="0">
+                <a:solidFill>
+                  <a:schemeClr val="bg1"/>
+                </a:solidFill>
+              </a:rPr>
+              <a:t>nd</a:t>
+            </a:r>
+            <a:r>
+              <a:rPr lang="en-US" sz="1300" dirty="0">
+                <a:solidFill>
+                  <a:schemeClr val="bg1"/>
+                </a:solidFill>
+              </a:rPr>
+              <a:t> edition, MIT Press, Cambridge, MA, 2018</a:t>
+            </a:r>
+          </a:p>
+        </p:txBody>
+      </p:sp>
       <p:grpSp>
         <p:nvGrpSpPr>
           <p:cNvPr id="7" name="Group 6">
             <a:extLst>
               <a:ext uri="{FF2B5EF4-FFF2-40B4-BE49-F238E27FC236}">
                 <a16:creationId xmlns:a16="http://schemas.microsoft.com/office/drawing/2014/main" id="{F1C24C8A-95D3-8F99-1FB0-70508AB77601}"/>
+              </a:ext>
+              <a:ext uri="{C183D7F6-B498-43B3-948B-1728B52AA6E4}">
+                <adec:decorative xmlns:adec="http://schemas.microsoft.com/office/drawing/2017/decorative" val="1"/>
               </a:ext>
             </a:extLst>
           </p:cNvPr>
@@ -4033,6 +4013,9 @@
                 <a:ext uri="{FF2B5EF4-FFF2-40B4-BE49-F238E27FC236}">
                   <a16:creationId xmlns:a16="http://schemas.microsoft.com/office/drawing/2014/main" id="{1C3B0490-3071-FC79-8647-56FAA92E213A}"/>
                 </a:ext>
+                <a:ext uri="{C183D7F6-B498-43B3-948B-1728B52AA6E4}">
+                  <adec:decorative xmlns:adec="http://schemas.microsoft.com/office/drawing/2017/decorative" val="1"/>
+                </a:ext>
               </a:extLst>
             </p:cNvPr>
             <p:cNvPicPr>
@@ -4041,7 +4024,7 @@
             <p:nvPr/>
           </p:nvPicPr>
           <p:blipFill>
-            <a:blip r:embed="rId6"/>
+            <a:blip r:embed="rId4"/>
             <a:stretch>
               <a:fillRect/>
             </a:stretch>
@@ -4058,7 +4041,7 @@
         </p:pic>
         <p:pic>
           <p:nvPicPr>
-            <p:cNvPr id="9" name="Picture 8">
+            <p:cNvPr id="9" name="Picture 8" descr="QR code linking to the online course material.">
               <a:extLst>
                 <a:ext uri="{FF2B5EF4-FFF2-40B4-BE49-F238E27FC236}">
                   <a16:creationId xmlns:a16="http://schemas.microsoft.com/office/drawing/2014/main" id="{DFB0167B-6BE4-3396-4D41-07DD00E5B926}"/>
@@ -4071,7 +4054,7 @@
             <p:nvPr/>
           </p:nvPicPr>
           <p:blipFill>
-            <a:blip r:embed="rId7"/>
+            <a:blip r:embed="rId5"/>
             <a:stretch>
               <a:fillRect/>
             </a:stretch>
@@ -4087,6 +4070,38 @@
           </p:spPr>
         </p:pic>
       </p:grpSp>
+      <p:pic>
+        <p:nvPicPr>
+          <p:cNvPr id="4" name="object 23">
+            <a:hlinkClick r:id="rId6"/>
+            <a:extLst>
+              <a:ext uri="{FF2B5EF4-FFF2-40B4-BE49-F238E27FC236}">
+                <a16:creationId xmlns:a16="http://schemas.microsoft.com/office/drawing/2014/main" id="{3CBD6548-3D4E-9A40-CA35-355261D4E92C}"/>
+              </a:ext>
+              <a:ext uri="{C183D7F6-B498-43B3-948B-1728B52AA6E4}">
+                <adec:decorative xmlns:adec="http://schemas.microsoft.com/office/drawing/2017/decorative" val="1"/>
+              </a:ext>
+            </a:extLst>
+          </p:cNvPr>
+          <p:cNvPicPr/>
+          <p:nvPr/>
+        </p:nvPicPr>
+        <p:blipFill>
+          <a:blip r:embed="rId7" cstate="print"/>
+          <a:stretch>
+            <a:fillRect/>
+          </a:stretch>
+        </p:blipFill>
+        <p:spPr>
+          <a:xfrm>
+            <a:off x="10961016" y="6265038"/>
+            <a:ext cx="1037459" cy="383579"/>
+          </a:xfrm>
+          <a:prstGeom prst="rect">
+            <a:avLst/>
+          </a:prstGeom>
+        </p:spPr>
+      </p:pic>
     </p:spTree>
     <p:extLst>
       <p:ext uri="{BB962C8B-B14F-4D97-AF65-F5344CB8AC3E}">
@@ -4149,7 +4164,414 @@
         <mc:Choice Requires="a14">
           <p:sp>
             <p:nvSpPr>
-              <p:cNvPr id="3" name="Content Placeholder 2">
+              <p:cNvPr id="9" name="Content Placeholder 2" descr="Normal stochastic gradient-ascent algorithm update: theta sub t plus 1, equals theta sub t plus alpha gradient of J (theta sub t)">
+                <a:extLst>
+                  <a:ext uri="{FF2B5EF4-FFF2-40B4-BE49-F238E27FC236}">
+                    <a16:creationId xmlns:a16="http://schemas.microsoft.com/office/drawing/2014/main" id="{7250DF70-B205-0F67-A022-8658B6D83F38}"/>
+                  </a:ext>
+                </a:extLst>
+              </p:cNvPr>
+              <p:cNvSpPr txBox="1">
+                <a:spLocks/>
+              </p:cNvSpPr>
+              <p:nvPr/>
+            </p:nvSpPr>
+            <p:spPr>
+              <a:xfrm>
+                <a:off x="838199" y="1129111"/>
+                <a:ext cx="10169502" cy="999492"/>
+              </a:xfrm>
+              <a:prstGeom prst="rect">
+                <a:avLst/>
+              </a:prstGeom>
+            </p:spPr>
+            <p:txBody>
+              <a:bodyPr vert="horz" lIns="91440" tIns="45720" rIns="91440" bIns="45720" rtlCol="0">
+                <a:normAutofit/>
+              </a:bodyPr>
+              <a:lstStyle>
+                <a:lvl1pPr marL="228600" indent="-228600" algn="l" defTabSz="914400" rtl="0" eaLnBrk="1" latinLnBrk="0" hangingPunct="1">
+                  <a:lnSpc>
+                    <a:spcPct val="90000"/>
+                  </a:lnSpc>
+                  <a:spcBef>
+                    <a:spcPts val="1000"/>
+                  </a:spcBef>
+                  <a:buFont typeface="Arial" panose="020B0604020202020204" pitchFamily="34" charset="0"/>
+                  <a:buChar char="•"/>
+                  <a:defRPr sz="2800" kern="1200">
+                    <a:solidFill>
+                      <a:schemeClr val="tx1"/>
+                    </a:solidFill>
+                    <a:latin typeface="+mn-lt"/>
+                    <a:ea typeface="+mn-ea"/>
+                    <a:cs typeface="+mn-cs"/>
+                  </a:defRPr>
+                </a:lvl1pPr>
+                <a:lvl2pPr marL="685800" indent="-228600" algn="l" defTabSz="914400" rtl="0" eaLnBrk="1" latinLnBrk="0" hangingPunct="1">
+                  <a:lnSpc>
+                    <a:spcPct val="90000"/>
+                  </a:lnSpc>
+                  <a:spcBef>
+                    <a:spcPts val="500"/>
+                  </a:spcBef>
+                  <a:buFont typeface="Arial" panose="020B0604020202020204" pitchFamily="34" charset="0"/>
+                  <a:buChar char="•"/>
+                  <a:defRPr sz="2400" kern="1200">
+                    <a:solidFill>
+                      <a:schemeClr val="tx1"/>
+                    </a:solidFill>
+                    <a:latin typeface="+mn-lt"/>
+                    <a:ea typeface="+mn-ea"/>
+                    <a:cs typeface="+mn-cs"/>
+                  </a:defRPr>
+                </a:lvl2pPr>
+                <a:lvl3pPr marL="1143000" indent="-228600" algn="l" defTabSz="914400" rtl="0" eaLnBrk="1" latinLnBrk="0" hangingPunct="1">
+                  <a:lnSpc>
+                    <a:spcPct val="90000"/>
+                  </a:lnSpc>
+                  <a:spcBef>
+                    <a:spcPts val="500"/>
+                  </a:spcBef>
+                  <a:buFont typeface="Arial" panose="020B0604020202020204" pitchFamily="34" charset="0"/>
+                  <a:buChar char="•"/>
+                  <a:defRPr sz="2000" kern="1200">
+                    <a:solidFill>
+                      <a:schemeClr val="tx1"/>
+                    </a:solidFill>
+                    <a:latin typeface="+mn-lt"/>
+                    <a:ea typeface="+mn-ea"/>
+                    <a:cs typeface="+mn-cs"/>
+                  </a:defRPr>
+                </a:lvl3pPr>
+                <a:lvl4pPr marL="1600200" indent="-228600" algn="l" defTabSz="914400" rtl="0" eaLnBrk="1" latinLnBrk="0" hangingPunct="1">
+                  <a:lnSpc>
+                    <a:spcPct val="90000"/>
+                  </a:lnSpc>
+                  <a:spcBef>
+                    <a:spcPts val="500"/>
+                  </a:spcBef>
+                  <a:buFont typeface="Arial" panose="020B0604020202020204" pitchFamily="34" charset="0"/>
+                  <a:buChar char="•"/>
+                  <a:defRPr sz="1800" kern="1200">
+                    <a:solidFill>
+                      <a:schemeClr val="tx1"/>
+                    </a:solidFill>
+                    <a:latin typeface="+mn-lt"/>
+                    <a:ea typeface="+mn-ea"/>
+                    <a:cs typeface="+mn-cs"/>
+                  </a:defRPr>
+                </a:lvl4pPr>
+                <a:lvl5pPr marL="2057400" indent="-228600" algn="l" defTabSz="914400" rtl="0" eaLnBrk="1" latinLnBrk="0" hangingPunct="1">
+                  <a:lnSpc>
+                    <a:spcPct val="90000"/>
+                  </a:lnSpc>
+                  <a:spcBef>
+                    <a:spcPts val="500"/>
+                  </a:spcBef>
+                  <a:buFont typeface="Arial" panose="020B0604020202020204" pitchFamily="34" charset="0"/>
+                  <a:buChar char="•"/>
+                  <a:defRPr sz="1800" kern="1200">
+                    <a:solidFill>
+                      <a:schemeClr val="tx1"/>
+                    </a:solidFill>
+                    <a:latin typeface="+mn-lt"/>
+                    <a:ea typeface="+mn-ea"/>
+                    <a:cs typeface="+mn-cs"/>
+                  </a:defRPr>
+                </a:lvl5pPr>
+                <a:lvl6pPr marL="2514600" indent="-228600" algn="l" defTabSz="914400" rtl="0" eaLnBrk="1" latinLnBrk="0" hangingPunct="1">
+                  <a:lnSpc>
+                    <a:spcPct val="90000"/>
+                  </a:lnSpc>
+                  <a:spcBef>
+                    <a:spcPts val="500"/>
+                  </a:spcBef>
+                  <a:buFont typeface="Arial" panose="020B0604020202020204" pitchFamily="34" charset="0"/>
+                  <a:buChar char="•"/>
+                  <a:defRPr sz="1800" kern="1200">
+                    <a:solidFill>
+                      <a:schemeClr val="tx1"/>
+                    </a:solidFill>
+                    <a:latin typeface="+mn-lt"/>
+                    <a:ea typeface="+mn-ea"/>
+                    <a:cs typeface="+mn-cs"/>
+                  </a:defRPr>
+                </a:lvl6pPr>
+                <a:lvl7pPr marL="2971800" indent="-228600" algn="l" defTabSz="914400" rtl="0" eaLnBrk="1" latinLnBrk="0" hangingPunct="1">
+                  <a:lnSpc>
+                    <a:spcPct val="90000"/>
+                  </a:lnSpc>
+                  <a:spcBef>
+                    <a:spcPts val="500"/>
+                  </a:spcBef>
+                  <a:buFont typeface="Arial" panose="020B0604020202020204" pitchFamily="34" charset="0"/>
+                  <a:buChar char="•"/>
+                  <a:defRPr sz="1800" kern="1200">
+                    <a:solidFill>
+                      <a:schemeClr val="tx1"/>
+                    </a:solidFill>
+                    <a:latin typeface="+mn-lt"/>
+                    <a:ea typeface="+mn-ea"/>
+                    <a:cs typeface="+mn-cs"/>
+                  </a:defRPr>
+                </a:lvl7pPr>
+                <a:lvl8pPr marL="3429000" indent="-228600" algn="l" defTabSz="914400" rtl="0" eaLnBrk="1" latinLnBrk="0" hangingPunct="1">
+                  <a:lnSpc>
+                    <a:spcPct val="90000"/>
+                  </a:lnSpc>
+                  <a:spcBef>
+                    <a:spcPts val="500"/>
+                  </a:spcBef>
+                  <a:buFont typeface="Arial" panose="020B0604020202020204" pitchFamily="34" charset="0"/>
+                  <a:buChar char="•"/>
+                  <a:defRPr sz="1800" kern="1200">
+                    <a:solidFill>
+                      <a:schemeClr val="tx1"/>
+                    </a:solidFill>
+                    <a:latin typeface="+mn-lt"/>
+                    <a:ea typeface="+mn-ea"/>
+                    <a:cs typeface="+mn-cs"/>
+                  </a:defRPr>
+                </a:lvl8pPr>
+                <a:lvl9pPr marL="3886200" indent="-228600" algn="l" defTabSz="914400" rtl="0" eaLnBrk="1" latinLnBrk="0" hangingPunct="1">
+                  <a:lnSpc>
+                    <a:spcPct val="90000"/>
+                  </a:lnSpc>
+                  <a:spcBef>
+                    <a:spcPts val="500"/>
+                  </a:spcBef>
+                  <a:buFont typeface="Arial" panose="020B0604020202020204" pitchFamily="34" charset="0"/>
+                  <a:buChar char="•"/>
+                  <a:defRPr sz="1800" kern="1200">
+                    <a:solidFill>
+                      <a:schemeClr val="tx1"/>
+                    </a:solidFill>
+                    <a:latin typeface="+mn-lt"/>
+                    <a:ea typeface="+mn-ea"/>
+                    <a:cs typeface="+mn-cs"/>
+                  </a:defRPr>
+                </a:lvl9pPr>
+              </a:lstStyle>
+              <a:p>
+                <a:pPr marL="0" indent="0">
+                  <a:buNone/>
+                </a:pPr>
+                <a:r>
+                  <a:rPr lang="en-US" sz="2000" dirty="0"/>
+                  <a:t>Normal stochastic gradient-ascent algorithm update:      </a:t>
+                </a:r>
+                <a14:m>
+                  <m:oMath xmlns:m="http://schemas.openxmlformats.org/officeDocument/2006/math">
+                    <m:sSub>
+                      <m:sSubPr>
+                        <m:ctrlPr>
+                          <a:rPr lang="en-US" sz="2000" b="1" i="1">
+                            <a:latin typeface="Cambria Math" panose="02040503050406030204" pitchFamily="18" charset="0"/>
+                          </a:rPr>
+                        </m:ctrlPr>
+                      </m:sSubPr>
+                      <m:e>
+                        <m:r>
+                          <a:rPr lang="en-US" sz="2000" b="1" i="1">
+                            <a:latin typeface="Cambria Math" panose="02040503050406030204" pitchFamily="18" charset="0"/>
+                          </a:rPr>
+                          <m:t>𝜽</m:t>
+                        </m:r>
+                      </m:e>
+                      <m:sub>
+                        <m:r>
+                          <a:rPr lang="en-US" sz="2000" i="1">
+                            <a:latin typeface="Cambria Math" panose="02040503050406030204" pitchFamily="18" charset="0"/>
+                          </a:rPr>
+                          <m:t>𝑡</m:t>
+                        </m:r>
+                        <m:r>
+                          <a:rPr lang="en-US" sz="2000" i="1">
+                            <a:latin typeface="Cambria Math" panose="02040503050406030204" pitchFamily="18" charset="0"/>
+                          </a:rPr>
+                          <m:t>+1</m:t>
+                        </m:r>
+                      </m:sub>
+                    </m:sSub>
+                    <m:r>
+                      <a:rPr lang="en-US" sz="2000" b="0" i="1" smtClean="0">
+                        <a:latin typeface="Cambria Math" panose="02040503050406030204" pitchFamily="18" charset="0"/>
+                      </a:rPr>
+                      <m:t>=</m:t>
+                    </m:r>
+                    <m:sSub>
+                      <m:sSubPr>
+                        <m:ctrlPr>
+                          <a:rPr lang="en-US" sz="2000" b="1" i="1">
+                            <a:latin typeface="Cambria Math" panose="02040503050406030204" pitchFamily="18" charset="0"/>
+                          </a:rPr>
+                        </m:ctrlPr>
+                      </m:sSubPr>
+                      <m:e>
+                        <m:r>
+                          <a:rPr lang="en-US" sz="2000" b="1" i="1">
+                            <a:latin typeface="Cambria Math" panose="02040503050406030204" pitchFamily="18" charset="0"/>
+                          </a:rPr>
+                          <m:t>𝜽</m:t>
+                        </m:r>
+                      </m:e>
+                      <m:sub>
+                        <m:r>
+                          <a:rPr lang="en-US" sz="2000" i="1">
+                            <a:latin typeface="Cambria Math" panose="02040503050406030204" pitchFamily="18" charset="0"/>
+                          </a:rPr>
+                          <m:t>𝑡</m:t>
+                        </m:r>
+                      </m:sub>
+                    </m:sSub>
+                    <m:r>
+                      <a:rPr lang="en-US" sz="2000" i="1" smtClean="0">
+                        <a:latin typeface="Cambria Math" panose="02040503050406030204" pitchFamily="18" charset="0"/>
+                      </a:rPr>
+                      <m:t>+</m:t>
+                    </m:r>
+                    <m:r>
+                      <a:rPr lang="en-US" sz="2000" i="1" smtClean="0">
+                        <a:latin typeface="Cambria Math" panose="02040503050406030204" pitchFamily="18" charset="0"/>
+                      </a:rPr>
+                      <m:t>𝛼</m:t>
+                    </m:r>
+                  </m:oMath>
+                </a14:m>
+                <a:r>
+                  <a:rPr lang="en-US" sz="2000" dirty="0">
+                    <a:ea typeface="Cambria Math" panose="02040503050406030204" pitchFamily="18" charset="0"/>
+                  </a:rPr>
+                  <a:t> </a:t>
+                </a:r>
+                <a14:m>
+                  <m:oMath xmlns:m="http://schemas.openxmlformats.org/officeDocument/2006/math">
+                    <m:r>
+                      <m:rPr>
+                        <m:sty m:val="p"/>
+                      </m:rPr>
+                      <a:rPr lang="en-US" sz="2000" i="1" smtClean="0">
+                        <a:latin typeface="Cambria Math" panose="02040503050406030204" pitchFamily="18" charset="0"/>
+                        <a:ea typeface="Cambria Math" panose="02040503050406030204" pitchFamily="18" charset="0"/>
+                      </a:rPr>
+                      <m:t>∇</m:t>
+                    </m:r>
+                    <m:r>
+                      <a:rPr lang="en-US" sz="2000" i="1" smtClean="0">
+                        <a:latin typeface="Cambria Math" panose="02040503050406030204" pitchFamily="18" charset="0"/>
+                        <a:ea typeface="Cambria Math" panose="02040503050406030204" pitchFamily="18" charset="0"/>
+                      </a:rPr>
+                      <m:t>𝐽</m:t>
+                    </m:r>
+                    <m:d>
+                      <m:dPr>
+                        <m:ctrlPr>
+                          <a:rPr lang="en-US" sz="2000" i="1">
+                            <a:latin typeface="Cambria Math" panose="02040503050406030204" pitchFamily="18" charset="0"/>
+                            <a:ea typeface="Cambria Math" panose="02040503050406030204" pitchFamily="18" charset="0"/>
+                          </a:rPr>
+                        </m:ctrlPr>
+                      </m:dPr>
+                      <m:e>
+                        <m:sSub>
+                          <m:sSubPr>
+                            <m:ctrlPr>
+                              <a:rPr lang="en-US" sz="2000" b="1" i="1">
+                                <a:latin typeface="Cambria Math" panose="02040503050406030204" pitchFamily="18" charset="0"/>
+                                <a:ea typeface="Cambria Math" panose="02040503050406030204" pitchFamily="18" charset="0"/>
+                              </a:rPr>
+                            </m:ctrlPr>
+                          </m:sSubPr>
+                          <m:e>
+                            <m:r>
+                              <a:rPr lang="en-US" sz="2000" b="1" i="1">
+                                <a:latin typeface="Cambria Math" panose="02040503050406030204" pitchFamily="18" charset="0"/>
+                                <a:ea typeface="Cambria Math" panose="02040503050406030204" pitchFamily="18" charset="0"/>
+                              </a:rPr>
+                              <m:t>𝜽</m:t>
+                            </m:r>
+                          </m:e>
+                          <m:sub>
+                            <m:r>
+                              <a:rPr lang="en-US" sz="2000" i="1">
+                                <a:latin typeface="Cambria Math" panose="02040503050406030204" pitchFamily="18" charset="0"/>
+                                <a:ea typeface="Cambria Math" panose="02040503050406030204" pitchFamily="18" charset="0"/>
+                              </a:rPr>
+                              <m:t>𝑡</m:t>
+                            </m:r>
+                          </m:sub>
+                        </m:sSub>
+                      </m:e>
+                    </m:d>
+                  </m:oMath>
+                </a14:m>
+                <a:endParaRPr lang="en-US" sz="2000" b="0" i="1" dirty="0">
+                  <a:latin typeface="Cambria Math" panose="02040503050406030204" pitchFamily="18" charset="0"/>
+                  <a:ea typeface="Cambria Math" panose="02040503050406030204" pitchFamily="18" charset="0"/>
+                </a:endParaRPr>
+              </a:p>
+              <a:p>
+                <a:pPr marL="0" indent="0">
+                  <a:buNone/>
+                </a:pPr>
+                <a:endParaRPr lang="en-US" sz="2000" b="0" dirty="0">
+                  <a:ea typeface="Cambria Math" panose="02040503050406030204" pitchFamily="18" charset="0"/>
+                </a:endParaRPr>
+              </a:p>
+            </p:txBody>
+          </p:sp>
+        </mc:Choice>
+        <mc:Fallback xmlns="">
+          <p:sp>
+            <p:nvSpPr>
+              <p:cNvPr id="9" name="Content Placeholder 2" descr="Normal stochastic gradient-ascent algorithm update: theta sub t plus 1, equals theta sub t plus alpha gradient of J (theta sub t)">
+                <a:extLst>
+                  <a:ext uri="{FF2B5EF4-FFF2-40B4-BE49-F238E27FC236}">
+                    <a16:creationId xmlns:a16="http://schemas.microsoft.com/office/drawing/2014/main" id="{7250DF70-B205-0F67-A022-8658B6D83F38}"/>
+                  </a:ext>
+                </a:extLst>
+              </p:cNvPr>
+              <p:cNvSpPr txBox="1">
+                <a:spLocks noRot="1" noChangeAspect="1" noMove="1" noResize="1" noEditPoints="1" noAdjustHandles="1" noChangeArrowheads="1" noChangeShapeType="1" noTextEdit="1"/>
+              </p:cNvSpPr>
+              <p:nvPr/>
+            </p:nvSpPr>
+            <p:spPr>
+              <a:xfrm>
+                <a:off x="838199" y="1129111"/>
+                <a:ext cx="10169502" cy="999492"/>
+              </a:xfrm>
+              <a:prstGeom prst="rect">
+                <a:avLst/>
+              </a:prstGeom>
+              <a:blipFill>
+                <a:blip r:embed="rId6"/>
+                <a:stretch>
+                  <a:fillRect l="-599" t="-5488"/>
+                </a:stretch>
+              </a:blipFill>
+            </p:spPr>
+            <p:txBody>
+              <a:bodyPr/>
+              <a:lstStyle/>
+              <a:p>
+                <a:r>
+                  <a:rPr lang="en-US">
+                    <a:noFill/>
+                  </a:rPr>
+                  <a:t> </a:t>
+                </a:r>
+              </a:p>
+            </p:txBody>
+          </p:sp>
+        </mc:Fallback>
+      </mc:AlternateContent>
+      <mc:AlternateContent xmlns:mc="http://schemas.openxmlformats.org/markup-compatibility/2006" xmlns:a14="http://schemas.microsoft.com/office/drawing/2010/main">
+        <mc:Choice Requires="a14">
+          <p:sp>
+            <p:nvSpPr>
+              <p:cNvPr id="3" name="Content Placeholder 2" descr="Equation: gradient of J (theta) is proportional to the sum over s, of mu (s) the sum over a, of q sub pi (s,a) gradient of pi (a given s, theta); equals E sub pi [the sum over a, of pi (A sub t given S sub t, theta) q sub pi (S sub t,a) the fraction gradient of pi (A sub t given S sub t, theta), over pi (A sub t given S sub t, theta), end fraction];; equals E sub pi [G sub t the fraction gradient of pi (A sub t given S sub t, theta), over pi (A sub t given S sub t, theta), end fraction];; equals E sub pi [G sub t ln of gradient of pi (A sub t given S sub t, theta)]">
                 <a:extLst>
                   <a:ext uri="{FF2B5EF4-FFF2-40B4-BE49-F238E27FC236}">
                     <a16:creationId xmlns:a16="http://schemas.microsoft.com/office/drawing/2014/main" id="{F3692E5E-4E0F-A07A-A76B-D89BC62C9917}"/>
@@ -4180,10 +4602,7 @@
                 </a:pPr>
                 <a14:m>
                   <m:oMathPara xmlns:m="http://schemas.openxmlformats.org/officeDocument/2006/math">
-                    <m:oMathParaPr>
-                      <m:jc m:val="centerGroup"/>
-                    </m:oMathParaPr>
-                    <m:oMath xmlns:m="http://schemas.openxmlformats.org/officeDocument/2006/math">
+                    <m:oMath>
                       <m:r>
                         <m:rPr>
                           <m:sty m:val="p"/>
@@ -4204,7 +4623,7 @@
                       <m:d>
                         <m:dPr>
                           <m:ctrlPr>
-                            <a:rPr lang="en-US" i="1">
+                            <a:rPr lang="en-US" b="1" i="1">
                               <a:latin typeface="Cambria Math" panose="02040503050406030204" pitchFamily="18" charset="0"/>
                               <a:ea typeface="Cambria Math" panose="02040503050406030204" pitchFamily="18" charset="0"/>
                             </a:rPr>
@@ -4425,7 +4844,7 @@
                         </m:e>
                       </m:nary>
                     </m:oMath>
-                    <m:oMath xmlns:m="http://schemas.openxmlformats.org/officeDocument/2006/math">
+                    <m:oMath>
                       <m:r>
                         <m:rPr>
                           <m:aln/>
@@ -4469,7 +4888,7 @@
                           <m:begChr m:val="["/>
                           <m:endChr m:val="]"/>
                           <m:ctrlPr>
-                            <a:rPr lang="en-US" b="0" i="1" smtClean="0">
+                            <a:rPr lang="en-US" i="1">
                               <a:latin typeface="Cambria Math" panose="02040503050406030204" pitchFamily="18" charset="0"/>
                               <a:ea typeface="Cambria Math" panose="02040503050406030204" pitchFamily="18" charset="0"/>
                             </a:rPr>
@@ -4620,7 +5039,7 @@
                               <m:d>
                                 <m:dPr>
                                   <m:ctrlPr>
-                                    <a:rPr lang="en-US" i="1">
+                                    <a:rPr lang="en-US" b="0" i="1" smtClean="0">
                                       <a:latin typeface="Cambria Math" panose="02040503050406030204" pitchFamily="18" charset="0"/>
                                       <a:ea typeface="Cambria Math" panose="02040503050406030204" pitchFamily="18" charset="0"/>
                                     </a:rPr>
@@ -4896,7 +5315,7 @@
                         </m:e>
                       </m:d>
                     </m:oMath>
-                    <m:oMath xmlns:m="http://schemas.openxmlformats.org/officeDocument/2006/math">
+                    <m:oMath>
                       <m:r>
                         <a:rPr lang="en-US" b="0" i="1" smtClean="0">
                           <a:latin typeface="Cambria Math" panose="02040503050406030204" pitchFamily="18" charset="0"/>
@@ -4905,7 +5324,7 @@
                         <m:t> </m:t>
                       </m:r>
                     </m:oMath>
-                    <m:oMath xmlns:m="http://schemas.openxmlformats.org/officeDocument/2006/math">
+                    <m:oMath>
                       <m:r>
                         <m:rPr>
                           <m:aln/>
@@ -4949,7 +5368,7 @@
                           <m:begChr m:val="["/>
                           <m:endChr m:val="]"/>
                           <m:ctrlPr>
-                            <a:rPr lang="en-US" i="1">
+                            <a:rPr lang="en-US" b="0" i="1" smtClean="0">
                               <a:latin typeface="Cambria Math" panose="02040503050406030204" pitchFamily="18" charset="0"/>
                               <a:ea typeface="Cambria Math" panose="02040503050406030204" pitchFamily="18" charset="0"/>
                             </a:rPr>
@@ -4959,7 +5378,7 @@
                           <m:sSub>
                             <m:sSubPr>
                               <m:ctrlPr>
-                                <a:rPr lang="en-US" b="0" i="1" smtClean="0">
+                                <a:rPr lang="en-US" i="1" smtClean="0">
                                   <a:latin typeface="Cambria Math" panose="02040503050406030204" pitchFamily="18" charset="0"/>
                                   <a:ea typeface="Cambria Math" panose="02040503050406030204" pitchFamily="18" charset="0"/>
                                 </a:rPr>
@@ -5207,7 +5626,7 @@
                         </m:e>
                       </m:d>
                     </m:oMath>
-                    <m:oMath xmlns:m="http://schemas.openxmlformats.org/officeDocument/2006/math">
+                    <m:oMath>
                       <m:r>
                         <a:rPr lang="en-US" b="0" i="1" smtClean="0">
                           <a:latin typeface="Cambria Math" panose="02040503050406030204" pitchFamily="18" charset="0"/>
@@ -5216,7 +5635,7 @@
                         <m:t> </m:t>
                       </m:r>
                     </m:oMath>
-                    <m:oMath xmlns:m="http://schemas.openxmlformats.org/officeDocument/2006/math">
+                    <m:oMath>
                       <m:r>
                         <m:rPr>
                           <m:aln/>
@@ -5298,7 +5717,7 @@
                           <m:func>
                             <m:funcPr>
                               <m:ctrlPr>
-                                <a:rPr lang="en-US" b="0" i="1" smtClean="0">
+                                <a:rPr lang="en-US" b="0" i="0" smtClean="0">
                                   <a:latin typeface="Cambria Math" panose="02040503050406030204" pitchFamily="18" charset="0"/>
                                   <a:ea typeface="Cambria Math" panose="02040503050406030204" pitchFamily="18" charset="0"/>
                                 </a:rPr>
@@ -5443,7 +5862,7 @@
         <mc:Fallback xmlns="">
           <p:sp>
             <p:nvSpPr>
-              <p:cNvPr id="3" name="Content Placeholder 2">
+              <p:cNvPr id="3" name="Content Placeholder 2" descr="Equation: gradient of J (theta) is proportional to the sum over s, of mu (s) the sum over a, of q sub pi (s,a) gradient of pi (a given s, theta); equals E sub pi [the sum over a, of pi (A sub t given S sub t, theta) q sub pi (S sub t,a) the fraction gradient of pi (A sub t given S sub t, theta), over pi (A sub t given S sub t, theta), end fraction];; equals E sub pi [G sub t the fraction gradient of pi (A sub t given S sub t, theta), over pi (A sub t given S sub t, theta), end fraction];; equals E sub pi [G sub t ln of gradient of pi (A sub t given S sub t, theta)]">
                 <a:extLst>
                   <a:ext uri="{FF2B5EF4-FFF2-40B4-BE49-F238E27FC236}">
                     <a16:creationId xmlns:a16="http://schemas.microsoft.com/office/drawing/2014/main" id="{F3692E5E-4E0F-A07A-A76B-D89BC62C9917}"/>
@@ -5488,7 +5907,149 @@
         <mc:Choice Requires="a14">
           <p:sp>
             <p:nvSpPr>
-              <p:cNvPr id="6" name="TextBox 5">
+              <p:cNvPr id="4" name="TextBox 3" descr="(replace s by the sampled S sub t ~ mu)">
+                <a:extLst>
+                  <a:ext uri="{FF2B5EF4-FFF2-40B4-BE49-F238E27FC236}">
+                    <a16:creationId xmlns:a16="http://schemas.microsoft.com/office/drawing/2014/main" id="{D4AA782C-5593-DAF1-4AC5-86DC24584F2B}"/>
+                  </a:ext>
+                </a:extLst>
+              </p:cNvPr>
+              <p:cNvSpPr txBox="1"/>
+              <p:nvPr/>
+            </p:nvSpPr>
+            <p:spPr>
+              <a:xfrm>
+                <a:off x="7305887" y="2391815"/>
+                <a:ext cx="4183439" cy="369332"/>
+              </a:xfrm>
+              <a:prstGeom prst="rect">
+                <a:avLst/>
+              </a:prstGeom>
+              <a:noFill/>
+            </p:spPr>
+            <p:txBody>
+              <a:bodyPr wrap="square" rtlCol="0">
+                <a:spAutoFit/>
+              </a:bodyPr>
+              <a:lstStyle/>
+              <a:p>
+                <a:r>
+                  <a:rPr lang="en-US" dirty="0"/>
+                  <a:t>(replace </a:t>
+                </a:r>
+                <a14:m>
+                  <m:oMath xmlns:m="http://schemas.openxmlformats.org/officeDocument/2006/math">
+                    <m:r>
+                      <a:rPr lang="en-US" b="0" i="1" smtClean="0">
+                        <a:latin typeface="Cambria Math" panose="02040503050406030204" pitchFamily="18" charset="0"/>
+                      </a:rPr>
+                      <m:t>𝑠</m:t>
+                    </m:r>
+                  </m:oMath>
+                </a14:m>
+                <a:r>
+                  <a:rPr lang="en-US" dirty="0"/>
+                  <a:t> by the sampled </a:t>
+                </a:r>
+                <a14:m>
+                  <m:oMath xmlns:m="http://schemas.openxmlformats.org/officeDocument/2006/math">
+                    <m:sSub>
+                      <m:sSubPr>
+                        <m:ctrlPr>
+                          <a:rPr lang="en-US" b="0" i="1" smtClean="0">
+                            <a:latin typeface="Cambria Math" panose="02040503050406030204" pitchFamily="18" charset="0"/>
+                          </a:rPr>
+                        </m:ctrlPr>
+                      </m:sSubPr>
+                      <m:e>
+                        <m:r>
+                          <a:rPr lang="en-US" b="0" i="1" smtClean="0">
+                            <a:latin typeface="Cambria Math" panose="02040503050406030204" pitchFamily="18" charset="0"/>
+                          </a:rPr>
+                          <m:t>𝑆</m:t>
+                        </m:r>
+                      </m:e>
+                      <m:sub>
+                        <m:r>
+                          <a:rPr lang="en-US" i="1">
+                            <a:latin typeface="Cambria Math" panose="02040503050406030204" pitchFamily="18" charset="0"/>
+                          </a:rPr>
+                          <m:t>𝑡</m:t>
+                        </m:r>
+                      </m:sub>
+                    </m:sSub>
+                    <m:r>
+                      <a:rPr lang="en-US" i="1">
+                        <a:latin typeface="Cambria Math" panose="02040503050406030204" pitchFamily="18" charset="0"/>
+                      </a:rPr>
+                      <m:t>~</m:t>
+                    </m:r>
+                    <m:r>
+                      <a:rPr lang="en-US" b="0" i="1" smtClean="0">
+                        <a:latin typeface="Cambria Math" panose="02040503050406030204" pitchFamily="18" charset="0"/>
+                      </a:rPr>
+                      <m:t>𝜇</m:t>
+                    </m:r>
+                  </m:oMath>
+                </a14:m>
+                <a:r>
+                  <a:rPr lang="en-US" dirty="0"/>
+                  <a:t>)</a:t>
+                </a:r>
+              </a:p>
+            </p:txBody>
+          </p:sp>
+        </mc:Choice>
+        <mc:Fallback xmlns="">
+          <p:sp>
+            <p:nvSpPr>
+              <p:cNvPr id="4" name="TextBox 3" descr="(replace s by the sampled S sub t ~ mu)">
+                <a:extLst>
+                  <a:ext uri="{FF2B5EF4-FFF2-40B4-BE49-F238E27FC236}">
+                    <a16:creationId xmlns:a16="http://schemas.microsoft.com/office/drawing/2014/main" id="{D4AA782C-5593-DAF1-4AC5-86DC24584F2B}"/>
+                  </a:ext>
+                </a:extLst>
+              </p:cNvPr>
+              <p:cNvSpPr txBox="1">
+                <a:spLocks noRot="1" noChangeAspect="1" noMove="1" noResize="1" noEditPoints="1" noAdjustHandles="1" noChangeArrowheads="1" noChangeShapeType="1" noTextEdit="1"/>
+              </p:cNvSpPr>
+              <p:nvPr/>
+            </p:nvSpPr>
+            <p:spPr>
+              <a:xfrm>
+                <a:off x="7305887" y="2391815"/>
+                <a:ext cx="4183439" cy="369332"/>
+              </a:xfrm>
+              <a:prstGeom prst="rect">
+                <a:avLst/>
+              </a:prstGeom>
+              <a:blipFill>
+                <a:blip r:embed="rId5"/>
+                <a:stretch>
+                  <a:fillRect l="-1164" t="-6557" b="-26230"/>
+                </a:stretch>
+              </a:blipFill>
+            </p:spPr>
+            <p:txBody>
+              <a:bodyPr/>
+              <a:lstStyle/>
+              <a:p>
+                <a:r>
+                  <a:rPr lang="en-US">
+                    <a:noFill/>
+                  </a:rPr>
+                  <a:t> </a:t>
+                </a:r>
+              </a:p>
+            </p:txBody>
+          </p:sp>
+        </mc:Fallback>
+      </mc:AlternateContent>
+      <mc:AlternateContent xmlns:mc="http://schemas.openxmlformats.org/markup-compatibility/2006" xmlns:a14="http://schemas.microsoft.com/office/drawing/2010/main">
+        <mc:Choice Requires="a14">
+          <p:sp>
+            <p:nvSpPr>
+              <p:cNvPr id="6" name="TextBox 5" descr="(replace a by the sampled A sub t ~ pi)">
                 <a:extLst>
                   <a:ext uri="{FF2B5EF4-FFF2-40B4-BE49-F238E27FC236}">
                     <a16:creationId xmlns:a16="http://schemas.microsoft.com/office/drawing/2014/main" id="{D979B544-C519-EEE8-C07C-9B72B2FBA4AD}"/>
@@ -5584,7 +6145,7 @@
         <mc:Fallback xmlns="">
           <p:sp>
             <p:nvSpPr>
-              <p:cNvPr id="6" name="TextBox 5">
+              <p:cNvPr id="6" name="TextBox 5" descr="(replace a by the sampled A sub t ~ pi)">
                 <a:extLst>
                   <a:ext uri="{FF2B5EF4-FFF2-40B4-BE49-F238E27FC236}">
                     <a16:creationId xmlns:a16="http://schemas.microsoft.com/office/drawing/2014/main" id="{D979B544-C519-EEE8-C07C-9B72B2FBA4AD}"/>
@@ -5630,7 +6191,7 @@
         <mc:Choice Requires="a14">
           <p:sp>
             <p:nvSpPr>
-              <p:cNvPr id="7" name="TextBox 6">
+              <p:cNvPr id="7" name="TextBox 6" descr="(because E sub pi [G sub t given S sub t,A sub t] equals q sub pi (S sub t,A sub t))">
                 <a:extLst>
                   <a:ext uri="{FF2B5EF4-FFF2-40B4-BE49-F238E27FC236}">
                     <a16:creationId xmlns:a16="http://schemas.microsoft.com/office/drawing/2014/main" id="{EF1EACA7-2076-94B0-C327-E11E18E97FAC}"/>
@@ -5665,7 +6226,7 @@
                     <m:sSub>
                       <m:sSubPr>
                         <m:ctrlPr>
-                          <a:rPr lang="en-US" b="0" i="1" smtClean="0">
+                          <a:rPr lang="en-US" i="1" smtClean="0">
                             <a:latin typeface="Cambria Math" panose="02040503050406030204" pitchFamily="18" charset="0"/>
                             <a:ea typeface="Cambria Math" panose="02040503050406030204" pitchFamily="18" charset="0"/>
                           </a:rPr>
@@ -5927,7 +6488,7 @@
         <mc:Fallback xmlns="">
           <p:sp>
             <p:nvSpPr>
-              <p:cNvPr id="7" name="TextBox 6">
+              <p:cNvPr id="7" name="TextBox 6" descr="(because E sub pi [G sub t given S sub t,A sub t] equals q sub pi (S sub t,A sub t))">
                 <a:extLst>
                   <a:ext uri="{FF2B5EF4-FFF2-40B4-BE49-F238E27FC236}">
                     <a16:creationId xmlns:a16="http://schemas.microsoft.com/office/drawing/2014/main" id="{EF1EACA7-2076-94B0-C327-E11E18E97FAC}"/>
@@ -5973,556 +6534,7 @@
         <mc:Choice Requires="a14">
           <p:sp>
             <p:nvSpPr>
-              <p:cNvPr id="4" name="TextBox 3">
-                <a:extLst>
-                  <a:ext uri="{FF2B5EF4-FFF2-40B4-BE49-F238E27FC236}">
-                    <a16:creationId xmlns:a16="http://schemas.microsoft.com/office/drawing/2014/main" id="{D4AA782C-5593-DAF1-4AC5-86DC24584F2B}"/>
-                  </a:ext>
-                </a:extLst>
-              </p:cNvPr>
-              <p:cNvSpPr txBox="1"/>
-              <p:nvPr/>
-            </p:nvSpPr>
-            <p:spPr>
-              <a:xfrm>
-                <a:off x="7305887" y="2391815"/>
-                <a:ext cx="4183439" cy="369332"/>
-              </a:xfrm>
-              <a:prstGeom prst="rect">
-                <a:avLst/>
-              </a:prstGeom>
-              <a:noFill/>
-            </p:spPr>
-            <p:txBody>
-              <a:bodyPr wrap="square" rtlCol="0">
-                <a:spAutoFit/>
-              </a:bodyPr>
-              <a:lstStyle/>
-              <a:p>
-                <a:r>
-                  <a:rPr lang="en-US" dirty="0"/>
-                  <a:t>(replace </a:t>
-                </a:r>
-                <a14:m>
-                  <m:oMath xmlns:m="http://schemas.openxmlformats.org/officeDocument/2006/math">
-                    <m:r>
-                      <a:rPr lang="en-US" b="0" i="1" smtClean="0">
-                        <a:latin typeface="Cambria Math" panose="02040503050406030204" pitchFamily="18" charset="0"/>
-                      </a:rPr>
-                      <m:t>𝑠</m:t>
-                    </m:r>
-                  </m:oMath>
-                </a14:m>
-                <a:r>
-                  <a:rPr lang="en-US" dirty="0"/>
-                  <a:t> by the sampled </a:t>
-                </a:r>
-                <a14:m>
-                  <m:oMath xmlns:m="http://schemas.openxmlformats.org/officeDocument/2006/math">
-                    <m:sSub>
-                      <m:sSubPr>
-                        <m:ctrlPr>
-                          <a:rPr lang="en-US" i="1">
-                            <a:latin typeface="Cambria Math" panose="02040503050406030204" pitchFamily="18" charset="0"/>
-                          </a:rPr>
-                        </m:ctrlPr>
-                      </m:sSubPr>
-                      <m:e>
-                        <m:r>
-                          <a:rPr lang="en-US" b="0" i="1" smtClean="0">
-                            <a:latin typeface="Cambria Math" panose="02040503050406030204" pitchFamily="18" charset="0"/>
-                          </a:rPr>
-                          <m:t>𝑆</m:t>
-                        </m:r>
-                      </m:e>
-                      <m:sub>
-                        <m:r>
-                          <a:rPr lang="en-US" i="1">
-                            <a:latin typeface="Cambria Math" panose="02040503050406030204" pitchFamily="18" charset="0"/>
-                          </a:rPr>
-                          <m:t>𝑡</m:t>
-                        </m:r>
-                      </m:sub>
-                    </m:sSub>
-                    <m:r>
-                      <a:rPr lang="en-US" i="1">
-                        <a:latin typeface="Cambria Math" panose="02040503050406030204" pitchFamily="18" charset="0"/>
-                      </a:rPr>
-                      <m:t>~</m:t>
-                    </m:r>
-                    <m:r>
-                      <a:rPr lang="en-US" b="0" i="1" smtClean="0">
-                        <a:latin typeface="Cambria Math" panose="02040503050406030204" pitchFamily="18" charset="0"/>
-                      </a:rPr>
-                      <m:t>𝜇</m:t>
-                    </m:r>
-                  </m:oMath>
-                </a14:m>
-                <a:r>
-                  <a:rPr lang="en-US" dirty="0"/>
-                  <a:t>)</a:t>
-                </a:r>
-              </a:p>
-            </p:txBody>
-          </p:sp>
-        </mc:Choice>
-        <mc:Fallback xmlns="">
-          <p:sp>
-            <p:nvSpPr>
-              <p:cNvPr id="4" name="TextBox 3">
-                <a:extLst>
-                  <a:ext uri="{FF2B5EF4-FFF2-40B4-BE49-F238E27FC236}">
-                    <a16:creationId xmlns:a16="http://schemas.microsoft.com/office/drawing/2014/main" id="{D4AA782C-5593-DAF1-4AC5-86DC24584F2B}"/>
-                  </a:ext>
-                </a:extLst>
-              </p:cNvPr>
-              <p:cNvSpPr txBox="1">
-                <a:spLocks noRot="1" noChangeAspect="1" noMove="1" noResize="1" noEditPoints="1" noAdjustHandles="1" noChangeArrowheads="1" noChangeShapeType="1" noTextEdit="1"/>
-              </p:cNvSpPr>
-              <p:nvPr/>
-            </p:nvSpPr>
-            <p:spPr>
-              <a:xfrm>
-                <a:off x="7305887" y="2391815"/>
-                <a:ext cx="4183439" cy="369332"/>
-              </a:xfrm>
-              <a:prstGeom prst="rect">
-                <a:avLst/>
-              </a:prstGeom>
-              <a:blipFill>
-                <a:blip r:embed="rId5"/>
-                <a:stretch>
-                  <a:fillRect l="-1164" t="-6557" b="-26230"/>
-                </a:stretch>
-              </a:blipFill>
-            </p:spPr>
-            <p:txBody>
-              <a:bodyPr/>
-              <a:lstStyle/>
-              <a:p>
-                <a:r>
-                  <a:rPr lang="en-US">
-                    <a:noFill/>
-                  </a:rPr>
-                  <a:t> </a:t>
-                </a:r>
-              </a:p>
-            </p:txBody>
-          </p:sp>
-        </mc:Fallback>
-      </mc:AlternateContent>
-      <mc:AlternateContent xmlns:mc="http://schemas.openxmlformats.org/markup-compatibility/2006" xmlns:a14="http://schemas.microsoft.com/office/drawing/2010/main">
-        <mc:Choice Requires="a14">
-          <p:sp>
-            <p:nvSpPr>
-              <p:cNvPr id="9" name="Content Placeholder 2">
-                <a:extLst>
-                  <a:ext uri="{FF2B5EF4-FFF2-40B4-BE49-F238E27FC236}">
-                    <a16:creationId xmlns:a16="http://schemas.microsoft.com/office/drawing/2014/main" id="{7250DF70-B205-0F67-A022-8658B6D83F38}"/>
-                  </a:ext>
-                </a:extLst>
-              </p:cNvPr>
-              <p:cNvSpPr txBox="1">
-                <a:spLocks/>
-              </p:cNvSpPr>
-              <p:nvPr/>
-            </p:nvSpPr>
-            <p:spPr>
-              <a:xfrm>
-                <a:off x="838199" y="1129111"/>
-                <a:ext cx="10169502" cy="999492"/>
-              </a:xfrm>
-              <a:prstGeom prst="rect">
-                <a:avLst/>
-              </a:prstGeom>
-            </p:spPr>
-            <p:txBody>
-              <a:bodyPr vert="horz" lIns="91440" tIns="45720" rIns="91440" bIns="45720" rtlCol="0">
-                <a:normAutofit/>
-              </a:bodyPr>
-              <a:lstStyle>
-                <a:lvl1pPr marL="228600" indent="-228600" algn="l" defTabSz="914400" rtl="0" eaLnBrk="1" latinLnBrk="0" hangingPunct="1">
-                  <a:lnSpc>
-                    <a:spcPct val="90000"/>
-                  </a:lnSpc>
-                  <a:spcBef>
-                    <a:spcPts val="1000"/>
-                  </a:spcBef>
-                  <a:buFont typeface="Arial" panose="020B0604020202020204" pitchFamily="34" charset="0"/>
-                  <a:buChar char="•"/>
-                  <a:defRPr sz="2800" kern="1200">
-                    <a:solidFill>
-                      <a:schemeClr val="tx1"/>
-                    </a:solidFill>
-                    <a:latin typeface="+mn-lt"/>
-                    <a:ea typeface="+mn-ea"/>
-                    <a:cs typeface="+mn-cs"/>
-                  </a:defRPr>
-                </a:lvl1pPr>
-                <a:lvl2pPr marL="685800" indent="-228600" algn="l" defTabSz="914400" rtl="0" eaLnBrk="1" latinLnBrk="0" hangingPunct="1">
-                  <a:lnSpc>
-                    <a:spcPct val="90000"/>
-                  </a:lnSpc>
-                  <a:spcBef>
-                    <a:spcPts val="500"/>
-                  </a:spcBef>
-                  <a:buFont typeface="Arial" panose="020B0604020202020204" pitchFamily="34" charset="0"/>
-                  <a:buChar char="•"/>
-                  <a:defRPr sz="2400" kern="1200">
-                    <a:solidFill>
-                      <a:schemeClr val="tx1"/>
-                    </a:solidFill>
-                    <a:latin typeface="+mn-lt"/>
-                    <a:ea typeface="+mn-ea"/>
-                    <a:cs typeface="+mn-cs"/>
-                  </a:defRPr>
-                </a:lvl2pPr>
-                <a:lvl3pPr marL="1143000" indent="-228600" algn="l" defTabSz="914400" rtl="0" eaLnBrk="1" latinLnBrk="0" hangingPunct="1">
-                  <a:lnSpc>
-                    <a:spcPct val="90000"/>
-                  </a:lnSpc>
-                  <a:spcBef>
-                    <a:spcPts val="500"/>
-                  </a:spcBef>
-                  <a:buFont typeface="Arial" panose="020B0604020202020204" pitchFamily="34" charset="0"/>
-                  <a:buChar char="•"/>
-                  <a:defRPr sz="2000" kern="1200">
-                    <a:solidFill>
-                      <a:schemeClr val="tx1"/>
-                    </a:solidFill>
-                    <a:latin typeface="+mn-lt"/>
-                    <a:ea typeface="+mn-ea"/>
-                    <a:cs typeface="+mn-cs"/>
-                  </a:defRPr>
-                </a:lvl3pPr>
-                <a:lvl4pPr marL="1600200" indent="-228600" algn="l" defTabSz="914400" rtl="0" eaLnBrk="1" latinLnBrk="0" hangingPunct="1">
-                  <a:lnSpc>
-                    <a:spcPct val="90000"/>
-                  </a:lnSpc>
-                  <a:spcBef>
-                    <a:spcPts val="500"/>
-                  </a:spcBef>
-                  <a:buFont typeface="Arial" panose="020B0604020202020204" pitchFamily="34" charset="0"/>
-                  <a:buChar char="•"/>
-                  <a:defRPr sz="1800" kern="1200">
-                    <a:solidFill>
-                      <a:schemeClr val="tx1"/>
-                    </a:solidFill>
-                    <a:latin typeface="+mn-lt"/>
-                    <a:ea typeface="+mn-ea"/>
-                    <a:cs typeface="+mn-cs"/>
-                  </a:defRPr>
-                </a:lvl4pPr>
-                <a:lvl5pPr marL="2057400" indent="-228600" algn="l" defTabSz="914400" rtl="0" eaLnBrk="1" latinLnBrk="0" hangingPunct="1">
-                  <a:lnSpc>
-                    <a:spcPct val="90000"/>
-                  </a:lnSpc>
-                  <a:spcBef>
-                    <a:spcPts val="500"/>
-                  </a:spcBef>
-                  <a:buFont typeface="Arial" panose="020B0604020202020204" pitchFamily="34" charset="0"/>
-                  <a:buChar char="•"/>
-                  <a:defRPr sz="1800" kern="1200">
-                    <a:solidFill>
-                      <a:schemeClr val="tx1"/>
-                    </a:solidFill>
-                    <a:latin typeface="+mn-lt"/>
-                    <a:ea typeface="+mn-ea"/>
-                    <a:cs typeface="+mn-cs"/>
-                  </a:defRPr>
-                </a:lvl5pPr>
-                <a:lvl6pPr marL="2514600" indent="-228600" algn="l" defTabSz="914400" rtl="0" eaLnBrk="1" latinLnBrk="0" hangingPunct="1">
-                  <a:lnSpc>
-                    <a:spcPct val="90000"/>
-                  </a:lnSpc>
-                  <a:spcBef>
-                    <a:spcPts val="500"/>
-                  </a:spcBef>
-                  <a:buFont typeface="Arial" panose="020B0604020202020204" pitchFamily="34" charset="0"/>
-                  <a:buChar char="•"/>
-                  <a:defRPr sz="1800" kern="1200">
-                    <a:solidFill>
-                      <a:schemeClr val="tx1"/>
-                    </a:solidFill>
-                    <a:latin typeface="+mn-lt"/>
-                    <a:ea typeface="+mn-ea"/>
-                    <a:cs typeface="+mn-cs"/>
-                  </a:defRPr>
-                </a:lvl6pPr>
-                <a:lvl7pPr marL="2971800" indent="-228600" algn="l" defTabSz="914400" rtl="0" eaLnBrk="1" latinLnBrk="0" hangingPunct="1">
-                  <a:lnSpc>
-                    <a:spcPct val="90000"/>
-                  </a:lnSpc>
-                  <a:spcBef>
-                    <a:spcPts val="500"/>
-                  </a:spcBef>
-                  <a:buFont typeface="Arial" panose="020B0604020202020204" pitchFamily="34" charset="0"/>
-                  <a:buChar char="•"/>
-                  <a:defRPr sz="1800" kern="1200">
-                    <a:solidFill>
-                      <a:schemeClr val="tx1"/>
-                    </a:solidFill>
-                    <a:latin typeface="+mn-lt"/>
-                    <a:ea typeface="+mn-ea"/>
-                    <a:cs typeface="+mn-cs"/>
-                  </a:defRPr>
-                </a:lvl7pPr>
-                <a:lvl8pPr marL="3429000" indent="-228600" algn="l" defTabSz="914400" rtl="0" eaLnBrk="1" latinLnBrk="0" hangingPunct="1">
-                  <a:lnSpc>
-                    <a:spcPct val="90000"/>
-                  </a:lnSpc>
-                  <a:spcBef>
-                    <a:spcPts val="500"/>
-                  </a:spcBef>
-                  <a:buFont typeface="Arial" panose="020B0604020202020204" pitchFamily="34" charset="0"/>
-                  <a:buChar char="•"/>
-                  <a:defRPr sz="1800" kern="1200">
-                    <a:solidFill>
-                      <a:schemeClr val="tx1"/>
-                    </a:solidFill>
-                    <a:latin typeface="+mn-lt"/>
-                    <a:ea typeface="+mn-ea"/>
-                    <a:cs typeface="+mn-cs"/>
-                  </a:defRPr>
-                </a:lvl8pPr>
-                <a:lvl9pPr marL="3886200" indent="-228600" algn="l" defTabSz="914400" rtl="0" eaLnBrk="1" latinLnBrk="0" hangingPunct="1">
-                  <a:lnSpc>
-                    <a:spcPct val="90000"/>
-                  </a:lnSpc>
-                  <a:spcBef>
-                    <a:spcPts val="500"/>
-                  </a:spcBef>
-                  <a:buFont typeface="Arial" panose="020B0604020202020204" pitchFamily="34" charset="0"/>
-                  <a:buChar char="•"/>
-                  <a:defRPr sz="1800" kern="1200">
-                    <a:solidFill>
-                      <a:schemeClr val="tx1"/>
-                    </a:solidFill>
-                    <a:latin typeface="+mn-lt"/>
-                    <a:ea typeface="+mn-ea"/>
-                    <a:cs typeface="+mn-cs"/>
-                  </a:defRPr>
-                </a:lvl9pPr>
-              </a:lstStyle>
-              <a:p>
-                <a:pPr marL="0" indent="0">
-                  <a:buNone/>
-                </a:pPr>
-                <a:r>
-                  <a:rPr lang="en-US" sz="2000" dirty="0"/>
-                  <a:t>Normal stochastic gradient-ascent algorithm update:      </a:t>
-                </a:r>
-                <a14:m>
-                  <m:oMath xmlns:m="http://schemas.openxmlformats.org/officeDocument/2006/math">
-                    <m:sSub>
-                      <m:sSubPr>
-                        <m:ctrlPr>
-                          <a:rPr lang="en-US" sz="2000" i="1" smtClean="0">
-                            <a:latin typeface="Cambria Math" panose="02040503050406030204" pitchFamily="18" charset="0"/>
-                          </a:rPr>
-                        </m:ctrlPr>
-                      </m:sSubPr>
-                      <m:e>
-                        <m:r>
-                          <a:rPr lang="en-US" sz="2000" b="1" i="1">
-                            <a:latin typeface="Cambria Math" panose="02040503050406030204" pitchFamily="18" charset="0"/>
-                          </a:rPr>
-                          <m:t>𝜽</m:t>
-                        </m:r>
-                      </m:e>
-                      <m:sub>
-                        <m:r>
-                          <a:rPr lang="en-US" sz="2000" i="1">
-                            <a:latin typeface="Cambria Math" panose="02040503050406030204" pitchFamily="18" charset="0"/>
-                          </a:rPr>
-                          <m:t>𝑡</m:t>
-                        </m:r>
-                        <m:r>
-                          <a:rPr lang="en-US" sz="2000" i="1">
-                            <a:latin typeface="Cambria Math" panose="02040503050406030204" pitchFamily="18" charset="0"/>
-                          </a:rPr>
-                          <m:t>+1</m:t>
-                        </m:r>
-                      </m:sub>
-                    </m:sSub>
-                    <m:r>
-                      <a:rPr lang="en-US" sz="2000" b="0" i="1" smtClean="0">
-                        <a:latin typeface="Cambria Math" panose="02040503050406030204" pitchFamily="18" charset="0"/>
-                      </a:rPr>
-                      <m:t>=</m:t>
-                    </m:r>
-                    <m:sSub>
-                      <m:sSubPr>
-                        <m:ctrlPr>
-                          <a:rPr lang="en-US" sz="2000" i="1" smtClean="0">
-                            <a:latin typeface="Cambria Math" panose="02040503050406030204" pitchFamily="18" charset="0"/>
-                          </a:rPr>
-                        </m:ctrlPr>
-                      </m:sSubPr>
-                      <m:e>
-                        <m:r>
-                          <a:rPr lang="en-US" sz="2000" b="1" i="1">
-                            <a:latin typeface="Cambria Math" panose="02040503050406030204" pitchFamily="18" charset="0"/>
-                          </a:rPr>
-                          <m:t>𝜽</m:t>
-                        </m:r>
-                      </m:e>
-                      <m:sub>
-                        <m:r>
-                          <a:rPr lang="en-US" sz="2000" i="1">
-                            <a:latin typeface="Cambria Math" panose="02040503050406030204" pitchFamily="18" charset="0"/>
-                          </a:rPr>
-                          <m:t>𝑡</m:t>
-                        </m:r>
-                      </m:sub>
-                    </m:sSub>
-                    <m:r>
-                      <a:rPr lang="en-US" sz="2000" i="1" smtClean="0">
-                        <a:latin typeface="Cambria Math" panose="02040503050406030204" pitchFamily="18" charset="0"/>
-                      </a:rPr>
-                      <m:t>+</m:t>
-                    </m:r>
-                    <m:r>
-                      <a:rPr lang="en-US" sz="2000" i="1" smtClean="0">
-                        <a:latin typeface="Cambria Math" panose="02040503050406030204" pitchFamily="18" charset="0"/>
-                      </a:rPr>
-                      <m:t>𝛼</m:t>
-                    </m:r>
-                  </m:oMath>
-                </a14:m>
-                <a:r>
-                  <a:rPr lang="en-US" sz="2000" dirty="0">
-                    <a:ea typeface="Cambria Math" panose="02040503050406030204" pitchFamily="18" charset="0"/>
-                  </a:rPr>
-                  <a:t> </a:t>
-                </a:r>
-                <a14:m>
-                  <m:oMath xmlns:m="http://schemas.openxmlformats.org/officeDocument/2006/math">
-                    <m:r>
-                      <m:rPr>
-                        <m:sty m:val="p"/>
-                      </m:rPr>
-                      <a:rPr lang="en-US" sz="2000" i="1" smtClean="0">
-                        <a:latin typeface="Cambria Math" panose="02040503050406030204" pitchFamily="18" charset="0"/>
-                        <a:ea typeface="Cambria Math" panose="02040503050406030204" pitchFamily="18" charset="0"/>
-                      </a:rPr>
-                      <m:t>∇</m:t>
-                    </m:r>
-                    <m:r>
-                      <a:rPr lang="en-US" sz="2000" i="1" smtClean="0">
-                        <a:latin typeface="Cambria Math" panose="02040503050406030204" pitchFamily="18" charset="0"/>
-                        <a:ea typeface="Cambria Math" panose="02040503050406030204" pitchFamily="18" charset="0"/>
-                      </a:rPr>
-                      <m:t>𝐽</m:t>
-                    </m:r>
-                    <m:d>
-                      <m:dPr>
-                        <m:ctrlPr>
-                          <a:rPr lang="en-US" sz="2000" i="1" smtClean="0">
-                            <a:latin typeface="Cambria Math" panose="02040503050406030204" pitchFamily="18" charset="0"/>
-                            <a:ea typeface="Cambria Math" panose="02040503050406030204" pitchFamily="18" charset="0"/>
-                          </a:rPr>
-                        </m:ctrlPr>
-                      </m:dPr>
-                      <m:e>
-                        <m:sSub>
-                          <m:sSubPr>
-                            <m:ctrlPr>
-                              <a:rPr lang="en-US" sz="2000" i="1">
-                                <a:latin typeface="Cambria Math" panose="02040503050406030204" pitchFamily="18" charset="0"/>
-                                <a:ea typeface="Cambria Math" panose="02040503050406030204" pitchFamily="18" charset="0"/>
-                              </a:rPr>
-                            </m:ctrlPr>
-                          </m:sSubPr>
-                          <m:e>
-                            <m:r>
-                              <a:rPr lang="en-US" sz="2000" b="1" i="1">
-                                <a:latin typeface="Cambria Math" panose="02040503050406030204" pitchFamily="18" charset="0"/>
-                                <a:ea typeface="Cambria Math" panose="02040503050406030204" pitchFamily="18" charset="0"/>
-                              </a:rPr>
-                              <m:t>𝜽</m:t>
-                            </m:r>
-                          </m:e>
-                          <m:sub>
-                            <m:r>
-                              <a:rPr lang="en-US" sz="2000" i="1">
-                                <a:latin typeface="Cambria Math" panose="02040503050406030204" pitchFamily="18" charset="0"/>
-                                <a:ea typeface="Cambria Math" panose="02040503050406030204" pitchFamily="18" charset="0"/>
-                              </a:rPr>
-                              <m:t>𝑡</m:t>
-                            </m:r>
-                          </m:sub>
-                        </m:sSub>
-                      </m:e>
-                    </m:d>
-                  </m:oMath>
-                </a14:m>
-                <a:endParaRPr lang="en-US" sz="2000" b="0" i="1" dirty="0">
-                  <a:latin typeface="Cambria Math" panose="02040503050406030204" pitchFamily="18" charset="0"/>
-                  <a:ea typeface="Cambria Math" panose="02040503050406030204" pitchFamily="18" charset="0"/>
-                </a:endParaRPr>
-              </a:p>
-              <a:p>
-                <a:pPr marL="0" indent="0">
-                  <a:buNone/>
-                </a:pPr>
-                <a:endParaRPr lang="en-US" sz="2000" b="0" dirty="0">
-                  <a:ea typeface="Cambria Math" panose="02040503050406030204" pitchFamily="18" charset="0"/>
-                </a:endParaRPr>
-              </a:p>
-            </p:txBody>
-          </p:sp>
-        </mc:Choice>
-        <mc:Fallback xmlns="">
-          <p:sp>
-            <p:nvSpPr>
-              <p:cNvPr id="9" name="Content Placeholder 2">
-                <a:extLst>
-                  <a:ext uri="{FF2B5EF4-FFF2-40B4-BE49-F238E27FC236}">
-                    <a16:creationId xmlns:a16="http://schemas.microsoft.com/office/drawing/2014/main" id="{7250DF70-B205-0F67-A022-8658B6D83F38}"/>
-                  </a:ext>
-                </a:extLst>
-              </p:cNvPr>
-              <p:cNvSpPr txBox="1">
-                <a:spLocks noRot="1" noChangeAspect="1" noMove="1" noResize="1" noEditPoints="1" noAdjustHandles="1" noChangeArrowheads="1" noChangeShapeType="1" noTextEdit="1"/>
-              </p:cNvSpPr>
-              <p:nvPr/>
-            </p:nvSpPr>
-            <p:spPr>
-              <a:xfrm>
-                <a:off x="838199" y="1129111"/>
-                <a:ext cx="10169502" cy="999492"/>
-              </a:xfrm>
-              <a:prstGeom prst="rect">
-                <a:avLst/>
-              </a:prstGeom>
-              <a:blipFill>
-                <a:blip r:embed="rId6"/>
-                <a:stretch>
-                  <a:fillRect l="-599" t="-5488"/>
-                </a:stretch>
-              </a:blipFill>
-            </p:spPr>
-            <p:txBody>
-              <a:bodyPr/>
-              <a:lstStyle/>
-              <a:p>
-                <a:r>
-                  <a:rPr lang="en-US">
-                    <a:noFill/>
-                  </a:rPr>
-                  <a:t> </a:t>
-                </a:r>
-              </a:p>
-            </p:txBody>
-          </p:sp>
-        </mc:Fallback>
-      </mc:AlternateContent>
-      <mc:AlternateContent xmlns:mc="http://schemas.openxmlformats.org/markup-compatibility/2006" xmlns:a14="http://schemas.microsoft.com/office/drawing/2010/main">
-        <mc:Choice Requires="a14">
-          <p:sp>
-            <p:nvSpPr>
-              <p:cNvPr id="10" name="TextBox 9">
+              <p:cNvPr id="10" name="TextBox 9" descr="(because gradient of ln of x equals the fraction gradient of x, over x, end fraction)">
                 <a:extLst>
                   <a:ext uri="{FF2B5EF4-FFF2-40B4-BE49-F238E27FC236}">
                     <a16:creationId xmlns:a16="http://schemas.microsoft.com/office/drawing/2014/main" id="{BF45850D-3559-27BA-E9D9-01CB3EECB739}"/>
@@ -6567,7 +6579,7 @@
                     <m:func>
                       <m:funcPr>
                         <m:ctrlPr>
-                          <a:rPr lang="en-US" i="1">
+                          <a:rPr lang="en-US">
                             <a:latin typeface="Cambria Math" panose="02040503050406030204" pitchFamily="18" charset="0"/>
                             <a:ea typeface="Cambria Math" panose="02040503050406030204" pitchFamily="18" charset="0"/>
                           </a:rPr>
@@ -6653,7 +6665,7 @@
         <mc:Fallback xmlns="">
           <p:sp>
             <p:nvSpPr>
-              <p:cNvPr id="10" name="TextBox 9">
+              <p:cNvPr id="10" name="TextBox 9" descr="(because gradient of ln of x equals the fraction gradient of x, over x, end fraction)">
                 <a:extLst>
                   <a:ext uri="{FF2B5EF4-FFF2-40B4-BE49-F238E27FC236}">
                     <a16:creationId xmlns:a16="http://schemas.microsoft.com/office/drawing/2014/main" id="{BF45850D-3559-27BA-E9D9-01CB3EECB739}"/>
@@ -6699,7 +6711,7 @@
         <mc:Choice Requires="a14">
           <p:sp>
             <p:nvSpPr>
-              <p:cNvPr id="11" name="Speech Bubble: Rectangle with Corners Rounded 10">
+              <p:cNvPr id="11" name="Speech Bubble: Rectangle with Corners Rounded 10" descr="A sub t S sub t and an unbiased estimate of G sub t under the current pi can be obtained via MC">
                 <a:extLst>
                   <a:ext uri="{FF2B5EF4-FFF2-40B4-BE49-F238E27FC236}">
                     <a16:creationId xmlns:a16="http://schemas.microsoft.com/office/drawing/2014/main" id="{0E0A6D4E-3C3A-D6B4-AF80-2EE6E3925191}"/>
@@ -6875,7 +6887,7 @@
         <mc:Fallback xmlns="">
           <p:sp>
             <p:nvSpPr>
-              <p:cNvPr id="11" name="Speech Bubble: Rectangle with Corners Rounded 10">
+              <p:cNvPr id="11" name="Speech Bubble: Rectangle with Corners Rounded 10" descr="A sub t S sub t and an unbiased estimate of G sub t under the current pi can be obtained via MC">
                 <a:extLst>
                   <a:ext uri="{FF2B5EF4-FFF2-40B4-BE49-F238E27FC236}">
                     <a16:creationId xmlns:a16="http://schemas.microsoft.com/office/drawing/2014/main" id="{0E0A6D4E-3C3A-D6B4-AF80-2EE6E3925191}"/>
@@ -7395,9 +7407,9 @@
     </p:tnLst>
     <p:bldLst>
       <p:bldP spid="3" grpId="0" build="p"/>
+      <p:bldP spid="4" grpId="0"/>
       <p:bldP spid="6" grpId="0"/>
       <p:bldP spid="7" grpId="0"/>
-      <p:bldP spid="4" grpId="0"/>
       <p:bldP spid="10" grpId="0"/>
       <p:bldP spid="11" grpId="0" animBg="1"/>
       <p:bldP spid="5" grpId="0" animBg="1"/>
@@ -7460,7 +7472,7 @@
       </p:sp>
       <p:pic>
         <p:nvPicPr>
-          <p:cNvPr id="5" name="Picture 4">
+          <p:cNvPr id="5" name="Picture 4" descr="Algorithm box: REINFORCE: Monte-Carlo Policy-Gradient Control (episodic) for pi star. Input: a differentiable policy parameterization pi(a | s, theta). Algorithm parameter: step size alpha &gt; 0. Initialize policy parameter theta in R^d′ (e.g., to 0). Loop forever (for each episode): Generate an episode S_0, A_0, R_1, …, S_T−1, A_T−1, R_T, following pi(· | ·, theta); Loop for each step of the episode t = 0, 1, …, T − 1: G ← sum from k = t + 1 to T of gamma to the power k − t − 1 times R_k, giving G_t; theta ← theta + alpha gamma to the t times G times the gradient of ln pi(A_t | S_t, theta).">
             <a:extLst>
               <a:ext uri="{FF2B5EF4-FFF2-40B4-BE49-F238E27FC236}">
                 <a16:creationId xmlns:a16="http://schemas.microsoft.com/office/drawing/2014/main" id="{7A46DFC6-5448-DD38-1C4B-9AD716BBC796}"/>
@@ -7492,7 +7504,7 @@
         <mc:Choice Requires="a14">
           <p:sp>
             <p:nvSpPr>
-              <p:cNvPr id="7" name="TextBox 6">
+              <p:cNvPr id="7" name="TextBox 6" descr="Notes:. MC sampling leads to high variance in the gradient estimate (which is worse than variance in the return estimate). REINFORCE is often implemented with a baseline reward for each state to reduce variance: R sub t minus b(S sub t)">
                 <a:extLst>
                   <a:ext uri="{FF2B5EF4-FFF2-40B4-BE49-F238E27FC236}">
                     <a16:creationId xmlns:a16="http://schemas.microsoft.com/office/drawing/2014/main" id="{8E074B3E-757C-2A75-351C-454936CC129D}"/>
@@ -7643,7 +7655,7 @@
         <mc:Fallback xmlns="">
           <p:sp>
             <p:nvSpPr>
-              <p:cNvPr id="7" name="TextBox 6">
+              <p:cNvPr id="7" name="TextBox 6" descr="Notes:. MC sampling leads to high variance in the gradient estimate (which is worse than variance in the return estimate). REINFORCE is often implemented with a baseline reward for each state to reduce variance: R sub t minus b(S sub t)">
                 <a:extLst>
                   <a:ext uri="{FF2B5EF4-FFF2-40B4-BE49-F238E27FC236}">
                     <a16:creationId xmlns:a16="http://schemas.microsoft.com/office/drawing/2014/main" id="{8E074B3E-757C-2A75-351C-454936CC129D}"/>
@@ -7922,7 +7934,7 @@
           <a:p>
             <a:r>
               <a:rPr lang="en-US" dirty="0"/>
-              <a:t>Actor-Critic Methods</a:t>
+              <a:t>Actor-Critic Methods </a:t>
             </a:r>
           </a:p>
         </p:txBody>
@@ -7931,7 +7943,7 @@
         <mc:Choice Requires="a14">
           <p:sp>
             <p:nvSpPr>
-              <p:cNvPr id="5" name="Content Placeholder 4">
+              <p:cNvPr id="5" name="Content Placeholder 4" descr="Idea: estimate parameterized policy + parameterized value function. Actor: estimates a parameterized policy pi and decides on actions. Critic: estimates the TD error using its value function estimate V equals v hat sub pi delta sub t equals R sub t plus 1, plus gamma V (S sub t plus 1) minus V (S sub t) The critic judges the actor’s action by comparing the received reward to the expected value difference. Positive TD error: the last action performed better than expected and the tendency to pick it should be strengthened. Negative TD error: suggests the tendency should be weakened. The TD error is used to update both approximations! For the policy update this means:. The update does no longer use MC as in REINFORCE. It uses a TD estimate of the return minus a value-function estimate as the baseline. This reduces variability and can improve learning">
                 <a:extLst>
                   <a:ext uri="{FF2B5EF4-FFF2-40B4-BE49-F238E27FC236}">
                     <a16:creationId xmlns:a16="http://schemas.microsoft.com/office/drawing/2014/main" id="{5DE7457B-2499-5391-0012-F1D1EE0A7C01}"/>
@@ -8323,7 +8335,7 @@
         <mc:Fallback xmlns="">
           <p:sp>
             <p:nvSpPr>
-              <p:cNvPr id="5" name="Content Placeholder 4">
+              <p:cNvPr id="5" name="Content Placeholder 4" descr="Idea: estimate parameterized policy + parameterized value function. Actor: estimates a parameterized policy pi and decides on actions. Critic: estimates the TD error using its value function estimate V equals v hat sub pi delta sub t equals R sub t plus 1, plus gamma V (S sub t plus 1) minus V (S sub t) The critic judges the actor’s action by comparing the received reward to the expected value difference. Positive TD error: the last action performed better than expected and the tendency to pick it should be strengthened. Negative TD error: suggests the tendency should be weakened. The TD error is used to update both approximations! For the policy update this means:. The update does no longer use MC as in REINFORCE. It uses a TD estimate of the return minus a value-function estimate as the baseline. This reduces variability and can improve learning">
                 <a:extLst>
                   <a:ext uri="{FF2B5EF4-FFF2-40B4-BE49-F238E27FC236}">
                     <a16:creationId xmlns:a16="http://schemas.microsoft.com/office/drawing/2014/main" id="{5DE7457B-2499-5391-0012-F1D1EE0A7C01}"/>
@@ -8366,7 +8378,7 @@
       </mc:AlternateContent>
       <p:pic>
         <p:nvPicPr>
-          <p:cNvPr id="6" name="Picture 5">
+          <p:cNvPr id="6" name="Picture 5" descr="Actor–critic architecture (Sutton and Barto, first edition): the environment sends the state to the actor (the policy) and the critic (the value function), and a reward to the critic; the critic sends the TD error to the actor; the actor sends actions to the environment.">
             <a:extLst>
               <a:ext uri="{FF2B5EF4-FFF2-40B4-BE49-F238E27FC236}">
                 <a16:creationId xmlns:a16="http://schemas.microsoft.com/office/drawing/2014/main" id="{2DED067C-18CB-0247-F450-1737DF323D2A}"/>
@@ -8947,11 +8959,11 @@
           </a:p>
         </p:txBody>
       </p:sp>
-      <mc:AlternateContent xmlns:mc="http://schemas.openxmlformats.org/markup-compatibility/2006">
-        <mc:Choice xmlns:a14="http://schemas.microsoft.com/office/drawing/2010/main" Requires="a14">
+      <mc:AlternateContent xmlns:mc="http://schemas.openxmlformats.org/markup-compatibility/2006" xmlns:a14="http://schemas.microsoft.com/office/drawing/2010/main">
+        <mc:Choice Requires="a14">
           <p:sp>
             <p:nvSpPr>
-              <p:cNvPr id="3" name="Content Placeholder 2">
+              <p:cNvPr id="3" name="Content Placeholder 2" descr="True policy gradient gradient of J (theta) equals E sub pi [q sub pi (s,a) gradient of log of pi (a given s)]. The update can use any signal X gradient of J (theta) is proportional to E sub pi [X gradient of log of pi (a given s)] as long as E sub pi [X given s,a] is proportional to q sub pi (s,a), i.e., if it tells us how good an action is. Examples of valid signals:. MC (REINFORCE): X equals G sub t. Advantage function: X equals A(s,a) equals q(s,a) minus v(s). TD error: X equals delta sub t equals R sub t plus 1, plus gamma v (S sub t plus 1) minus v(S sub t)">
                 <a:extLst>
                   <a:ext uri="{FF2B5EF4-FFF2-40B4-BE49-F238E27FC236}">
                     <a16:creationId xmlns:a16="http://schemas.microsoft.com/office/drawing/2014/main" id="{B72662DD-E598-030D-12ED-27652D3DF7F1}"/>
@@ -9004,7 +9016,7 @@
                     <m:d>
                       <m:dPr>
                         <m:ctrlPr>
-                          <a:rPr lang="en-US" i="1">
+                          <a:rPr lang="en-US" b="1" i="1">
                             <a:latin typeface="Cambria Math" panose="02040503050406030204" pitchFamily="18" charset="0"/>
                             <a:ea typeface="Cambria Math" panose="02040503050406030204" pitchFamily="18" charset="0"/>
                           </a:rPr>
@@ -9148,7 +9160,7 @@
                         <m:func>
                           <m:funcPr>
                             <m:ctrlPr>
-                              <a:rPr lang="en-US" i="1">
+                              <a:rPr lang="en-US">
                                 <a:latin typeface="Cambria Math" panose="02040503050406030204" pitchFamily="18" charset="0"/>
                                 <a:ea typeface="Cambria Math" panose="02040503050406030204" pitchFamily="18" charset="0"/>
                               </a:rPr>
@@ -9269,7 +9281,7 @@
                     <m:d>
                       <m:dPr>
                         <m:ctrlPr>
-                          <a:rPr lang="en-US" i="1">
+                          <a:rPr lang="en-US" b="1" i="1">
                             <a:latin typeface="Cambria Math" panose="02040503050406030204" pitchFamily="18" charset="0"/>
                             <a:ea typeface="Cambria Math" panose="02040503050406030204" pitchFamily="18" charset="0"/>
                           </a:rPr>
@@ -9328,7 +9340,7 @@
                         <m:begChr m:val="["/>
                         <m:endChr m:val="]"/>
                         <m:ctrlPr>
-                          <a:rPr lang="en-US" i="1">
+                          <a:rPr lang="en-US" b="0" i="1" smtClean="0">
                             <a:latin typeface="Cambria Math" panose="02040503050406030204" pitchFamily="18" charset="0"/>
                             <a:ea typeface="Cambria Math" panose="02040503050406030204" pitchFamily="18" charset="0"/>
                           </a:rPr>
@@ -9362,7 +9374,7 @@
                         <m:func>
                           <m:funcPr>
                             <m:ctrlPr>
-                              <a:rPr lang="en-US" i="1">
+                              <a:rPr lang="en-US">
                                 <a:latin typeface="Cambria Math" panose="02040503050406030204" pitchFamily="18" charset="0"/>
                                 <a:ea typeface="Cambria Math" panose="02040503050406030204" pitchFamily="18" charset="0"/>
                               </a:rPr>
@@ -9994,10 +10006,10 @@
             </p:txBody>
           </p:sp>
         </mc:Choice>
-        <mc:Fallback>
+        <mc:Fallback xmlns="">
           <p:sp>
             <p:nvSpPr>
-              <p:cNvPr id="3" name="Content Placeholder 2">
+              <p:cNvPr id="3" name="Content Placeholder 2" descr="True policy gradient gradient of J (theta) equals E sub pi [q sub pi (s,a) gradient of log of pi (a given s)]. The update can use any signal X gradient of J (theta) is proportional to E sub pi [X gradient of log of pi (a given s)] as long as E sub pi [X given s,a] is proportional to q sub pi (s,a), i.e., if it tells us how good an action is. Examples of valid signals:. MC (REINFORCE): X equals G sub t. Advantage function: X equals A(s,a) equals q(s,a) minus v(s). TD error: X equals delta sub t equals R sub t plus 1, plus gamma v (S sub t plus 1) minus v(S sub t)">
                 <a:extLst>
                   <a:ext uri="{FF2B5EF4-FFF2-40B4-BE49-F238E27FC236}">
                     <a16:creationId xmlns:a16="http://schemas.microsoft.com/office/drawing/2014/main" id="{B72662DD-E598-030D-12ED-27652D3DF7F1}"/>
@@ -10038,7 +10050,7 @@
         <mc:Choice Requires="a14">
           <p:sp>
             <p:nvSpPr>
-              <p:cNvPr id="4" name="Speech Bubble: Rectangle with Corners Rounded 3">
+              <p:cNvPr id="4" name="Speech Bubble: Rectangle with Corners Rounded 3" descr="Advantage: Measures how much better a is compared with the current action in pi (s)">
                 <a:extLst>
                   <a:ext uri="{FF2B5EF4-FFF2-40B4-BE49-F238E27FC236}">
                     <a16:creationId xmlns:a16="http://schemas.microsoft.com/office/drawing/2014/main" id="{4DDDB97C-A0EC-DBE3-8245-FF3B04A2682A}"/>
@@ -10139,7 +10151,7 @@
         <mc:Fallback xmlns="">
           <p:sp>
             <p:nvSpPr>
-              <p:cNvPr id="4" name="Speech Bubble: Rectangle with Corners Rounded 3">
+              <p:cNvPr id="4" name="Speech Bubble: Rectangle with Corners Rounded 3" descr="Advantage: Measures how much better a is compared with the current action in pi (s)">
                 <a:extLst>
                   <a:ext uri="{FF2B5EF4-FFF2-40B4-BE49-F238E27FC236}">
                     <a16:creationId xmlns:a16="http://schemas.microsoft.com/office/drawing/2014/main" id="{4DDDB97C-A0EC-DBE3-8245-FF3B04A2682A}"/>
@@ -10323,7 +10335,7 @@
       </p:sp>
       <p:pic>
         <p:nvPicPr>
-          <p:cNvPr id="7" name="Picture 6">
+          <p:cNvPr id="7" name="Picture 6" descr="Algorithm box: One-step Actor–Critic (episodic), for estimating pi_theta ≈ pi star. Input: a differentiable policy parameterization pi(a | s, theta). Input: a differentiable state-value function parameterization v hat(s, w). Parameters: step sizes alpha theta &gt; 0, alpha w &gt; 0. Initialize policy parameter theta in R^d′ and state-value weights w in R^d (e.g., to 0). Loop forever (for each episode): Initialize S (first state of episode); I ← 1; Loop while S is not terminal (for each time step): A ~ pi(· | S, theta); Take action A, observe S′, R; delta ← R + gamma v hat(S′, w) − v hat(S, w) (if S′ is terminal, then v hat(S′, w) = 0); w ← w + alpha w times delta times the gradient of v hat(S, w); theta ← theta + alpha theta times I delta times the gradient of ln pi(A | S, theta); I ← gamma I; S ← S′.">
             <a:extLst>
               <a:ext uri="{FF2B5EF4-FFF2-40B4-BE49-F238E27FC236}">
                 <a16:creationId xmlns:a16="http://schemas.microsoft.com/office/drawing/2014/main" id="{2C127B90-B61D-6A2E-A61B-CCCEFCCC5B63}"/>
@@ -10358,6 +10370,9 @@
               <a:ext uri="{FF2B5EF4-FFF2-40B4-BE49-F238E27FC236}">
                 <a16:creationId xmlns:a16="http://schemas.microsoft.com/office/drawing/2014/main" id="{D8C230AF-79C2-A184-7ED5-1506ABF95837}"/>
               </a:ext>
+              <a:ext uri="{C183D7F6-B498-43B3-948B-1728B52AA6E4}">
+                <adec:decorative xmlns:adec="http://schemas.microsoft.com/office/drawing/2017/decorative" val="1"/>
+              </a:ext>
             </a:extLst>
           </p:cNvPr>
           <p:cNvSpPr/>
@@ -10375,6 +10390,9 @@
               <a:gd name="adj3" fmla="val 16667"/>
             </a:avLst>
           </a:prstGeom>
+          <a:solidFill>
+            <a:srgbClr val="C35115"/>
+          </a:solidFill>
         </p:spPr>
         <p:style>
           <a:lnRef idx="2">
@@ -10411,6 +10429,9 @@
               <a:ext uri="{FF2B5EF4-FFF2-40B4-BE49-F238E27FC236}">
                 <a16:creationId xmlns:a16="http://schemas.microsoft.com/office/drawing/2014/main" id="{F7A4F288-A0A2-EAB0-0BC3-B1E0033FD846}"/>
               </a:ext>
+              <a:ext uri="{C183D7F6-B498-43B3-948B-1728B52AA6E4}">
+                <adec:decorative xmlns:adec="http://schemas.microsoft.com/office/drawing/2017/decorative" val="1"/>
+              </a:ext>
             </a:extLst>
           </p:cNvPr>
           <p:cNvSpPr/>
@@ -10428,6 +10449,9 @@
               <a:gd name="adj3" fmla="val 16667"/>
             </a:avLst>
           </a:prstGeom>
+          <a:solidFill>
+            <a:srgbClr val="C35115"/>
+          </a:solidFill>
         </p:spPr>
         <p:style>
           <a:lnRef idx="2">
@@ -10457,14 +10481,17 @@
           </a:p>
         </p:txBody>
       </p:sp>
-      <mc:AlternateContent xmlns:mc="http://schemas.openxmlformats.org/markup-compatibility/2006" xmlns:a14="http://schemas.microsoft.com/office/drawing/2010/main">
-        <mc:Choice Requires="a14">
+      <mc:AlternateContent xmlns:mc="http://schemas.openxmlformats.org/markup-compatibility/2006">
+        <mc:Choice xmlns:a14="http://schemas.microsoft.com/office/drawing/2010/main" Requires="a14">
           <p:sp>
             <p:nvSpPr>
               <p:cNvPr id="10" name="Speech Bubble: Rectangle with Corners Rounded 9">
                 <a:extLst>
                   <a:ext uri="{FF2B5EF4-FFF2-40B4-BE49-F238E27FC236}">
                     <a16:creationId xmlns:a16="http://schemas.microsoft.com/office/drawing/2014/main" id="{13A4B9D4-E0AA-951D-C0AB-75C0453EEC3C}"/>
+                  </a:ext>
+                  <a:ext uri="{C183D7F6-B498-43B3-948B-1728B52AA6E4}">
+                    <adec:decorative xmlns:adec="http://schemas.microsoft.com/office/drawing/2017/decorative" val="1"/>
                   </a:ext>
                 </a:extLst>
               </p:cNvPr>
@@ -10483,6 +10510,9 @@
                   <a:gd name="adj3" fmla="val 16667"/>
                 </a:avLst>
               </a:prstGeom>
+              <a:solidFill>
+                <a:srgbClr val="C35115"/>
+              </a:solidFill>
             </p:spPr>
             <p:style>
               <a:lnRef idx="2">
@@ -10516,10 +10546,7 @@
                 </a:br>
                 <a14:m>
                   <m:oMathPara xmlns:m="http://schemas.openxmlformats.org/officeDocument/2006/math">
-                    <m:oMathParaPr>
-                      <m:jc m:val="centerGroup"/>
-                    </m:oMathParaPr>
-                    <m:oMath xmlns:m="http://schemas.openxmlformats.org/officeDocument/2006/math">
+                    <m:oMath>
                       <m:r>
                         <m:rPr>
                           <m:sty m:val="p"/>
@@ -10568,13 +10595,16 @@
             </p:txBody>
           </p:sp>
         </mc:Choice>
-        <mc:Fallback xmlns="">
+        <mc:Fallback>
           <p:sp>
             <p:nvSpPr>
               <p:cNvPr id="10" name="Speech Bubble: Rectangle with Corners Rounded 9">
                 <a:extLst>
                   <a:ext uri="{FF2B5EF4-FFF2-40B4-BE49-F238E27FC236}">
                     <a16:creationId xmlns:a16="http://schemas.microsoft.com/office/drawing/2014/main" id="{13A4B9D4-E0AA-951D-C0AB-75C0453EEC3C}"/>
+                  </a:ext>
+                  <a:ext uri="{C183D7F6-B498-43B3-948B-1728B52AA6E4}">
+                    <adec:decorative xmlns:adec="http://schemas.microsoft.com/office/drawing/2017/decorative" val="1"/>
                   </a:ext>
                 </a:extLst>
               </p:cNvPr>
@@ -10623,6 +10653,9 @@
             <a:extLst>
               <a:ext uri="{FF2B5EF4-FFF2-40B4-BE49-F238E27FC236}">
                 <a16:creationId xmlns:a16="http://schemas.microsoft.com/office/drawing/2014/main" id="{05DCB902-4519-6052-12CC-ADD3BFE4DF5D}"/>
+              </a:ext>
+              <a:ext uri="{C183D7F6-B498-43B3-948B-1728B52AA6E4}">
+                <adec:decorative xmlns:adec="http://schemas.microsoft.com/office/drawing/2017/decorative" val="1"/>
               </a:ext>
             </a:extLst>
           </p:cNvPr>
@@ -10680,6 +10713,9 @@
                   <a:ext uri="{FF2B5EF4-FFF2-40B4-BE49-F238E27FC236}">
                     <a16:creationId xmlns:a16="http://schemas.microsoft.com/office/drawing/2014/main" id="{A8ECFCE4-C642-EBAF-5270-39245F140766}"/>
                   </a:ext>
+                  <a:ext uri="{C183D7F6-B498-43B3-948B-1728B52AA6E4}">
+                    <adec:decorative xmlns:adec="http://schemas.microsoft.com/office/drawing/2017/decorative" val="1"/>
+                  </a:ext>
                 </a:extLst>
               </p:cNvPr>
               <p:cNvSpPr/>
@@ -10697,6 +10733,9 @@
                   <a:gd name="adj3" fmla="val 16667"/>
                 </a:avLst>
               </a:prstGeom>
+              <a:solidFill>
+                <a:srgbClr val="C35115"/>
+              </a:solidFill>
             </p:spPr>
             <p:style>
               <a:lnRef idx="2">
@@ -10761,6 +10800,9 @@
                   <a:ext uri="{FF2B5EF4-FFF2-40B4-BE49-F238E27FC236}">
                     <a16:creationId xmlns:a16="http://schemas.microsoft.com/office/drawing/2014/main" id="{A8ECFCE4-C642-EBAF-5270-39245F140766}"/>
                   </a:ext>
+                  <a:ext uri="{C183D7F6-B498-43B3-948B-1728B52AA6E4}">
+                    <adec:decorative xmlns:adec="http://schemas.microsoft.com/office/drawing/2017/decorative" val="1"/>
+                  </a:ext>
                 </a:extLst>
               </p:cNvPr>
               <p:cNvSpPr>
@@ -10783,7 +10825,7 @@
               <a:blipFill>
                 <a:blip r:embed="rId4"/>
                 <a:stretch>
-                  <a:fillRect t="-2273"/>
+                  <a:fillRect/>
                 </a:stretch>
               </a:blipFill>
             </p:spPr>
@@ -10808,6 +10850,9 @@
             <a:extLst>
               <a:ext uri="{FF2B5EF4-FFF2-40B4-BE49-F238E27FC236}">
                 <a16:creationId xmlns:a16="http://schemas.microsoft.com/office/drawing/2014/main" id="{44E06FFA-E200-E681-2E5D-039A57F537AC}"/>
+              </a:ext>
+              <a:ext uri="{C183D7F6-B498-43B3-948B-1728B52AA6E4}">
+                <adec:decorative xmlns:adec="http://schemas.microsoft.com/office/drawing/2017/decorative" val="1"/>
               </a:ext>
             </a:extLst>
           </p:cNvPr>
@@ -10863,6 +10908,9 @@
               <a:ext uri="{FF2B5EF4-FFF2-40B4-BE49-F238E27FC236}">
                 <a16:creationId xmlns:a16="http://schemas.microsoft.com/office/drawing/2014/main" id="{E94F9DD5-BDBE-9FDD-3254-2C368EE7BF6A}"/>
               </a:ext>
+              <a:ext uri="{C183D7F6-B498-43B3-948B-1728B52AA6E4}">
+                <adec:decorative xmlns:adec="http://schemas.microsoft.com/office/drawing/2017/decorative" val="1"/>
+              </a:ext>
             </a:extLst>
           </p:cNvPr>
           <p:cNvSpPr/>
@@ -10880,6 +10928,9 @@
               <a:gd name="adj3" fmla="val 16667"/>
             </a:avLst>
           </a:prstGeom>
+          <a:solidFill>
+            <a:srgbClr val="C35115"/>
+          </a:solidFill>
         </p:spPr>
         <p:style>
           <a:lnRef idx="2">
@@ -10920,6 +10971,9 @@
             <a:extLst>
               <a:ext uri="{FF2B5EF4-FFF2-40B4-BE49-F238E27FC236}">
                 <a16:creationId xmlns:a16="http://schemas.microsoft.com/office/drawing/2014/main" id="{7975E55E-B47E-0E56-E14A-333A3D6DE67C}"/>
+              </a:ext>
+              <a:ext uri="{C183D7F6-B498-43B3-948B-1728B52AA6E4}">
+                <adec:decorative xmlns:adec="http://schemas.microsoft.com/office/drawing/2017/decorative" val="1"/>
               </a:ext>
             </a:extLst>
           </p:cNvPr>
@@ -10968,14 +11022,17 @@
           </a:p>
         </p:txBody>
       </p:sp>
-      <mc:AlternateContent xmlns:mc="http://schemas.openxmlformats.org/markup-compatibility/2006" xmlns:a14="http://schemas.microsoft.com/office/drawing/2010/main">
-        <mc:Choice Requires="a14">
+      <mc:AlternateContent xmlns:mc="http://schemas.openxmlformats.org/markup-compatibility/2006">
+        <mc:Choice xmlns:a14="http://schemas.microsoft.com/office/drawing/2010/main" Requires="a14">
           <p:sp>
             <p:nvSpPr>
               <p:cNvPr id="6" name="Speech Bubble: Rectangle with Corners Rounded 5">
                 <a:extLst>
                   <a:ext uri="{FF2B5EF4-FFF2-40B4-BE49-F238E27FC236}">
                     <a16:creationId xmlns:a16="http://schemas.microsoft.com/office/drawing/2014/main" id="{4E143229-2BAE-E79E-F2D9-252EB18CD2C7}"/>
+                  </a:ext>
+                  <a:ext uri="{C183D7F6-B498-43B3-948B-1728B52AA6E4}">
+                    <adec:decorative xmlns:adec="http://schemas.microsoft.com/office/drawing/2017/decorative" val="1"/>
                   </a:ext>
                 </a:extLst>
               </p:cNvPr>
@@ -10994,6 +11051,9 @@
                   <a:gd name="adj3" fmla="val 16667"/>
                 </a:avLst>
               </a:prstGeom>
+              <a:solidFill>
+                <a:srgbClr val="C35115"/>
+              </a:solidFill>
             </p:spPr>
             <p:style>
               <a:lnRef idx="2">
@@ -11041,13 +11101,16 @@
             </p:txBody>
           </p:sp>
         </mc:Choice>
-        <mc:Fallback xmlns="">
+        <mc:Fallback>
           <p:sp>
             <p:nvSpPr>
               <p:cNvPr id="6" name="Speech Bubble: Rectangle with Corners Rounded 5">
                 <a:extLst>
                   <a:ext uri="{FF2B5EF4-FFF2-40B4-BE49-F238E27FC236}">
                     <a16:creationId xmlns:a16="http://schemas.microsoft.com/office/drawing/2014/main" id="{4E143229-2BAE-E79E-F2D9-252EB18CD2C7}"/>
+                  </a:ext>
+                  <a:ext uri="{C183D7F6-B498-43B3-948B-1728B52AA6E4}">
+                    <adec:decorative xmlns:adec="http://schemas.microsoft.com/office/drawing/2017/decorative" val="1"/>
                   </a:ext>
                 </a:extLst>
               </p:cNvPr>
@@ -11071,7 +11134,7 @@
               <a:blipFill>
                 <a:blip r:embed="rId5"/>
                 <a:stretch>
-                  <a:fillRect t="-3448" b="-18966"/>
+                  <a:fillRect t="-3448" b="-17241"/>
                 </a:stretch>
               </a:blipFill>
             </p:spPr>
@@ -11097,6 +11160,9 @@
               <a:ext uri="{FF2B5EF4-FFF2-40B4-BE49-F238E27FC236}">
                 <a16:creationId xmlns:a16="http://schemas.microsoft.com/office/drawing/2014/main" id="{F8A590B0-CF05-089A-C860-65AB7EBA7415}"/>
               </a:ext>
+              <a:ext uri="{C183D7F6-B498-43B3-948B-1728B52AA6E4}">
+                <adec:decorative xmlns:adec="http://schemas.microsoft.com/office/drawing/2017/decorative" val="1"/>
+              </a:ext>
             </a:extLst>
           </p:cNvPr>
           <p:cNvSpPr/>
@@ -11114,6 +11180,9 @@
               <a:gd name="adj3" fmla="val 16667"/>
             </a:avLst>
           </a:prstGeom>
+          <a:solidFill>
+            <a:srgbClr val="C35115"/>
+          </a:solidFill>
         </p:spPr>
         <p:style>
           <a:lnRef idx="2">
@@ -11203,7 +11272,7 @@
       </p:sp>
       <p:pic>
         <p:nvPicPr>
-          <p:cNvPr id="4" name="Picture 3">
+          <p:cNvPr id="4" name="Picture 3" descr="Algorithm box: One-step Actor–Critic (episodic), for estimating pi_theta ≈ pi star. Input: a differentiable policy parameterization pi(a | s, theta). Input: a differentiable state-value function parameterization v hat(s, w). Parameters: step sizes alpha theta &gt; 0, alpha w &gt; 0. Initialize policy parameter theta in R^d′ and state-value weights w in R^d (e.g., to 0). Loop forever (for each episode): Initialize S (first state of episode); I ← 1; Loop while S is not terminal (for each time step): A ~ pi(· | S, theta); Take action A, observe S′, R; delta ← R + gamma v hat(S′, w) − v hat(S, w) (if S′ is terminal, then v hat(S′, w) = 0); w ← w + alpha w times delta times the gradient of v hat(S, w); theta ← theta + alpha theta times I delta times the gradient of ln pi(A | S, theta); I ← gamma I; S ← S′.">
             <a:extLst>
               <a:ext uri="{FF2B5EF4-FFF2-40B4-BE49-F238E27FC236}">
                 <a16:creationId xmlns:a16="http://schemas.microsoft.com/office/drawing/2014/main" id="{896A9328-74A9-F680-EC07-D31CBF0CC855}"/>
@@ -11233,7 +11302,7 @@
       </p:pic>
       <p:pic>
         <p:nvPicPr>
-          <p:cNvPr id="6" name="Content Placeholder 5">
+          <p:cNvPr id="6" name="Content Placeholder 5" descr="Algorithm box: Actor–Critic with Eligibility Traces (episodic), for estimating pi_theta ≈ pi star. Input: a differentiable policy parameterization pi(a | s, theta). Input: a differentiable state-value function parameterization v hat(s, w). Parameters: trace-decay rates lambda theta in [0, 1], lambda w in [0, 1]; step sizes alpha theta &gt; 0, alpha w &gt; 0. Initialize policy parameter theta in R^d′ and state-value weights w in R^d (e.g., to 0). Loop forever (for each episode): Initialize S (first state of episode); z theta ← 0 (d′-component eligibility trace vector); z w ← 0 (d-component eligibility trace vector); I ← 1; Loop while S is not terminal (for each time step): A ~ pi(· | S, theta); Take action A, observe S′, R; delta ← R + gamma v hat(S′, w) − v hat(S, w) (if S′ is terminal, then v hat(S′, w) = 0); z w ← gamma lambda w z w + the gradient of v hat(S, w); z theta ← gamma lambda theta z theta + I times the gradient of ln pi(A | S, theta); w ← w + alpha w delta z w; theta ← theta + alpha theta delta z theta; I ← gamma I; S ← S′.">
             <a:extLst>
               <a:ext uri="{FF2B5EF4-FFF2-40B4-BE49-F238E27FC236}">
                 <a16:creationId xmlns:a16="http://schemas.microsoft.com/office/drawing/2014/main" id="{F6F9B0EB-8F35-DF08-B752-F99DA815CD1F}"/>
@@ -11266,10 +11335,13 @@
       </p:pic>
       <p:sp>
         <p:nvSpPr>
-          <p:cNvPr id="7" name="Rectangle 6">
+          <p:cNvPr id="9" name="Arrow: Right 8">
             <a:extLst>
               <a:ext uri="{FF2B5EF4-FFF2-40B4-BE49-F238E27FC236}">
-                <a16:creationId xmlns:a16="http://schemas.microsoft.com/office/drawing/2014/main" id="{0B76B6D3-2AAE-A4FB-5186-AD95AD37C725}"/>
+                <a16:creationId xmlns:a16="http://schemas.microsoft.com/office/drawing/2014/main" id="{B6502B4B-1176-6874-771C-42B8BEE99443}"/>
+              </a:ext>
+              <a:ext uri="{C183D7F6-B498-43B3-948B-1728B52AA6E4}">
+                <adec:decorative xmlns:adec="http://schemas.microsoft.com/office/drawing/2017/decorative" val="1"/>
               </a:ext>
             </a:extLst>
           </p:cNvPr>
@@ -11278,35 +11350,27 @@
         </p:nvSpPr>
         <p:spPr>
           <a:xfrm>
-            <a:off x="4580164" y="4948993"/>
-            <a:ext cx="3208565" cy="595993"/>
+            <a:off x="3615719" y="3043347"/>
+            <a:ext cx="544452" cy="914400"/>
           </a:xfrm>
-          <a:prstGeom prst="rect">
+          <a:prstGeom prst="rightArrow">
             <a:avLst/>
           </a:prstGeom>
-          <a:noFill/>
-          <a:ln w="28575" cap="flat" cmpd="sng" algn="ctr">
-            <a:solidFill>
-              <a:schemeClr val="accent2"/>
-            </a:solidFill>
-            <a:prstDash val="solid"/>
-            <a:round/>
-            <a:headEnd type="none" w="med" len="med"/>
-            <a:tailEnd type="none" w="med" len="med"/>
-          </a:ln>
         </p:spPr>
         <p:style>
-          <a:lnRef idx="0">
-            <a:scrgbClr r="0" g="0" b="0"/>
+          <a:lnRef idx="2">
+            <a:schemeClr val="accent1">
+              <a:shade val="15000"/>
+            </a:schemeClr>
           </a:lnRef>
-          <a:fillRef idx="0">
-            <a:scrgbClr r="0" g="0" b="0"/>
+          <a:fillRef idx="1">
+            <a:schemeClr val="accent1"/>
           </a:fillRef>
           <a:effectRef idx="0">
-            <a:scrgbClr r="0" g="0" b="0"/>
+            <a:schemeClr val="accent1"/>
           </a:effectRef>
           <a:fontRef idx="minor">
-            <a:schemeClr val="accent2"/>
+            <a:schemeClr val="lt1"/>
           </a:fontRef>
         </p:style>
         <p:txBody>
@@ -11324,6 +11388,9 @@
             <a:extLst>
               <a:ext uri="{FF2B5EF4-FFF2-40B4-BE49-F238E27FC236}">
                 <a16:creationId xmlns:a16="http://schemas.microsoft.com/office/drawing/2014/main" id="{5E4E77FE-D52D-728F-AD4F-087E57697691}"/>
+              </a:ext>
+              <a:ext uri="{C183D7F6-B498-43B3-948B-1728B52AA6E4}">
+                <adec:decorative xmlns:adec="http://schemas.microsoft.com/office/drawing/2017/decorative" val="1"/>
               </a:ext>
             </a:extLst>
           </p:cNvPr>
@@ -11392,6 +11459,9 @@
           <a:prstGeom prst="roundRect">
             <a:avLst/>
           </a:prstGeom>
+          <a:solidFill>
+            <a:srgbClr val="C35115"/>
+          </a:solidFill>
         </p:spPr>
         <p:style>
           <a:lnRef idx="2">
@@ -11423,10 +11493,13 @@
       </p:sp>
       <p:sp>
         <p:nvSpPr>
-          <p:cNvPr id="9" name="Arrow: Right 8">
+          <p:cNvPr id="7" name="Rectangle 6">
             <a:extLst>
               <a:ext uri="{FF2B5EF4-FFF2-40B4-BE49-F238E27FC236}">
-                <a16:creationId xmlns:a16="http://schemas.microsoft.com/office/drawing/2014/main" id="{B6502B4B-1176-6874-771C-42B8BEE99443}"/>
+                <a16:creationId xmlns:a16="http://schemas.microsoft.com/office/drawing/2014/main" id="{0B76B6D3-2AAE-A4FB-5186-AD95AD37C725}"/>
+              </a:ext>
+              <a:ext uri="{C183D7F6-B498-43B3-948B-1728B52AA6E4}">
+                <adec:decorative xmlns:adec="http://schemas.microsoft.com/office/drawing/2017/decorative" val="1"/>
               </a:ext>
             </a:extLst>
           </p:cNvPr>
@@ -11435,27 +11508,35 @@
         </p:nvSpPr>
         <p:spPr>
           <a:xfrm>
-            <a:off x="3615719" y="3043347"/>
-            <a:ext cx="544452" cy="914400"/>
+            <a:off x="4580164" y="4948993"/>
+            <a:ext cx="3208565" cy="595993"/>
           </a:xfrm>
-          <a:prstGeom prst="rightArrow">
+          <a:prstGeom prst="rect">
             <a:avLst/>
           </a:prstGeom>
+          <a:noFill/>
+          <a:ln w="28575" cap="flat" cmpd="sng" algn="ctr">
+            <a:solidFill>
+              <a:schemeClr val="accent2"/>
+            </a:solidFill>
+            <a:prstDash val="solid"/>
+            <a:round/>
+            <a:headEnd type="none" w="med" len="med"/>
+            <a:tailEnd type="none" w="med" len="med"/>
+          </a:ln>
         </p:spPr>
         <p:style>
-          <a:lnRef idx="2">
-            <a:schemeClr val="accent1">
-              <a:shade val="15000"/>
-            </a:schemeClr>
+          <a:lnRef idx="0">
+            <a:scrgbClr r="0" g="0" b="0"/>
           </a:lnRef>
-          <a:fillRef idx="1">
-            <a:schemeClr val="accent1"/>
+          <a:fillRef idx="0">
+            <a:scrgbClr r="0" g="0" b="0"/>
           </a:fillRef>
           <a:effectRef idx="0">
-            <a:schemeClr val="accent1"/>
+            <a:scrgbClr r="0" g="0" b="0"/>
           </a:effectRef>
           <a:fontRef idx="minor">
-            <a:schemeClr val="lt1"/>
+            <a:schemeClr val="accent2"/>
           </a:fontRef>
         </p:style>
         <p:txBody>
@@ -11773,7 +11854,7 @@
         <mc:Choice Requires="a14">
           <p:sp>
             <p:nvSpPr>
-              <p:cNvPr id="3" name="Content Placeholder 2">
+              <p:cNvPr id="3" name="Content Placeholder 2" descr="Soft-max in action preferences works for a small number of discrete actions. For continuous actions: Choose action from a continuous distribution and learn the distribution parameters. Example: Choose the action (value) from a Gaussian distribution:. pi (a given s, theta) equals the fraction 1, over sigma (s, theta) the square root of 2 pi, end fraction exp of (minus the fraction (a minus mu (s, theta)) squared, over 2 sigma (s, theta) squared, end fraction). where often. mu (s, theta) equals theta transpose sub mu x sub mu (s). sigma (s, theta) equals exp(theta transpose sub sigma x sub sigma (s)). is learned with theta equals [theta sub mu, theta sub sigma]">
                 <a:extLst>
                   <a:ext uri="{FF2B5EF4-FFF2-40B4-BE49-F238E27FC236}">
                     <a16:creationId xmlns:a16="http://schemas.microsoft.com/office/drawing/2014/main" id="{0FC10070-A5BD-C926-B21A-8D43C4EF0BE8}"/>
@@ -11861,10 +11942,7 @@
                 </a:pPr>
                 <a14:m>
                   <m:oMathPara xmlns:m="http://schemas.openxmlformats.org/officeDocument/2006/math">
-                    <m:oMathParaPr>
-                      <m:jc m:val="centerGroup"/>
-                    </m:oMathParaPr>
-                    <m:oMath xmlns:m="http://schemas.openxmlformats.org/officeDocument/2006/math">
+                    <m:oMath>
                       <m:r>
                         <a:rPr lang="en-US" sz="2400" b="0" i="1" smtClean="0">
                           <a:latin typeface="Cambria Math" panose="02040503050406030204" pitchFamily="18" charset="0"/>
@@ -12002,7 +12080,7 @@
                       <m:func>
                         <m:funcPr>
                           <m:ctrlPr>
-                            <a:rPr lang="en-US" sz="2400" b="0" i="1" smtClean="0">
+                            <a:rPr lang="en-US" sz="2400" b="0" i="0" smtClean="0">
                               <a:latin typeface="Cambria Math" panose="02040503050406030204" pitchFamily="18" charset="0"/>
                             </a:rPr>
                           </m:ctrlPr>
@@ -12037,7 +12115,7 @@
                               <m:f>
                                 <m:fPr>
                                   <m:ctrlPr>
-                                    <a:rPr lang="en-US" sz="2400" b="0" i="1" smtClean="0">
+                                    <a:rPr lang="en-US" sz="2400" b="1" i="1" smtClean="0">
                                       <a:latin typeface="Cambria Math" panose="02040503050406030204" pitchFamily="18" charset="0"/>
                                     </a:rPr>
                                   </m:ctrlPr>
@@ -12046,7 +12124,7 @@
                                   <m:sSup>
                                     <m:sSupPr>
                                       <m:ctrlPr>
-                                        <a:rPr lang="en-US" sz="2400" b="1" i="1" smtClean="0">
+                                        <a:rPr lang="en-US" sz="2400" b="0" i="1" smtClean="0">
                                           <a:latin typeface="Cambria Math" panose="02040503050406030204" pitchFamily="18" charset="0"/>
                                         </a:rPr>
                                       </m:ctrlPr>
@@ -12137,7 +12215,7 @@
                                   <m:sSup>
                                     <m:sSupPr>
                                       <m:ctrlPr>
-                                        <a:rPr lang="en-US" sz="2400" b="0" i="1" smtClean="0">
+                                        <a:rPr lang="en-US" sz="2400" i="1">
                                           <a:latin typeface="Cambria Math" panose="02040503050406030204" pitchFamily="18" charset="0"/>
                                         </a:rPr>
                                       </m:ctrlPr>
@@ -12271,7 +12349,7 @@
                     <m:sSubSup>
                       <m:sSubSupPr>
                         <m:ctrlPr>
-                          <a:rPr lang="en-US" b="0" i="1" smtClean="0">
+                          <a:rPr lang="en-US" b="1" i="1" smtClean="0">
                             <a:latin typeface="Cambria Math" panose="02040503050406030204" pitchFamily="18" charset="0"/>
                           </a:rPr>
                         </m:ctrlPr>
@@ -12310,7 +12388,7 @@
                     <m:sSub>
                       <m:sSubPr>
                         <m:ctrlPr>
-                          <a:rPr lang="en-US" b="0" i="1" smtClean="0">
+                          <a:rPr lang="en-US" b="1" i="1" smtClean="0">
                             <a:latin typeface="Cambria Math" panose="02040503050406030204" pitchFamily="18" charset="0"/>
                           </a:rPr>
                         </m:ctrlPr>
@@ -12363,10 +12441,7 @@
                 </a:pPr>
                 <a14:m>
                   <m:oMathPara xmlns:m="http://schemas.openxmlformats.org/officeDocument/2006/math">
-                    <m:oMathParaPr>
-                      <m:jc m:val="centerGroup"/>
-                    </m:oMathParaPr>
-                    <m:oMath xmlns:m="http://schemas.openxmlformats.org/officeDocument/2006/math">
+                    <m:oMath>
                       <m:r>
                         <a:rPr lang="en-US" i="1">
                           <a:latin typeface="Cambria Math" panose="02040503050406030204" pitchFamily="18" charset="0"/>
@@ -12426,7 +12501,7 @@
                       <m:sSubSup>
                         <m:sSubSupPr>
                           <m:ctrlPr>
-                            <a:rPr lang="en-US" b="0" i="1" smtClean="0">
+                            <a:rPr lang="en-US" b="1" i="1" smtClean="0">
                               <a:latin typeface="Cambria Math" panose="02040503050406030204" pitchFamily="18" charset="0"/>
                             </a:rPr>
                           </m:ctrlPr>
@@ -12459,7 +12534,7 @@
                       <m:sSub>
                         <m:sSubPr>
                           <m:ctrlPr>
-                            <a:rPr lang="en-US" b="0" i="1" smtClean="0">
+                            <a:rPr lang="en-US" b="1" i="1" smtClean="0">
                               <a:latin typeface="Cambria Math" panose="02040503050406030204" pitchFamily="18" charset="0"/>
                             </a:rPr>
                           </m:ctrlPr>
@@ -12484,7 +12559,7 @@
                       <m:d>
                         <m:dPr>
                           <m:ctrlPr>
-                            <a:rPr lang="en-US" b="0" i="1" smtClean="0">
+                            <a:rPr lang="en-US" b="0" i="0" smtClean="0">
                               <a:latin typeface="Cambria Math" panose="02040503050406030204" pitchFamily="18" charset="0"/>
                             </a:rPr>
                           </m:ctrlPr>
@@ -12606,7 +12681,7 @@
         <mc:Fallback xmlns="">
           <p:sp>
             <p:nvSpPr>
-              <p:cNvPr id="3" name="Content Placeholder 2">
+              <p:cNvPr id="3" name="Content Placeholder 2" descr="Soft-max in action preferences works for a small number of discrete actions. For continuous actions: Choose action from a continuous distribution and learn the distribution parameters. Example: Choose the action (value) from a Gaussian distribution:. pi (a given s, theta) equals the fraction 1, over sigma (s, theta) the square root of 2 pi, end fraction exp of (minus the fraction (a minus mu (s, theta)) squared, over 2 sigma (s, theta) squared, end fraction). where often. mu (s, theta) equals theta transpose sub mu x sub mu (s). sigma (s, theta) equals exp(theta transpose sub sigma x sub sigma (s)). is learned with theta equals [theta sub mu, theta sub sigma]">
                 <a:extLst>
                   <a:ext uri="{FF2B5EF4-FFF2-40B4-BE49-F238E27FC236}">
                     <a16:creationId xmlns:a16="http://schemas.microsoft.com/office/drawing/2014/main" id="{0FC10070-A5BD-C926-B21A-8D43C4EF0BE8}"/>
@@ -12702,7 +12777,7 @@
       </p:sp>
       <p:grpSp>
         <p:nvGrpSpPr>
-          <p:cNvPr id="4" name="Group 3">
+          <p:cNvPr id="4" name="Group 3" descr="Line chart of four normal (Gaussian) probability density curves over x from −5 to 5: mean 0 and variance 0.2 (blue, tall and narrow, peak about 0.9); mean 0 and variance 1.0 (red, peak about 0.4); mean 0 and variance 5.0 (orange, low and wide); and mean −2 and variance 0.5 (green, peak about 0.56 at x = −2). Labels: Action value a; Probability density; Depend on state and learned parameters theta.">
             <a:extLst>
               <a:ext uri="{FF2B5EF4-FFF2-40B4-BE49-F238E27FC236}">
                 <a16:creationId xmlns:a16="http://schemas.microsoft.com/office/drawing/2014/main" id="{349C750D-F8E1-36BD-49AE-6C2CA95CC6A5}"/>
@@ -12722,7 +12797,7 @@
         </p:grpSpPr>
         <p:grpSp>
           <p:nvGrpSpPr>
-            <p:cNvPr id="10" name="Group 9">
+            <p:cNvPr id="10" name="Group 9" descr="Line chart of four normal (Gaussian) probability density curves over x from −5 to 5: mean 0 and variance 0.2 (blue, tall and narrow, peak about 0.9); mean 0 and variance 1.0 (red, peak about 0.4); mean 0 and variance 5.0 (orange, low and wide); and mean −2 and variance 0.5 (green, peak about 0.56 at x = −2). Labels: Action value a; Probability density.">
               <a:extLst>
                 <a:ext uri="{FF2B5EF4-FFF2-40B4-BE49-F238E27FC236}">
                   <a16:creationId xmlns:a16="http://schemas.microsoft.com/office/drawing/2014/main" id="{112C6C46-BE85-72BE-F978-F6C465995015}"/>
@@ -12742,7 +12817,7 @@
           </p:grpSpPr>
           <p:pic>
             <p:nvPicPr>
-              <p:cNvPr id="5" name="Picture 4">
+              <p:cNvPr id="5" name="Picture 4" descr="Line chart of four normal (Gaussian) probability density curves over x from −5 to 5: mean 0 and variance 0.2 (blue, tall and narrow, peak about 0.9); mean 0 and variance 1.0 (red, peak about 0.4); mean 0 and variance 5.0 (orange, low and wide); and mean −2 and variance 0.5 (green, peak about 0.56 at x = −2).">
                 <a:extLst>
                   <a:ext uri="{FF2B5EF4-FFF2-40B4-BE49-F238E27FC236}">
                     <a16:creationId xmlns:a16="http://schemas.microsoft.com/office/drawing/2014/main" id="{7E15FD6F-36C9-1393-6E83-57C176A7969A}"/>
@@ -12774,7 +12849,7 @@
             <mc:Choice Requires="a14">
               <p:sp>
                 <p:nvSpPr>
-                  <p:cNvPr id="7" name="TextBox 6">
+                  <p:cNvPr id="7" name="TextBox 6" descr="Action value a">
                     <a:extLst>
                       <a:ext uri="{FF2B5EF4-FFF2-40B4-BE49-F238E27FC236}">
                         <a16:creationId xmlns:a16="http://schemas.microsoft.com/office/drawing/2014/main" id="{AFFB7FFE-E069-F7DB-74EE-277C693FB5F1}"/>
@@ -12824,7 +12899,7 @@
             <mc:Fallback xmlns="">
               <p:sp>
                 <p:nvSpPr>
-                  <p:cNvPr id="7" name="TextBox 6">
+                  <p:cNvPr id="7" name="TextBox 6" descr="Action value a">
                     <a:extLst>
                       <a:ext uri="{FF2B5EF4-FFF2-40B4-BE49-F238E27FC236}">
                         <a16:creationId xmlns:a16="http://schemas.microsoft.com/office/drawing/2014/main" id="{AFFB7FFE-E069-F7DB-74EE-277C693FB5F1}"/>
@@ -12909,7 +12984,7 @@
           <mc:Choice Requires="a14">
             <p:sp>
               <p:nvSpPr>
-                <p:cNvPr id="9" name="Speech Bubble: Rectangle with Corners Rounded 8">
+                <p:cNvPr id="9" name="Speech Bubble: Rectangle with Corners Rounded 8" descr="Depend on state and learned parameters theta">
                   <a:extLst>
                     <a:ext uri="{FF2B5EF4-FFF2-40B4-BE49-F238E27FC236}">
                       <a16:creationId xmlns:a16="http://schemas.microsoft.com/office/drawing/2014/main" id="{1C86F6D6-661C-D5B1-6444-946E823AFD3B}"/>
@@ -12975,7 +13050,7 @@
           <mc:Fallback xmlns="">
             <p:sp>
               <p:nvSpPr>
-                <p:cNvPr id="9" name="Speech Bubble: Rectangle with Corners Rounded 8">
+                <p:cNvPr id="9" name="Speech Bubble: Rectangle with Corners Rounded 8" descr="Depend on state and learned parameters theta">
                   <a:extLst>
                     <a:ext uri="{FF2B5EF4-FFF2-40B4-BE49-F238E27FC236}">
                       <a16:creationId xmlns:a16="http://schemas.microsoft.com/office/drawing/2014/main" id="{1C86F6D6-661C-D5B1-6444-946E823AFD3B}"/>
@@ -14517,7 +14592,668 @@
         <mc:Choice Requires="a14">
           <p:sp>
             <p:nvSpPr>
-              <p:cNvPr id="3" name="Content Placeholder 2">
+              <p:cNvPr id="10" name="TextBox 9" descr="General. X capital letters: random variables x, p lower-case letters: realizations of random variables or scalar functions. w Bold lower-case letters: real-valued vectors (even if random variables). W bold capitals: matrices. alpha Greek letters: parameters (vectors if in bolt). Pr{X equals x} probability that a random variable X takes on the value x. X~p random variable X selected from distribution p (x) equals Pr{X equals x}. E[X] expectation of a random variable X, i.e., E [X] equals the sum over x, of p (x) x. argmax sub a f(a) a value of action a at which f(a) takes its maximal value">
+                <a:extLst>
+                  <a:ext uri="{FF2B5EF4-FFF2-40B4-BE49-F238E27FC236}">
+                    <a16:creationId xmlns:a16="http://schemas.microsoft.com/office/drawing/2014/main" id="{5CD475E5-BE3B-5594-57DC-46A17411F2F9}"/>
+                  </a:ext>
+                </a:extLst>
+              </p:cNvPr>
+              <p:cNvSpPr txBox="1"/>
+              <p:nvPr/>
+            </p:nvSpPr>
+            <p:spPr>
+              <a:xfrm>
+                <a:off x="822820" y="1124198"/>
+                <a:ext cx="5273179" cy="2308324"/>
+              </a:xfrm>
+              <a:prstGeom prst="rect">
+                <a:avLst/>
+              </a:prstGeom>
+            </p:spPr>
+            <p:style>
+              <a:lnRef idx="2">
+                <a:schemeClr val="accent2"/>
+              </a:lnRef>
+              <a:fillRef idx="1">
+                <a:schemeClr val="lt1"/>
+              </a:fillRef>
+              <a:effectRef idx="0">
+                <a:schemeClr val="accent2"/>
+              </a:effectRef>
+              <a:fontRef idx="minor">
+                <a:schemeClr val="dk1"/>
+              </a:fontRef>
+            </p:style>
+            <p:txBody>
+              <a:bodyPr wrap="square">
+                <a:spAutoFit/>
+              </a:bodyPr>
+              <a:lstStyle/>
+              <a:p>
+                <a:r>
+                  <a:rPr lang="en-US" sz="1200" b="1" dirty="0"/>
+                  <a:t>General</a:t>
+                </a:r>
+                <a:endParaRPr lang="en-US" sz="1200" dirty="0"/>
+              </a:p>
+              <a:p>
+                <a14:m>
+                  <m:oMath xmlns:m="http://schemas.openxmlformats.org/officeDocument/2006/math">
+                    <m:r>
+                      <a:rPr lang="en-US" sz="1200" i="1" dirty="0" smtClean="0">
+                        <a:latin typeface="Cambria Math" panose="02040503050406030204" pitchFamily="18" charset="0"/>
+                      </a:rPr>
+                      <m:t>𝑋</m:t>
+                    </m:r>
+                  </m:oMath>
+                </a14:m>
+                <a:r>
+                  <a:rPr lang="en-US" sz="1200" dirty="0"/>
+                  <a:t>	capital letters: random variables</a:t>
+                </a:r>
+                <a:br>
+                  <a:rPr lang="en-US" sz="1200" dirty="0"/>
+                </a:br>
+                <a14:m>
+                  <m:oMath xmlns:m="http://schemas.openxmlformats.org/officeDocument/2006/math">
+                    <m:r>
+                      <a:rPr lang="en-US" sz="1200" b="0" i="1" smtClean="0">
+                        <a:latin typeface="Cambria Math" panose="02040503050406030204" pitchFamily="18" charset="0"/>
+                      </a:rPr>
+                      <m:t>𝑥</m:t>
+                    </m:r>
+                    <m:r>
+                      <a:rPr lang="en-US" sz="1200" b="0" i="0" smtClean="0">
+                        <a:latin typeface="Cambria Math" panose="02040503050406030204" pitchFamily="18" charset="0"/>
+                      </a:rPr>
+                      <m:t>, </m:t>
+                    </m:r>
+                    <m:r>
+                      <a:rPr lang="en-US" sz="1200" b="0" i="1" smtClean="0">
+                        <a:latin typeface="Cambria Math" panose="02040503050406030204" pitchFamily="18" charset="0"/>
+                      </a:rPr>
+                      <m:t>𝑝</m:t>
+                    </m:r>
+                  </m:oMath>
+                </a14:m>
+                <a:r>
+                  <a:rPr lang="en-US" sz="1200" dirty="0"/>
+                  <a:t>	lower-case letters: realizations of random variables </a:t>
+                </a:r>
+                <a:br>
+                  <a:rPr lang="en-US" sz="1200" dirty="0"/>
+                </a:br>
+                <a:r>
+                  <a:rPr lang="en-US" sz="1200" dirty="0"/>
+                  <a:t>	or scalar functions</a:t>
+                </a:r>
+              </a:p>
+              <a:p>
+                <a14:m>
+                  <m:oMath xmlns:m="http://schemas.openxmlformats.org/officeDocument/2006/math">
+                    <m:r>
+                      <a:rPr lang="en-US" sz="1200" b="1" i="1" smtClean="0">
+                        <a:latin typeface="Cambria Math" panose="02040503050406030204" pitchFamily="18" charset="0"/>
+                      </a:rPr>
+                      <m:t>𝒘</m:t>
+                    </m:r>
+                  </m:oMath>
+                </a14:m>
+                <a:r>
+                  <a:rPr lang="en-US" sz="1200" dirty="0"/>
+                  <a:t> 	Bold lower-case letters: real-valued vectors </a:t>
+                </a:r>
+                <a:br>
+                  <a:rPr lang="en-US" sz="1200" dirty="0"/>
+                </a:br>
+                <a:r>
+                  <a:rPr lang="en-US" sz="1200" dirty="0"/>
+                  <a:t>	(even if random variables)</a:t>
+                </a:r>
+              </a:p>
+              <a:p>
+                <a14:m>
+                  <m:oMath xmlns:m="http://schemas.openxmlformats.org/officeDocument/2006/math">
+                    <m:r>
+                      <a:rPr lang="en-US" sz="1200" b="1" i="1" smtClean="0">
+                        <a:latin typeface="Cambria Math" panose="02040503050406030204" pitchFamily="18" charset="0"/>
+                      </a:rPr>
+                      <m:t>𝑾</m:t>
+                    </m:r>
+                  </m:oMath>
+                </a14:m>
+                <a:r>
+                  <a:rPr lang="en-US" sz="1200" dirty="0"/>
+                  <a:t>	bold capitals: matrices</a:t>
+                </a:r>
+              </a:p>
+              <a:p>
+                <a14:m>
+                  <m:oMath xmlns:m="http://schemas.openxmlformats.org/officeDocument/2006/math">
+                    <m:r>
+                      <a:rPr lang="en-US" sz="1200" b="0" i="1" smtClean="0">
+                        <a:latin typeface="Cambria Math" panose="02040503050406030204" pitchFamily="18" charset="0"/>
+                      </a:rPr>
+                      <m:t>𝛼</m:t>
+                    </m:r>
+                  </m:oMath>
+                </a14:m>
+                <a:r>
+                  <a:rPr lang="en-US" sz="1200" dirty="0"/>
+                  <a:t>	Greek letters: parameters (vectors if in bolt)</a:t>
+                </a:r>
+              </a:p>
+              <a:p>
+                <a14:m>
+                  <m:oMath xmlns:m="http://schemas.openxmlformats.org/officeDocument/2006/math">
+                    <m:r>
+                      <m:rPr>
+                        <m:sty m:val="p"/>
+                      </m:rPr>
+                      <a:rPr lang="en-US" sz="1200" i="1" dirty="0">
+                        <a:latin typeface="Cambria Math" panose="02040503050406030204" pitchFamily="18" charset="0"/>
+                      </a:rPr>
+                      <m:t>Pr</m:t>
+                    </m:r>
+                    <m:r>
+                      <a:rPr lang="en-US" sz="1200" i="1" dirty="0">
+                        <a:latin typeface="Cambria Math" panose="02040503050406030204" pitchFamily="18" charset="0"/>
+                      </a:rPr>
+                      <m:t>⁡{</m:t>
+                    </m:r>
+                    <m:r>
+                      <a:rPr lang="en-US" sz="1200" i="1" dirty="0">
+                        <a:latin typeface="Cambria Math" panose="02040503050406030204" pitchFamily="18" charset="0"/>
+                      </a:rPr>
+                      <m:t>𝑋</m:t>
+                    </m:r>
+                    <m:r>
+                      <a:rPr lang="en-US" sz="1200" i="1" dirty="0">
+                        <a:latin typeface="Cambria Math" panose="02040503050406030204" pitchFamily="18" charset="0"/>
+                      </a:rPr>
+                      <m:t>=</m:t>
+                    </m:r>
+                    <m:r>
+                      <a:rPr lang="en-US" sz="1200" i="1" dirty="0">
+                        <a:latin typeface="Cambria Math" panose="02040503050406030204" pitchFamily="18" charset="0"/>
+                      </a:rPr>
+                      <m:t>𝑥</m:t>
+                    </m:r>
+                    <m:r>
+                      <a:rPr lang="en-US" sz="1200" i="1" dirty="0">
+                        <a:latin typeface="Cambria Math" panose="02040503050406030204" pitchFamily="18" charset="0"/>
+                      </a:rPr>
+                      <m:t>}</m:t>
+                    </m:r>
+                  </m:oMath>
+                </a14:m>
+                <a:r>
+                  <a:rPr lang="en-US" sz="1200" dirty="0"/>
+                  <a:t>	probability that a random variable </a:t>
+                </a:r>
+                <a14:m>
+                  <m:oMath xmlns:m="http://schemas.openxmlformats.org/officeDocument/2006/math">
+                    <m:r>
+                      <a:rPr lang="en-US" sz="1200" i="1" dirty="0">
+                        <a:latin typeface="Cambria Math" panose="02040503050406030204" pitchFamily="18" charset="0"/>
+                      </a:rPr>
+                      <m:t>𝑋</m:t>
+                    </m:r>
+                  </m:oMath>
+                </a14:m>
+                <a:r>
+                  <a:rPr lang="en-US" sz="1200" dirty="0"/>
+                  <a:t> takes on the value </a:t>
+                </a:r>
+                <a14:m>
+                  <m:oMath xmlns:m="http://schemas.openxmlformats.org/officeDocument/2006/math">
+                    <m:r>
+                      <a:rPr lang="en-US" sz="1200" i="1" dirty="0">
+                        <a:latin typeface="Cambria Math" panose="02040503050406030204" pitchFamily="18" charset="0"/>
+                      </a:rPr>
+                      <m:t>𝑥</m:t>
+                    </m:r>
+                  </m:oMath>
+                </a14:m>
+                <a:endParaRPr lang="en-US" sz="1200" dirty="0"/>
+              </a:p>
+              <a:p>
+                <a14:m>
+                  <m:oMath xmlns:m="http://schemas.openxmlformats.org/officeDocument/2006/math">
+                    <m:r>
+                      <a:rPr lang="en-US" sz="1200" i="1" dirty="0">
+                        <a:latin typeface="Cambria Math" panose="02040503050406030204" pitchFamily="18" charset="0"/>
+                      </a:rPr>
+                      <m:t>𝑋</m:t>
+                    </m:r>
+                    <m:r>
+                      <a:rPr lang="en-US" sz="1200" i="1" dirty="0">
+                        <a:latin typeface="Cambria Math" panose="02040503050406030204" pitchFamily="18" charset="0"/>
+                      </a:rPr>
+                      <m:t>~</m:t>
+                    </m:r>
+                    <m:r>
+                      <a:rPr lang="en-US" sz="1200" i="1" dirty="0">
+                        <a:latin typeface="Cambria Math" panose="02040503050406030204" pitchFamily="18" charset="0"/>
+                      </a:rPr>
+                      <m:t>𝑝</m:t>
+                    </m:r>
+                  </m:oMath>
+                </a14:m>
+                <a:r>
+                  <a:rPr lang="en-US" sz="1200" dirty="0"/>
+                  <a:t>	random variable </a:t>
+                </a:r>
+                <a14:m>
+                  <m:oMath xmlns:m="http://schemas.openxmlformats.org/officeDocument/2006/math">
+                    <m:r>
+                      <a:rPr lang="en-US" sz="1200" i="1" dirty="0">
+                        <a:latin typeface="Cambria Math" panose="02040503050406030204" pitchFamily="18" charset="0"/>
+                      </a:rPr>
+                      <m:t>𝑋</m:t>
+                    </m:r>
+                  </m:oMath>
+                </a14:m>
+                <a:r>
+                  <a:rPr lang="en-US" sz="1200" dirty="0"/>
+                  <a:t> selected from distribution </a:t>
+                </a:r>
+                <a14:m>
+                  <m:oMath xmlns:m="http://schemas.openxmlformats.org/officeDocument/2006/math">
+                    <m:r>
+                      <a:rPr lang="en-US" sz="1200" i="1">
+                        <a:latin typeface="Cambria Math" panose="02040503050406030204" pitchFamily="18" charset="0"/>
+                      </a:rPr>
+                      <m:t>𝑝</m:t>
+                    </m:r>
+                    <m:d>
+                      <m:dPr>
+                        <m:ctrlPr>
+                          <a:rPr lang="en-US" sz="1200" i="1">
+                            <a:latin typeface="Cambria Math" panose="02040503050406030204" pitchFamily="18" charset="0"/>
+                          </a:rPr>
+                        </m:ctrlPr>
+                      </m:dPr>
+                      <m:e>
+                        <m:r>
+                          <a:rPr lang="en-US" sz="1200" i="1">
+                            <a:latin typeface="Cambria Math" panose="02040503050406030204" pitchFamily="18" charset="0"/>
+                          </a:rPr>
+                          <m:t>𝑥</m:t>
+                        </m:r>
+                      </m:e>
+                    </m:d>
+                    <m:r>
+                      <a:rPr lang="en-US" sz="1200" i="1">
+                        <a:latin typeface="Cambria Math" panose="02040503050406030204" pitchFamily="18" charset="0"/>
+                      </a:rPr>
+                      <m:t>=</m:t>
+                    </m:r>
+                    <m:r>
+                      <m:rPr>
+                        <m:sty m:val="p"/>
+                      </m:rPr>
+                      <a:rPr lang="en-US" sz="1200">
+                        <a:latin typeface="Cambria Math" panose="02040503050406030204" pitchFamily="18" charset="0"/>
+                      </a:rPr>
+                      <m:t>Pr</m:t>
+                    </m:r>
+                    <m:r>
+                      <a:rPr lang="en-US" sz="1200" i="1">
+                        <a:latin typeface="Cambria Math" panose="02040503050406030204" pitchFamily="18" charset="0"/>
+                      </a:rPr>
+                      <m:t>⁡{</m:t>
+                    </m:r>
+                    <m:r>
+                      <a:rPr lang="en-US" sz="1200" i="1">
+                        <a:latin typeface="Cambria Math" panose="02040503050406030204" pitchFamily="18" charset="0"/>
+                      </a:rPr>
+                      <m:t>𝑋</m:t>
+                    </m:r>
+                    <m:r>
+                      <a:rPr lang="en-US" sz="1200" i="1">
+                        <a:latin typeface="Cambria Math" panose="02040503050406030204" pitchFamily="18" charset="0"/>
+                      </a:rPr>
+                      <m:t>=</m:t>
+                    </m:r>
+                    <m:r>
+                      <a:rPr lang="en-US" sz="1200" i="1">
+                        <a:latin typeface="Cambria Math" panose="02040503050406030204" pitchFamily="18" charset="0"/>
+                      </a:rPr>
+                      <m:t>𝑥</m:t>
+                    </m:r>
+                    <m:r>
+                      <a:rPr lang="en-US" sz="1200" i="1">
+                        <a:latin typeface="Cambria Math" panose="02040503050406030204" pitchFamily="18" charset="0"/>
+                      </a:rPr>
+                      <m:t>}</m:t>
+                    </m:r>
+                  </m:oMath>
+                </a14:m>
+                <a:endParaRPr lang="en-US" sz="1200" dirty="0"/>
+              </a:p>
+              <a:p>
+                <a14:m>
+                  <m:oMath xmlns:m="http://schemas.openxmlformats.org/officeDocument/2006/math">
+                    <m:r>
+                      <a:rPr lang="en-US" sz="1200" i="1">
+                        <a:latin typeface="Cambria Math" panose="02040503050406030204" pitchFamily="18" charset="0"/>
+                        <a:ea typeface="Cambria Math" panose="02040503050406030204" pitchFamily="18" charset="0"/>
+                      </a:rPr>
+                      <m:t>𝔼</m:t>
+                    </m:r>
+                    <m:r>
+                      <a:rPr lang="en-US" sz="1200" i="1">
+                        <a:latin typeface="Cambria Math" panose="02040503050406030204" pitchFamily="18" charset="0"/>
+                        <a:ea typeface="Cambria Math" panose="02040503050406030204" pitchFamily="18" charset="0"/>
+                      </a:rPr>
+                      <m:t>[</m:t>
+                    </m:r>
+                    <m:r>
+                      <a:rPr lang="en-US" sz="1200" i="1">
+                        <a:latin typeface="Cambria Math" panose="02040503050406030204" pitchFamily="18" charset="0"/>
+                        <a:ea typeface="Cambria Math" panose="02040503050406030204" pitchFamily="18" charset="0"/>
+                      </a:rPr>
+                      <m:t>𝑋</m:t>
+                    </m:r>
+                    <m:r>
+                      <a:rPr lang="en-US" sz="1200" i="1">
+                        <a:latin typeface="Cambria Math" panose="02040503050406030204" pitchFamily="18" charset="0"/>
+                        <a:ea typeface="Cambria Math" panose="02040503050406030204" pitchFamily="18" charset="0"/>
+                      </a:rPr>
+                      <m:t>]</m:t>
+                    </m:r>
+                  </m:oMath>
+                </a14:m>
+                <a:r>
+                  <a:rPr lang="en-US" sz="1200" dirty="0"/>
+                  <a:t>	expectation of a random variable </a:t>
+                </a:r>
+                <a14:m>
+                  <m:oMath xmlns:m="http://schemas.openxmlformats.org/officeDocument/2006/math">
+                    <m:r>
+                      <a:rPr lang="en-US" sz="1200" i="1" dirty="0">
+                        <a:latin typeface="Cambria Math" panose="02040503050406030204" pitchFamily="18" charset="0"/>
+                      </a:rPr>
+                      <m:t>𝑋</m:t>
+                    </m:r>
+                  </m:oMath>
+                </a14:m>
+                <a:r>
+                  <a:rPr lang="en-US" sz="1200" dirty="0"/>
+                  <a:t>, i.e., </a:t>
+                </a:r>
+                <a14:m>
+                  <m:oMath xmlns:m="http://schemas.openxmlformats.org/officeDocument/2006/math">
+                    <m:r>
+                      <a:rPr lang="en-US" sz="1200" i="1">
+                        <a:latin typeface="Cambria Math" panose="02040503050406030204" pitchFamily="18" charset="0"/>
+                        <a:ea typeface="Cambria Math" panose="02040503050406030204" pitchFamily="18" charset="0"/>
+                      </a:rPr>
+                      <m:t>𝔼</m:t>
+                    </m:r>
+                    <m:d>
+                      <m:dPr>
+                        <m:begChr m:val="["/>
+                        <m:endChr m:val="]"/>
+                        <m:ctrlPr>
+                          <a:rPr lang="en-US" sz="1200" i="1">
+                            <a:latin typeface="Cambria Math" panose="02040503050406030204" pitchFamily="18" charset="0"/>
+                            <a:ea typeface="Cambria Math" panose="02040503050406030204" pitchFamily="18" charset="0"/>
+                          </a:rPr>
+                        </m:ctrlPr>
+                      </m:dPr>
+                      <m:e>
+                        <m:r>
+                          <a:rPr lang="en-US" sz="1200" i="1">
+                            <a:latin typeface="Cambria Math" panose="02040503050406030204" pitchFamily="18" charset="0"/>
+                            <a:ea typeface="Cambria Math" panose="02040503050406030204" pitchFamily="18" charset="0"/>
+                          </a:rPr>
+                          <m:t>𝑋</m:t>
+                        </m:r>
+                      </m:e>
+                    </m:d>
+                    <m:r>
+                      <a:rPr lang="en-US" sz="1200" i="1">
+                        <a:latin typeface="Cambria Math" panose="02040503050406030204" pitchFamily="18" charset="0"/>
+                        <a:ea typeface="Cambria Math" panose="02040503050406030204" pitchFamily="18" charset="0"/>
+                      </a:rPr>
+                      <m:t>=</m:t>
+                    </m:r>
+                    <m:nary>
+                      <m:naryPr>
+                        <m:chr m:val="∑"/>
+                        <m:supHide m:val="on"/>
+                        <m:ctrlPr>
+                          <a:rPr lang="en-US" sz="1200" i="1">
+                            <a:latin typeface="Cambria Math" panose="02040503050406030204" pitchFamily="18" charset="0"/>
+                            <a:ea typeface="Cambria Math" panose="02040503050406030204" pitchFamily="18" charset="0"/>
+                          </a:rPr>
+                        </m:ctrlPr>
+                      </m:naryPr>
+                      <m:sub>
+                        <m:r>
+                          <a:rPr lang="en-US" sz="1200" i="1">
+                            <a:latin typeface="Cambria Math" panose="02040503050406030204" pitchFamily="18" charset="0"/>
+                            <a:ea typeface="Cambria Math" panose="02040503050406030204" pitchFamily="18" charset="0"/>
+                          </a:rPr>
+                          <m:t>𝑥</m:t>
+                        </m:r>
+                      </m:sub>
+                      <m:sup/>
+                      <m:e>
+                        <m:r>
+                          <a:rPr lang="en-US" sz="1200" i="1">
+                            <a:latin typeface="Cambria Math" panose="02040503050406030204" pitchFamily="18" charset="0"/>
+                            <a:ea typeface="Cambria Math" panose="02040503050406030204" pitchFamily="18" charset="0"/>
+                          </a:rPr>
+                          <m:t>𝑝</m:t>
+                        </m:r>
+                        <m:d>
+                          <m:dPr>
+                            <m:ctrlPr>
+                              <a:rPr lang="en-US" sz="1200" i="1">
+                                <a:latin typeface="Cambria Math" panose="02040503050406030204" pitchFamily="18" charset="0"/>
+                                <a:ea typeface="Cambria Math" panose="02040503050406030204" pitchFamily="18" charset="0"/>
+                              </a:rPr>
+                            </m:ctrlPr>
+                          </m:dPr>
+                          <m:e>
+                            <m:r>
+                              <a:rPr lang="en-US" sz="1200" i="1">
+                                <a:latin typeface="Cambria Math" panose="02040503050406030204" pitchFamily="18" charset="0"/>
+                                <a:ea typeface="Cambria Math" panose="02040503050406030204" pitchFamily="18" charset="0"/>
+                              </a:rPr>
+                              <m:t>𝑥</m:t>
+                            </m:r>
+                          </m:e>
+                        </m:d>
+                        <m:r>
+                          <a:rPr lang="en-US" sz="1200" i="1">
+                            <a:latin typeface="Cambria Math" panose="02040503050406030204" pitchFamily="18" charset="0"/>
+                            <a:ea typeface="Cambria Math" panose="02040503050406030204" pitchFamily="18" charset="0"/>
+                          </a:rPr>
+                          <m:t>𝑥</m:t>
+                        </m:r>
+                      </m:e>
+                    </m:nary>
+                  </m:oMath>
+                </a14:m>
+                <a:endParaRPr lang="en-US" sz="1200" dirty="0">
+                  <a:ea typeface="Cambria Math" panose="02040503050406030204" pitchFamily="18" charset="0"/>
+                </a:endParaRPr>
+              </a:p>
+              <a:p>
+                <a14:m>
+                  <m:oMath xmlns:m="http://schemas.openxmlformats.org/officeDocument/2006/math">
+                    <m:sSub>
+                      <m:sSubPr>
+                        <m:ctrlPr>
+                          <a:rPr lang="en-US" sz="1200" dirty="0">
+                            <a:latin typeface="Cambria Math" panose="02040503050406030204" pitchFamily="18" charset="0"/>
+                          </a:rPr>
+                        </m:ctrlPr>
+                      </m:sSubPr>
+                      <m:e>
+                        <m:r>
+                          <m:rPr>
+                            <m:sty m:val="p"/>
+                          </m:rPr>
+                          <a:rPr lang="en-US" sz="1200" dirty="0">
+                            <a:latin typeface="Cambria Math" panose="02040503050406030204" pitchFamily="18" charset="0"/>
+                          </a:rPr>
+                          <m:t>argmax</m:t>
+                        </m:r>
+                      </m:e>
+                      <m:sub>
+                        <m:r>
+                          <m:rPr>
+                            <m:sty m:val="p"/>
+                          </m:rPr>
+                          <a:rPr lang="en-US" sz="1200" dirty="0">
+                            <a:latin typeface="Cambria Math" panose="02040503050406030204" pitchFamily="18" charset="0"/>
+                          </a:rPr>
+                          <m:t>a</m:t>
+                        </m:r>
+                      </m:sub>
+                    </m:sSub>
+                    <m:r>
+                      <a:rPr lang="en-US" sz="1200" dirty="0">
+                        <a:latin typeface="Cambria Math" panose="02040503050406030204" pitchFamily="18" charset="0"/>
+                      </a:rPr>
+                      <m:t> </m:t>
+                    </m:r>
+                    <m:r>
+                      <a:rPr lang="en-US" sz="1200" i="1" dirty="0">
+                        <a:latin typeface="Cambria Math" panose="02040503050406030204" pitchFamily="18" charset="0"/>
+                      </a:rPr>
+                      <m:t>𝑓</m:t>
+                    </m:r>
+                    <m:r>
+                      <a:rPr lang="en-US" sz="1200" i="1" dirty="0">
+                        <a:latin typeface="Cambria Math" panose="02040503050406030204" pitchFamily="18" charset="0"/>
+                      </a:rPr>
+                      <m:t>(</m:t>
+                    </m:r>
+                    <m:r>
+                      <a:rPr lang="en-US" sz="1200" i="1" dirty="0">
+                        <a:latin typeface="Cambria Math" panose="02040503050406030204" pitchFamily="18" charset="0"/>
+                      </a:rPr>
+                      <m:t>𝑎</m:t>
+                    </m:r>
+                    <m:r>
+                      <a:rPr lang="en-US" sz="1200" i="1" dirty="0">
+                        <a:latin typeface="Cambria Math" panose="02040503050406030204" pitchFamily="18" charset="0"/>
+                      </a:rPr>
+                      <m:t>)</m:t>
+                    </m:r>
+                  </m:oMath>
+                </a14:m>
+                <a:r>
+                  <a:rPr lang="en-US" sz="1200" dirty="0"/>
+                  <a:t> a value of action </a:t>
+                </a:r>
+                <a14:m>
+                  <m:oMath xmlns:m="http://schemas.openxmlformats.org/officeDocument/2006/math">
+                    <m:r>
+                      <a:rPr lang="en-US" sz="1200" i="1" dirty="0">
+                        <a:latin typeface="Cambria Math" panose="02040503050406030204" pitchFamily="18" charset="0"/>
+                      </a:rPr>
+                      <m:t>𝑎</m:t>
+                    </m:r>
+                  </m:oMath>
+                </a14:m>
+                <a:r>
+                  <a:rPr lang="en-US" sz="1200" dirty="0"/>
+                  <a:t> at which </a:t>
+                </a:r>
+                <a14:m>
+                  <m:oMath xmlns:m="http://schemas.openxmlformats.org/officeDocument/2006/math">
+                    <m:r>
+                      <a:rPr lang="en-US" sz="1200" i="1" dirty="0">
+                        <a:latin typeface="Cambria Math" panose="02040503050406030204" pitchFamily="18" charset="0"/>
+                      </a:rPr>
+                      <m:t>𝑓</m:t>
+                    </m:r>
+                    <m:r>
+                      <a:rPr lang="en-US" sz="1200" i="1" dirty="0">
+                        <a:latin typeface="Cambria Math" panose="02040503050406030204" pitchFamily="18" charset="0"/>
+                      </a:rPr>
+                      <m:t>(</m:t>
+                    </m:r>
+                    <m:r>
+                      <a:rPr lang="en-US" sz="1200" i="1" dirty="0">
+                        <a:latin typeface="Cambria Math" panose="02040503050406030204" pitchFamily="18" charset="0"/>
+                      </a:rPr>
+                      <m:t>𝑎</m:t>
+                    </m:r>
+                    <m:r>
+                      <a:rPr lang="en-US" sz="1200" i="1" dirty="0">
+                        <a:latin typeface="Cambria Math" panose="02040503050406030204" pitchFamily="18" charset="0"/>
+                      </a:rPr>
+                      <m:t>)</m:t>
+                    </m:r>
+                  </m:oMath>
+                </a14:m>
+                <a:r>
+                  <a:rPr lang="en-US" sz="1200" dirty="0"/>
+                  <a:t> takes its maximal value</a:t>
+                </a:r>
+              </a:p>
+            </p:txBody>
+          </p:sp>
+        </mc:Choice>
+        <mc:Fallback xmlns="">
+          <p:sp>
+            <p:nvSpPr>
+              <p:cNvPr id="10" name="TextBox 9" descr="General. X capital letters: random variables x, p lower-case letters: realizations of random variables or scalar functions. w Bold lower-case letters: real-valued vectors (even if random variables). W bold capitals: matrices. alpha Greek letters: parameters (vectors if in bolt). Pr{X equals x} probability that a random variable X takes on the value x. X~p random variable X selected from distribution p (x) equals Pr{X equals x}. E[X] expectation of a random variable X, i.e., E [X] equals the sum over x, of p (x) x. argmax sub a f(a) a value of action a at which f(a) takes its maximal value">
+                <a:extLst>
+                  <a:ext uri="{FF2B5EF4-FFF2-40B4-BE49-F238E27FC236}">
+                    <a16:creationId xmlns:a16="http://schemas.microsoft.com/office/drawing/2014/main" id="{5CD475E5-BE3B-5594-57DC-46A17411F2F9}"/>
+                  </a:ext>
+                </a:extLst>
+              </p:cNvPr>
+              <p:cNvSpPr txBox="1">
+                <a:spLocks noRot="1" noChangeAspect="1" noMove="1" noResize="1" noEditPoints="1" noAdjustHandles="1" noChangeArrowheads="1" noChangeShapeType="1" noTextEdit="1"/>
+              </p:cNvSpPr>
+              <p:nvPr/>
+            </p:nvSpPr>
+            <p:spPr>
+              <a:xfrm>
+                <a:off x="822820" y="1124198"/>
+                <a:ext cx="5273179" cy="2308324"/>
+              </a:xfrm>
+              <a:prstGeom prst="rect">
+                <a:avLst/>
+              </a:prstGeom>
+              <a:blipFill>
+                <a:blip r:embed="rId3"/>
+                <a:stretch>
+                  <a:fillRect b="-9424"/>
+                </a:stretch>
+              </a:blipFill>
+            </p:spPr>
+            <p:txBody>
+              <a:bodyPr/>
+              <a:lstStyle/>
+              <a:p>
+                <a:r>
+                  <a:rPr lang="en-US">
+                    <a:noFill/>
+                  </a:rPr>
+                  <a:t> </a:t>
+                </a:r>
+              </a:p>
+            </p:txBody>
+          </p:sp>
+        </mc:Fallback>
+      </mc:AlternateContent>
+      <mc:AlternateContent xmlns:mc="http://schemas.openxmlformats.org/markup-compatibility/2006" xmlns:a14="http://schemas.microsoft.com/office/drawing/2010/main">
+        <mc:Choice Requires="a14">
+          <p:sp>
+            <p:nvSpPr>
+              <p:cNvPr id="3" name="Content Placeholder 2" descr="Value Function. G sub t return (cumulative reward) following time t. G sub t:h return from t to h (discounted and corrected). v sub pi (s) value of state s under policy pi (expected return). v sub star (s) value of state s under the optimal policy. q sub pi (s,a) value of taking action a in state s under policy pi. q sub star (s,a) value of taking action a in state s under the optimal policy. V, V sub t array estimates of state-value function v sub pi or v sub star. Q,Q sub t array estimates of action-value function q sub pi or v sub star">
                 <a:extLst>
                   <a:ext uri="{FF2B5EF4-FFF2-40B4-BE49-F238E27FC236}">
                     <a16:creationId xmlns:a16="http://schemas.microsoft.com/office/drawing/2014/main" id="{47E69C9C-42B6-9B0F-9AE0-20D17703E490}"/>
@@ -14589,7 +15325,7 @@
                     <m:sSub>
                       <m:sSubPr>
                         <m:ctrlPr>
-                          <a:rPr lang="en-US" sz="1200" i="1" dirty="0" smtClean="0">
+                          <a:rPr lang="en-US" sz="1200" i="1" dirty="0">
                             <a:latin typeface="Cambria Math" panose="02040503050406030204" pitchFamily="18" charset="0"/>
                           </a:rPr>
                         </m:ctrlPr>
@@ -14689,7 +15425,7 @@
                             </a:solidFill>
                             <a:latin typeface="Cambria Math" panose="02040503050406030204" pitchFamily="18" charset="0"/>
                           </a:rPr>
-                          <m:t>h</m:t>
+                          <m:t>ℎ</m:t>
                         </m:r>
                       </m:sub>
                     </m:sSub>
@@ -14733,7 +15469,7 @@
                         </a:solidFill>
                         <a:latin typeface="Cambria Math" panose="02040503050406030204" pitchFamily="18" charset="0"/>
                       </a:rPr>
-                      <m:t>h</m:t>
+                      <m:t>ℎ</m:t>
                     </m:r>
                   </m:oMath>
                 </a14:m>
@@ -15501,7 +16237,7 @@
         <mc:Fallback xmlns="">
           <p:sp>
             <p:nvSpPr>
-              <p:cNvPr id="3" name="Content Placeholder 2">
+              <p:cNvPr id="3" name="Content Placeholder 2" descr="Value Function. G sub t return (cumulative reward) following time t. G sub t:h return from t to h (discounted and corrected). v sub pi (s) value of state s under policy pi (expected return). v sub star (s) value of state s under the optimal policy. q sub pi (s,a) value of taking action a in state s under policy pi. q sub star (s,a) value of taking action a in state s under the optimal policy. V, V sub t array estimates of state-value function v sub pi or v sub star. Q,Q sub t array estimates of action-value function q sub pi or v sub star">
                 <a:extLst>
                   <a:ext uri="{FF2B5EF4-FFF2-40B4-BE49-F238E27FC236}">
                     <a16:creationId xmlns:a16="http://schemas.microsoft.com/office/drawing/2014/main" id="{47E69C9C-42B6-9B0F-9AE0-20D17703E490}"/>
@@ -15546,2064 +16282,7 @@
         <mc:Choice Requires="a14">
           <p:sp>
             <p:nvSpPr>
-              <p:cNvPr id="10" name="TextBox 9">
-                <a:extLst>
-                  <a:ext uri="{FF2B5EF4-FFF2-40B4-BE49-F238E27FC236}">
-                    <a16:creationId xmlns:a16="http://schemas.microsoft.com/office/drawing/2014/main" id="{5CD475E5-BE3B-5594-57DC-46A17411F2F9}"/>
-                  </a:ext>
-                </a:extLst>
-              </p:cNvPr>
-              <p:cNvSpPr txBox="1"/>
-              <p:nvPr/>
-            </p:nvSpPr>
-            <p:spPr>
-              <a:xfrm>
-                <a:off x="822820" y="1124198"/>
-                <a:ext cx="5273179" cy="2308324"/>
-              </a:xfrm>
-              <a:prstGeom prst="rect">
-                <a:avLst/>
-              </a:prstGeom>
-            </p:spPr>
-            <p:style>
-              <a:lnRef idx="2">
-                <a:schemeClr val="accent2"/>
-              </a:lnRef>
-              <a:fillRef idx="1">
-                <a:schemeClr val="lt1"/>
-              </a:fillRef>
-              <a:effectRef idx="0">
-                <a:schemeClr val="accent2"/>
-              </a:effectRef>
-              <a:fontRef idx="minor">
-                <a:schemeClr val="dk1"/>
-              </a:fontRef>
-            </p:style>
-            <p:txBody>
-              <a:bodyPr wrap="square">
-                <a:spAutoFit/>
-              </a:bodyPr>
-              <a:lstStyle/>
-              <a:p>
-                <a:r>
-                  <a:rPr lang="en-US" sz="1200" b="1" dirty="0"/>
-                  <a:t>General</a:t>
-                </a:r>
-                <a:endParaRPr lang="en-US" sz="1200" dirty="0"/>
-              </a:p>
-              <a:p>
-                <a14:m>
-                  <m:oMath xmlns:m="http://schemas.openxmlformats.org/officeDocument/2006/math">
-                    <m:r>
-                      <a:rPr lang="en-US" sz="1200" i="1" dirty="0" smtClean="0">
-                        <a:latin typeface="Cambria Math" panose="02040503050406030204" pitchFamily="18" charset="0"/>
-                      </a:rPr>
-                      <m:t>𝑋</m:t>
-                    </m:r>
-                  </m:oMath>
-                </a14:m>
-                <a:r>
-                  <a:rPr lang="en-US" sz="1200" dirty="0"/>
-                  <a:t>	capital letters: random variables</a:t>
-                </a:r>
-                <a:br>
-                  <a:rPr lang="en-US" sz="1200" dirty="0"/>
-                </a:br>
-                <a14:m>
-                  <m:oMath xmlns:m="http://schemas.openxmlformats.org/officeDocument/2006/math">
-                    <m:r>
-                      <a:rPr lang="en-US" sz="1200" b="0" i="1" smtClean="0">
-                        <a:latin typeface="Cambria Math" panose="02040503050406030204" pitchFamily="18" charset="0"/>
-                      </a:rPr>
-                      <m:t>𝑥</m:t>
-                    </m:r>
-                    <m:r>
-                      <a:rPr lang="en-US" sz="1200" b="0" i="0" smtClean="0">
-                        <a:latin typeface="Cambria Math" panose="02040503050406030204" pitchFamily="18" charset="0"/>
-                      </a:rPr>
-                      <m:t>, </m:t>
-                    </m:r>
-                    <m:r>
-                      <a:rPr lang="en-US" sz="1200" b="0" i="1" smtClean="0">
-                        <a:latin typeface="Cambria Math" panose="02040503050406030204" pitchFamily="18" charset="0"/>
-                      </a:rPr>
-                      <m:t>𝑝</m:t>
-                    </m:r>
-                  </m:oMath>
-                </a14:m>
-                <a:r>
-                  <a:rPr lang="en-US" sz="1200" dirty="0"/>
-                  <a:t>	lower-case letters: realizations of random variables </a:t>
-                </a:r>
-                <a:br>
-                  <a:rPr lang="en-US" sz="1200" dirty="0"/>
-                </a:br>
-                <a:r>
-                  <a:rPr lang="en-US" sz="1200" dirty="0"/>
-                  <a:t>	or scalar functions</a:t>
-                </a:r>
-              </a:p>
-              <a:p>
-                <a14:m>
-                  <m:oMath xmlns:m="http://schemas.openxmlformats.org/officeDocument/2006/math">
-                    <m:r>
-                      <a:rPr lang="en-US" sz="1200" b="1" i="1" smtClean="0">
-                        <a:latin typeface="Cambria Math" panose="02040503050406030204" pitchFamily="18" charset="0"/>
-                      </a:rPr>
-                      <m:t>𝒘</m:t>
-                    </m:r>
-                  </m:oMath>
-                </a14:m>
-                <a:r>
-                  <a:rPr lang="en-US" sz="1200" dirty="0"/>
-                  <a:t> 	Bold lower-case letters: real-valued vectors </a:t>
-                </a:r>
-                <a:br>
-                  <a:rPr lang="en-US" sz="1200" dirty="0"/>
-                </a:br>
-                <a:r>
-                  <a:rPr lang="en-US" sz="1200" dirty="0"/>
-                  <a:t>	(even if random variables)</a:t>
-                </a:r>
-              </a:p>
-              <a:p>
-                <a14:m>
-                  <m:oMath xmlns:m="http://schemas.openxmlformats.org/officeDocument/2006/math">
-                    <m:r>
-                      <a:rPr lang="en-US" sz="1200" b="1" i="1" smtClean="0">
-                        <a:latin typeface="Cambria Math" panose="02040503050406030204" pitchFamily="18" charset="0"/>
-                      </a:rPr>
-                      <m:t>𝑾</m:t>
-                    </m:r>
-                  </m:oMath>
-                </a14:m>
-                <a:r>
-                  <a:rPr lang="en-US" sz="1200" dirty="0"/>
-                  <a:t>	bold capitals: matrices</a:t>
-                </a:r>
-              </a:p>
-              <a:p>
-                <a14:m>
-                  <m:oMath xmlns:m="http://schemas.openxmlformats.org/officeDocument/2006/math">
-                    <m:r>
-                      <a:rPr lang="en-US" sz="1200" b="0" i="1" smtClean="0">
-                        <a:latin typeface="Cambria Math" panose="02040503050406030204" pitchFamily="18" charset="0"/>
-                      </a:rPr>
-                      <m:t>𝛼</m:t>
-                    </m:r>
-                  </m:oMath>
-                </a14:m>
-                <a:r>
-                  <a:rPr lang="en-US" sz="1200" dirty="0"/>
-                  <a:t>	Greek letters: parameters (vectors if in bolt)</a:t>
-                </a:r>
-              </a:p>
-              <a:p>
-                <a14:m>
-                  <m:oMath xmlns:m="http://schemas.openxmlformats.org/officeDocument/2006/math">
-                    <m:r>
-                      <m:rPr>
-                        <m:sty m:val="p"/>
-                      </m:rPr>
-                      <a:rPr lang="en-US" sz="1200" i="1" dirty="0">
-                        <a:latin typeface="Cambria Math" panose="02040503050406030204" pitchFamily="18" charset="0"/>
-                      </a:rPr>
-                      <m:t>Pr</m:t>
-                    </m:r>
-                    <m:r>
-                      <a:rPr lang="en-US" sz="1200" i="1" dirty="0">
-                        <a:latin typeface="Cambria Math" panose="02040503050406030204" pitchFamily="18" charset="0"/>
-                      </a:rPr>
-                      <m:t>⁡{</m:t>
-                    </m:r>
-                    <m:r>
-                      <a:rPr lang="en-US" sz="1200" i="1" dirty="0">
-                        <a:latin typeface="Cambria Math" panose="02040503050406030204" pitchFamily="18" charset="0"/>
-                      </a:rPr>
-                      <m:t>𝑋</m:t>
-                    </m:r>
-                    <m:r>
-                      <a:rPr lang="en-US" sz="1200" i="1" dirty="0">
-                        <a:latin typeface="Cambria Math" panose="02040503050406030204" pitchFamily="18" charset="0"/>
-                      </a:rPr>
-                      <m:t>=</m:t>
-                    </m:r>
-                    <m:r>
-                      <a:rPr lang="en-US" sz="1200" i="1" dirty="0">
-                        <a:latin typeface="Cambria Math" panose="02040503050406030204" pitchFamily="18" charset="0"/>
-                      </a:rPr>
-                      <m:t>𝑥</m:t>
-                    </m:r>
-                    <m:r>
-                      <a:rPr lang="en-US" sz="1200" i="1" dirty="0">
-                        <a:latin typeface="Cambria Math" panose="02040503050406030204" pitchFamily="18" charset="0"/>
-                      </a:rPr>
-                      <m:t>}</m:t>
-                    </m:r>
-                  </m:oMath>
-                </a14:m>
-                <a:r>
-                  <a:rPr lang="en-US" sz="1200" dirty="0"/>
-                  <a:t>	probability that a random variable </a:t>
-                </a:r>
-                <a14:m>
-                  <m:oMath xmlns:m="http://schemas.openxmlformats.org/officeDocument/2006/math">
-                    <m:r>
-                      <a:rPr lang="en-US" sz="1200" i="1" dirty="0">
-                        <a:latin typeface="Cambria Math" panose="02040503050406030204" pitchFamily="18" charset="0"/>
-                      </a:rPr>
-                      <m:t>𝑋</m:t>
-                    </m:r>
-                  </m:oMath>
-                </a14:m>
-                <a:r>
-                  <a:rPr lang="en-US" sz="1200" dirty="0"/>
-                  <a:t> takes on the value </a:t>
-                </a:r>
-                <a14:m>
-                  <m:oMath xmlns:m="http://schemas.openxmlformats.org/officeDocument/2006/math">
-                    <m:r>
-                      <a:rPr lang="en-US" sz="1200" i="1" dirty="0">
-                        <a:latin typeface="Cambria Math" panose="02040503050406030204" pitchFamily="18" charset="0"/>
-                      </a:rPr>
-                      <m:t>𝑥</m:t>
-                    </m:r>
-                  </m:oMath>
-                </a14:m>
-                <a:endParaRPr lang="en-US" sz="1200" dirty="0"/>
-              </a:p>
-              <a:p>
-                <a14:m>
-                  <m:oMath xmlns:m="http://schemas.openxmlformats.org/officeDocument/2006/math">
-                    <m:r>
-                      <a:rPr lang="en-US" sz="1200" i="1" dirty="0">
-                        <a:latin typeface="Cambria Math" panose="02040503050406030204" pitchFamily="18" charset="0"/>
-                      </a:rPr>
-                      <m:t>𝑋</m:t>
-                    </m:r>
-                    <m:r>
-                      <a:rPr lang="en-US" sz="1200" i="1" dirty="0">
-                        <a:latin typeface="Cambria Math" panose="02040503050406030204" pitchFamily="18" charset="0"/>
-                      </a:rPr>
-                      <m:t>~</m:t>
-                    </m:r>
-                    <m:r>
-                      <a:rPr lang="en-US" sz="1200" i="1" dirty="0">
-                        <a:latin typeface="Cambria Math" panose="02040503050406030204" pitchFamily="18" charset="0"/>
-                      </a:rPr>
-                      <m:t>𝑝</m:t>
-                    </m:r>
-                  </m:oMath>
-                </a14:m>
-                <a:r>
-                  <a:rPr lang="en-US" sz="1200" dirty="0"/>
-                  <a:t>	random variable </a:t>
-                </a:r>
-                <a14:m>
-                  <m:oMath xmlns:m="http://schemas.openxmlformats.org/officeDocument/2006/math">
-                    <m:r>
-                      <a:rPr lang="en-US" sz="1200" i="1" dirty="0">
-                        <a:latin typeface="Cambria Math" panose="02040503050406030204" pitchFamily="18" charset="0"/>
-                      </a:rPr>
-                      <m:t>𝑋</m:t>
-                    </m:r>
-                  </m:oMath>
-                </a14:m>
-                <a:r>
-                  <a:rPr lang="en-US" sz="1200" dirty="0"/>
-                  <a:t> selected from distribution </a:t>
-                </a:r>
-                <a14:m>
-                  <m:oMath xmlns:m="http://schemas.openxmlformats.org/officeDocument/2006/math">
-                    <m:r>
-                      <a:rPr lang="en-US" sz="1200" i="1">
-                        <a:latin typeface="Cambria Math" panose="02040503050406030204" pitchFamily="18" charset="0"/>
-                      </a:rPr>
-                      <m:t>𝑝</m:t>
-                    </m:r>
-                    <m:d>
-                      <m:dPr>
-                        <m:ctrlPr>
-                          <a:rPr lang="en-US" sz="1200" i="1">
-                            <a:latin typeface="Cambria Math" panose="02040503050406030204" pitchFamily="18" charset="0"/>
-                          </a:rPr>
-                        </m:ctrlPr>
-                      </m:dPr>
-                      <m:e>
-                        <m:r>
-                          <a:rPr lang="en-US" sz="1200" i="1">
-                            <a:latin typeface="Cambria Math" panose="02040503050406030204" pitchFamily="18" charset="0"/>
-                          </a:rPr>
-                          <m:t>𝑥</m:t>
-                        </m:r>
-                      </m:e>
-                    </m:d>
-                    <m:r>
-                      <a:rPr lang="en-US" sz="1200" i="1">
-                        <a:latin typeface="Cambria Math" panose="02040503050406030204" pitchFamily="18" charset="0"/>
-                      </a:rPr>
-                      <m:t>=</m:t>
-                    </m:r>
-                    <m:r>
-                      <m:rPr>
-                        <m:sty m:val="p"/>
-                      </m:rPr>
-                      <a:rPr lang="en-US" sz="1200">
-                        <a:latin typeface="Cambria Math" panose="02040503050406030204" pitchFamily="18" charset="0"/>
-                      </a:rPr>
-                      <m:t>Pr</m:t>
-                    </m:r>
-                    <m:r>
-                      <a:rPr lang="en-US" sz="1200" i="1">
-                        <a:latin typeface="Cambria Math" panose="02040503050406030204" pitchFamily="18" charset="0"/>
-                      </a:rPr>
-                      <m:t>⁡{</m:t>
-                    </m:r>
-                    <m:r>
-                      <a:rPr lang="en-US" sz="1200" i="1">
-                        <a:latin typeface="Cambria Math" panose="02040503050406030204" pitchFamily="18" charset="0"/>
-                      </a:rPr>
-                      <m:t>𝑋</m:t>
-                    </m:r>
-                    <m:r>
-                      <a:rPr lang="en-US" sz="1200" i="1">
-                        <a:latin typeface="Cambria Math" panose="02040503050406030204" pitchFamily="18" charset="0"/>
-                      </a:rPr>
-                      <m:t>=</m:t>
-                    </m:r>
-                    <m:r>
-                      <a:rPr lang="en-US" sz="1200" i="1">
-                        <a:latin typeface="Cambria Math" panose="02040503050406030204" pitchFamily="18" charset="0"/>
-                      </a:rPr>
-                      <m:t>𝑥</m:t>
-                    </m:r>
-                    <m:r>
-                      <a:rPr lang="en-US" sz="1200" i="1">
-                        <a:latin typeface="Cambria Math" panose="02040503050406030204" pitchFamily="18" charset="0"/>
-                      </a:rPr>
-                      <m:t>}</m:t>
-                    </m:r>
-                  </m:oMath>
-                </a14:m>
-                <a:endParaRPr lang="en-US" sz="1200" dirty="0"/>
-              </a:p>
-              <a:p>
-                <a14:m>
-                  <m:oMath xmlns:m="http://schemas.openxmlformats.org/officeDocument/2006/math">
-                    <m:r>
-                      <a:rPr lang="en-US" sz="1200" i="1">
-                        <a:latin typeface="Cambria Math" panose="02040503050406030204" pitchFamily="18" charset="0"/>
-                        <a:ea typeface="Cambria Math" panose="02040503050406030204" pitchFamily="18" charset="0"/>
-                      </a:rPr>
-                      <m:t>𝔼</m:t>
-                    </m:r>
-                    <m:r>
-                      <a:rPr lang="en-US" sz="1200" i="1">
-                        <a:latin typeface="Cambria Math" panose="02040503050406030204" pitchFamily="18" charset="0"/>
-                        <a:ea typeface="Cambria Math" panose="02040503050406030204" pitchFamily="18" charset="0"/>
-                      </a:rPr>
-                      <m:t>[</m:t>
-                    </m:r>
-                    <m:r>
-                      <a:rPr lang="en-US" sz="1200" i="1">
-                        <a:latin typeface="Cambria Math" panose="02040503050406030204" pitchFamily="18" charset="0"/>
-                        <a:ea typeface="Cambria Math" panose="02040503050406030204" pitchFamily="18" charset="0"/>
-                      </a:rPr>
-                      <m:t>𝑋</m:t>
-                    </m:r>
-                    <m:r>
-                      <a:rPr lang="en-US" sz="1200" i="1">
-                        <a:latin typeface="Cambria Math" panose="02040503050406030204" pitchFamily="18" charset="0"/>
-                        <a:ea typeface="Cambria Math" panose="02040503050406030204" pitchFamily="18" charset="0"/>
-                      </a:rPr>
-                      <m:t>]</m:t>
-                    </m:r>
-                  </m:oMath>
-                </a14:m>
-                <a:r>
-                  <a:rPr lang="en-US" sz="1200" dirty="0"/>
-                  <a:t>	expectation of a random variable </a:t>
-                </a:r>
-                <a14:m>
-                  <m:oMath xmlns:m="http://schemas.openxmlformats.org/officeDocument/2006/math">
-                    <m:r>
-                      <a:rPr lang="en-US" sz="1200" i="1" dirty="0">
-                        <a:latin typeface="Cambria Math" panose="02040503050406030204" pitchFamily="18" charset="0"/>
-                      </a:rPr>
-                      <m:t>𝑋</m:t>
-                    </m:r>
-                  </m:oMath>
-                </a14:m>
-                <a:r>
-                  <a:rPr lang="en-US" sz="1200" dirty="0"/>
-                  <a:t>, i.e., </a:t>
-                </a:r>
-                <a14:m>
-                  <m:oMath xmlns:m="http://schemas.openxmlformats.org/officeDocument/2006/math">
-                    <m:r>
-                      <a:rPr lang="en-US" sz="1200" i="1">
-                        <a:latin typeface="Cambria Math" panose="02040503050406030204" pitchFamily="18" charset="0"/>
-                        <a:ea typeface="Cambria Math" panose="02040503050406030204" pitchFamily="18" charset="0"/>
-                      </a:rPr>
-                      <m:t>𝔼</m:t>
-                    </m:r>
-                    <m:d>
-                      <m:dPr>
-                        <m:begChr m:val="["/>
-                        <m:endChr m:val="]"/>
-                        <m:ctrlPr>
-                          <a:rPr lang="en-US" sz="1200" i="1">
-                            <a:latin typeface="Cambria Math" panose="02040503050406030204" pitchFamily="18" charset="0"/>
-                            <a:ea typeface="Cambria Math" panose="02040503050406030204" pitchFamily="18" charset="0"/>
-                          </a:rPr>
-                        </m:ctrlPr>
-                      </m:dPr>
-                      <m:e>
-                        <m:r>
-                          <a:rPr lang="en-US" sz="1200" i="1">
-                            <a:latin typeface="Cambria Math" panose="02040503050406030204" pitchFamily="18" charset="0"/>
-                            <a:ea typeface="Cambria Math" panose="02040503050406030204" pitchFamily="18" charset="0"/>
-                          </a:rPr>
-                          <m:t>𝑋</m:t>
-                        </m:r>
-                      </m:e>
-                    </m:d>
-                    <m:r>
-                      <a:rPr lang="en-US" sz="1200" i="1">
-                        <a:latin typeface="Cambria Math" panose="02040503050406030204" pitchFamily="18" charset="0"/>
-                        <a:ea typeface="Cambria Math" panose="02040503050406030204" pitchFamily="18" charset="0"/>
-                      </a:rPr>
-                      <m:t>=</m:t>
-                    </m:r>
-                    <m:nary>
-                      <m:naryPr>
-                        <m:chr m:val="∑"/>
-                        <m:supHide m:val="on"/>
-                        <m:ctrlPr>
-                          <a:rPr lang="en-US" sz="1200" i="1">
-                            <a:latin typeface="Cambria Math" panose="02040503050406030204" pitchFamily="18" charset="0"/>
-                            <a:ea typeface="Cambria Math" panose="02040503050406030204" pitchFamily="18" charset="0"/>
-                          </a:rPr>
-                        </m:ctrlPr>
-                      </m:naryPr>
-                      <m:sub>
-                        <m:r>
-                          <a:rPr lang="en-US" sz="1200" i="1">
-                            <a:latin typeface="Cambria Math" panose="02040503050406030204" pitchFamily="18" charset="0"/>
-                            <a:ea typeface="Cambria Math" panose="02040503050406030204" pitchFamily="18" charset="0"/>
-                          </a:rPr>
-                          <m:t>𝑥</m:t>
-                        </m:r>
-                      </m:sub>
-                      <m:sup/>
-                      <m:e>
-                        <m:r>
-                          <a:rPr lang="en-US" sz="1200" i="1">
-                            <a:latin typeface="Cambria Math" panose="02040503050406030204" pitchFamily="18" charset="0"/>
-                            <a:ea typeface="Cambria Math" panose="02040503050406030204" pitchFamily="18" charset="0"/>
-                          </a:rPr>
-                          <m:t>𝑝</m:t>
-                        </m:r>
-                        <m:d>
-                          <m:dPr>
-                            <m:ctrlPr>
-                              <a:rPr lang="en-US" sz="1200" i="1">
-                                <a:latin typeface="Cambria Math" panose="02040503050406030204" pitchFamily="18" charset="0"/>
-                                <a:ea typeface="Cambria Math" panose="02040503050406030204" pitchFamily="18" charset="0"/>
-                              </a:rPr>
-                            </m:ctrlPr>
-                          </m:dPr>
-                          <m:e>
-                            <m:r>
-                              <a:rPr lang="en-US" sz="1200" i="1">
-                                <a:latin typeface="Cambria Math" panose="02040503050406030204" pitchFamily="18" charset="0"/>
-                                <a:ea typeface="Cambria Math" panose="02040503050406030204" pitchFamily="18" charset="0"/>
-                              </a:rPr>
-                              <m:t>𝑥</m:t>
-                            </m:r>
-                          </m:e>
-                        </m:d>
-                        <m:r>
-                          <a:rPr lang="en-US" sz="1200" i="1">
-                            <a:latin typeface="Cambria Math" panose="02040503050406030204" pitchFamily="18" charset="0"/>
-                            <a:ea typeface="Cambria Math" panose="02040503050406030204" pitchFamily="18" charset="0"/>
-                          </a:rPr>
-                          <m:t>𝑥</m:t>
-                        </m:r>
-                      </m:e>
-                    </m:nary>
-                  </m:oMath>
-                </a14:m>
-                <a:endParaRPr lang="en-US" sz="1200" dirty="0">
-                  <a:ea typeface="Cambria Math" panose="02040503050406030204" pitchFamily="18" charset="0"/>
-                </a:endParaRPr>
-              </a:p>
-              <a:p>
-                <a14:m>
-                  <m:oMath xmlns:m="http://schemas.openxmlformats.org/officeDocument/2006/math">
-                    <m:sSub>
-                      <m:sSubPr>
-                        <m:ctrlPr>
-                          <a:rPr lang="en-US" sz="1200" i="1" dirty="0">
-                            <a:latin typeface="Cambria Math" panose="02040503050406030204" pitchFamily="18" charset="0"/>
-                          </a:rPr>
-                        </m:ctrlPr>
-                      </m:sSubPr>
-                      <m:e>
-                        <m:r>
-                          <m:rPr>
-                            <m:sty m:val="p"/>
-                          </m:rPr>
-                          <a:rPr lang="en-US" sz="1200" dirty="0">
-                            <a:latin typeface="Cambria Math" panose="02040503050406030204" pitchFamily="18" charset="0"/>
-                          </a:rPr>
-                          <m:t>argmax</m:t>
-                        </m:r>
-                      </m:e>
-                      <m:sub>
-                        <m:r>
-                          <m:rPr>
-                            <m:sty m:val="p"/>
-                          </m:rPr>
-                          <a:rPr lang="en-US" sz="1200" dirty="0">
-                            <a:latin typeface="Cambria Math" panose="02040503050406030204" pitchFamily="18" charset="0"/>
-                          </a:rPr>
-                          <m:t>a</m:t>
-                        </m:r>
-                      </m:sub>
-                    </m:sSub>
-                    <m:r>
-                      <a:rPr lang="en-US" sz="1200" dirty="0">
-                        <a:latin typeface="Cambria Math" panose="02040503050406030204" pitchFamily="18" charset="0"/>
-                      </a:rPr>
-                      <m:t> </m:t>
-                    </m:r>
-                    <m:r>
-                      <a:rPr lang="en-US" sz="1200" i="1" dirty="0">
-                        <a:latin typeface="Cambria Math" panose="02040503050406030204" pitchFamily="18" charset="0"/>
-                      </a:rPr>
-                      <m:t>𝑓</m:t>
-                    </m:r>
-                    <m:r>
-                      <a:rPr lang="en-US" sz="1200" i="1" dirty="0">
-                        <a:latin typeface="Cambria Math" panose="02040503050406030204" pitchFamily="18" charset="0"/>
-                      </a:rPr>
-                      <m:t>(</m:t>
-                    </m:r>
-                    <m:r>
-                      <a:rPr lang="en-US" sz="1200" i="1" dirty="0">
-                        <a:latin typeface="Cambria Math" panose="02040503050406030204" pitchFamily="18" charset="0"/>
-                      </a:rPr>
-                      <m:t>𝑎</m:t>
-                    </m:r>
-                    <m:r>
-                      <a:rPr lang="en-US" sz="1200" i="1" dirty="0">
-                        <a:latin typeface="Cambria Math" panose="02040503050406030204" pitchFamily="18" charset="0"/>
-                      </a:rPr>
-                      <m:t>)</m:t>
-                    </m:r>
-                  </m:oMath>
-                </a14:m>
-                <a:r>
-                  <a:rPr lang="en-US" sz="1200" dirty="0"/>
-                  <a:t> a value of action </a:t>
-                </a:r>
-                <a14:m>
-                  <m:oMath xmlns:m="http://schemas.openxmlformats.org/officeDocument/2006/math">
-                    <m:r>
-                      <a:rPr lang="en-US" sz="1200" i="1" dirty="0">
-                        <a:latin typeface="Cambria Math" panose="02040503050406030204" pitchFamily="18" charset="0"/>
-                      </a:rPr>
-                      <m:t>𝑎</m:t>
-                    </m:r>
-                  </m:oMath>
-                </a14:m>
-                <a:r>
-                  <a:rPr lang="en-US" sz="1200" dirty="0"/>
-                  <a:t> at which </a:t>
-                </a:r>
-                <a14:m>
-                  <m:oMath xmlns:m="http://schemas.openxmlformats.org/officeDocument/2006/math">
-                    <m:r>
-                      <a:rPr lang="en-US" sz="1200" i="1" dirty="0">
-                        <a:latin typeface="Cambria Math" panose="02040503050406030204" pitchFamily="18" charset="0"/>
-                      </a:rPr>
-                      <m:t>𝑓</m:t>
-                    </m:r>
-                    <m:r>
-                      <a:rPr lang="en-US" sz="1200" i="1" dirty="0">
-                        <a:latin typeface="Cambria Math" panose="02040503050406030204" pitchFamily="18" charset="0"/>
-                      </a:rPr>
-                      <m:t>(</m:t>
-                    </m:r>
-                    <m:r>
-                      <a:rPr lang="en-US" sz="1200" i="1" dirty="0">
-                        <a:latin typeface="Cambria Math" panose="02040503050406030204" pitchFamily="18" charset="0"/>
-                      </a:rPr>
-                      <m:t>𝑎</m:t>
-                    </m:r>
-                    <m:r>
-                      <a:rPr lang="en-US" sz="1200" i="1" dirty="0">
-                        <a:latin typeface="Cambria Math" panose="02040503050406030204" pitchFamily="18" charset="0"/>
-                      </a:rPr>
-                      <m:t>)</m:t>
-                    </m:r>
-                  </m:oMath>
-                </a14:m>
-                <a:r>
-                  <a:rPr lang="en-US" sz="1200" dirty="0"/>
-                  <a:t> takes its maximal value</a:t>
-                </a:r>
-              </a:p>
-            </p:txBody>
-          </p:sp>
-        </mc:Choice>
-        <mc:Fallback xmlns="">
-          <p:sp>
-            <p:nvSpPr>
-              <p:cNvPr id="10" name="TextBox 9">
-                <a:extLst>
-                  <a:ext uri="{FF2B5EF4-FFF2-40B4-BE49-F238E27FC236}">
-                    <a16:creationId xmlns:a16="http://schemas.microsoft.com/office/drawing/2014/main" id="{5CD475E5-BE3B-5594-57DC-46A17411F2F9}"/>
-                  </a:ext>
-                </a:extLst>
-              </p:cNvPr>
-              <p:cNvSpPr txBox="1">
-                <a:spLocks noRot="1" noChangeAspect="1" noMove="1" noResize="1" noEditPoints="1" noAdjustHandles="1" noChangeArrowheads="1" noChangeShapeType="1" noTextEdit="1"/>
-              </p:cNvSpPr>
-              <p:nvPr/>
-            </p:nvSpPr>
-            <p:spPr>
-              <a:xfrm>
-                <a:off x="822820" y="1124198"/>
-                <a:ext cx="5273179" cy="2308324"/>
-              </a:xfrm>
-              <a:prstGeom prst="rect">
-                <a:avLst/>
-              </a:prstGeom>
-              <a:blipFill>
-                <a:blip r:embed="rId3"/>
-                <a:stretch>
-                  <a:fillRect b="-9424"/>
-                </a:stretch>
-              </a:blipFill>
-            </p:spPr>
-            <p:txBody>
-              <a:bodyPr/>
-              <a:lstStyle/>
-              <a:p>
-                <a:r>
-                  <a:rPr lang="en-US">
-                    <a:noFill/>
-                  </a:rPr>
-                  <a:t> </a:t>
-                </a:r>
-              </a:p>
-            </p:txBody>
-          </p:sp>
-        </mc:Fallback>
-      </mc:AlternateContent>
-      <mc:AlternateContent xmlns:mc="http://schemas.openxmlformats.org/markup-compatibility/2006" xmlns:a14="http://schemas.microsoft.com/office/drawing/2010/main">
-        <mc:Choice Requires="a14">
-          <p:sp>
-            <p:nvSpPr>
-              <p:cNvPr id="11" name="Content Placeholder 2">
-                <a:extLst>
-                  <a:ext uri="{FF2B5EF4-FFF2-40B4-BE49-F238E27FC236}">
-                    <a16:creationId xmlns:a16="http://schemas.microsoft.com/office/drawing/2014/main" id="{6F45EA4F-65F9-5141-0B09-C395CF9CA7A0}"/>
-                  </a:ext>
-                </a:extLst>
-              </p:cNvPr>
-              <p:cNvSpPr txBox="1">
-                <a:spLocks/>
-              </p:cNvSpPr>
-              <p:nvPr/>
-            </p:nvSpPr>
-            <p:spPr>
-              <a:xfrm>
-                <a:off x="6267338" y="1124198"/>
-                <a:ext cx="5273179" cy="3693383"/>
-              </a:xfrm>
-              <a:prstGeom prst="rect">
-                <a:avLst/>
-              </a:prstGeom>
-            </p:spPr>
-            <p:style>
-              <a:lnRef idx="2">
-                <a:schemeClr val="accent2"/>
-              </a:lnRef>
-              <a:fillRef idx="1">
-                <a:schemeClr val="lt1"/>
-              </a:fillRef>
-              <a:effectRef idx="0">
-                <a:schemeClr val="accent2"/>
-              </a:effectRef>
-              <a:fontRef idx="minor">
-                <a:schemeClr val="dk1"/>
-              </a:fontRef>
-            </p:style>
-            <p:txBody>
-              <a:bodyPr vert="horz" wrap="square" lIns="91440" tIns="45720" rIns="91440" bIns="45720" rtlCol="0">
-                <a:spAutoFit/>
-              </a:bodyPr>
-              <a:lstStyle>
-                <a:lvl1pPr marL="228600" indent="-228600" algn="l" defTabSz="914400" rtl="0" eaLnBrk="1" latinLnBrk="0" hangingPunct="1">
-                  <a:lnSpc>
-                    <a:spcPct val="90000"/>
-                  </a:lnSpc>
-                  <a:spcBef>
-                    <a:spcPts val="1000"/>
-                  </a:spcBef>
-                  <a:buFont typeface="Arial" panose="020B0604020202020204" pitchFamily="34" charset="0"/>
-                  <a:buChar char="•"/>
-                  <a:defRPr sz="2800" kern="1200">
-                    <a:solidFill>
-                      <a:schemeClr val="tx1"/>
-                    </a:solidFill>
-                    <a:latin typeface="+mn-lt"/>
-                    <a:ea typeface="+mn-ea"/>
-                    <a:cs typeface="+mn-cs"/>
-                  </a:defRPr>
-                </a:lvl1pPr>
-                <a:lvl2pPr marL="685800" indent="-228600" algn="l" defTabSz="914400" rtl="0" eaLnBrk="1" latinLnBrk="0" hangingPunct="1">
-                  <a:lnSpc>
-                    <a:spcPct val="90000"/>
-                  </a:lnSpc>
-                  <a:spcBef>
-                    <a:spcPts val="500"/>
-                  </a:spcBef>
-                  <a:buFont typeface="Arial" panose="020B0604020202020204" pitchFamily="34" charset="0"/>
-                  <a:buChar char="•"/>
-                  <a:defRPr sz="2400" kern="1200">
-                    <a:solidFill>
-                      <a:schemeClr val="tx1"/>
-                    </a:solidFill>
-                    <a:latin typeface="+mn-lt"/>
-                    <a:ea typeface="+mn-ea"/>
-                    <a:cs typeface="+mn-cs"/>
-                  </a:defRPr>
-                </a:lvl2pPr>
-                <a:lvl3pPr marL="1143000" indent="-228600" algn="l" defTabSz="914400" rtl="0" eaLnBrk="1" latinLnBrk="0" hangingPunct="1">
-                  <a:lnSpc>
-                    <a:spcPct val="90000"/>
-                  </a:lnSpc>
-                  <a:spcBef>
-                    <a:spcPts val="500"/>
-                  </a:spcBef>
-                  <a:buFont typeface="Arial" panose="020B0604020202020204" pitchFamily="34" charset="0"/>
-                  <a:buChar char="•"/>
-                  <a:defRPr sz="2000" kern="1200">
-                    <a:solidFill>
-                      <a:schemeClr val="tx1"/>
-                    </a:solidFill>
-                    <a:latin typeface="+mn-lt"/>
-                    <a:ea typeface="+mn-ea"/>
-                    <a:cs typeface="+mn-cs"/>
-                  </a:defRPr>
-                </a:lvl3pPr>
-                <a:lvl4pPr marL="1600200" indent="-228600" algn="l" defTabSz="914400" rtl="0" eaLnBrk="1" latinLnBrk="0" hangingPunct="1">
-                  <a:lnSpc>
-                    <a:spcPct val="90000"/>
-                  </a:lnSpc>
-                  <a:spcBef>
-                    <a:spcPts val="500"/>
-                  </a:spcBef>
-                  <a:buFont typeface="Arial" panose="020B0604020202020204" pitchFamily="34" charset="0"/>
-                  <a:buChar char="•"/>
-                  <a:defRPr sz="1800" kern="1200">
-                    <a:solidFill>
-                      <a:schemeClr val="tx1"/>
-                    </a:solidFill>
-                    <a:latin typeface="+mn-lt"/>
-                    <a:ea typeface="+mn-ea"/>
-                    <a:cs typeface="+mn-cs"/>
-                  </a:defRPr>
-                </a:lvl4pPr>
-                <a:lvl5pPr marL="2057400" indent="-228600" algn="l" defTabSz="914400" rtl="0" eaLnBrk="1" latinLnBrk="0" hangingPunct="1">
-                  <a:lnSpc>
-                    <a:spcPct val="90000"/>
-                  </a:lnSpc>
-                  <a:spcBef>
-                    <a:spcPts val="500"/>
-                  </a:spcBef>
-                  <a:buFont typeface="Arial" panose="020B0604020202020204" pitchFamily="34" charset="0"/>
-                  <a:buChar char="•"/>
-                  <a:defRPr sz="1800" kern="1200">
-                    <a:solidFill>
-                      <a:schemeClr val="tx1"/>
-                    </a:solidFill>
-                    <a:latin typeface="+mn-lt"/>
-                    <a:ea typeface="+mn-ea"/>
-                    <a:cs typeface="+mn-cs"/>
-                  </a:defRPr>
-                </a:lvl5pPr>
-                <a:lvl6pPr marL="2514600" indent="-228600" algn="l" defTabSz="914400" rtl="0" eaLnBrk="1" latinLnBrk="0" hangingPunct="1">
-                  <a:lnSpc>
-                    <a:spcPct val="90000"/>
-                  </a:lnSpc>
-                  <a:spcBef>
-                    <a:spcPts val="500"/>
-                  </a:spcBef>
-                  <a:buFont typeface="Arial" panose="020B0604020202020204" pitchFamily="34" charset="0"/>
-                  <a:buChar char="•"/>
-                  <a:defRPr sz="1800" kern="1200">
-                    <a:solidFill>
-                      <a:schemeClr val="tx1"/>
-                    </a:solidFill>
-                    <a:latin typeface="+mn-lt"/>
-                    <a:ea typeface="+mn-ea"/>
-                    <a:cs typeface="+mn-cs"/>
-                  </a:defRPr>
-                </a:lvl6pPr>
-                <a:lvl7pPr marL="2971800" indent="-228600" algn="l" defTabSz="914400" rtl="0" eaLnBrk="1" latinLnBrk="0" hangingPunct="1">
-                  <a:lnSpc>
-                    <a:spcPct val="90000"/>
-                  </a:lnSpc>
-                  <a:spcBef>
-                    <a:spcPts val="500"/>
-                  </a:spcBef>
-                  <a:buFont typeface="Arial" panose="020B0604020202020204" pitchFamily="34" charset="0"/>
-                  <a:buChar char="•"/>
-                  <a:defRPr sz="1800" kern="1200">
-                    <a:solidFill>
-                      <a:schemeClr val="tx1"/>
-                    </a:solidFill>
-                    <a:latin typeface="+mn-lt"/>
-                    <a:ea typeface="+mn-ea"/>
-                    <a:cs typeface="+mn-cs"/>
-                  </a:defRPr>
-                </a:lvl7pPr>
-                <a:lvl8pPr marL="3429000" indent="-228600" algn="l" defTabSz="914400" rtl="0" eaLnBrk="1" latinLnBrk="0" hangingPunct="1">
-                  <a:lnSpc>
-                    <a:spcPct val="90000"/>
-                  </a:lnSpc>
-                  <a:spcBef>
-                    <a:spcPts val="500"/>
-                  </a:spcBef>
-                  <a:buFont typeface="Arial" panose="020B0604020202020204" pitchFamily="34" charset="0"/>
-                  <a:buChar char="•"/>
-                  <a:defRPr sz="1800" kern="1200">
-                    <a:solidFill>
-                      <a:schemeClr val="tx1"/>
-                    </a:solidFill>
-                    <a:latin typeface="+mn-lt"/>
-                    <a:ea typeface="+mn-ea"/>
-                    <a:cs typeface="+mn-cs"/>
-                  </a:defRPr>
-                </a:lvl8pPr>
-                <a:lvl9pPr marL="3886200" indent="-228600" algn="l" defTabSz="914400" rtl="0" eaLnBrk="1" latinLnBrk="0" hangingPunct="1">
-                  <a:lnSpc>
-                    <a:spcPct val="90000"/>
-                  </a:lnSpc>
-                  <a:spcBef>
-                    <a:spcPts val="500"/>
-                  </a:spcBef>
-                  <a:buFont typeface="Arial" panose="020B0604020202020204" pitchFamily="34" charset="0"/>
-                  <a:buChar char="•"/>
-                  <a:defRPr sz="1800" kern="1200">
-                    <a:solidFill>
-                      <a:schemeClr val="tx1"/>
-                    </a:solidFill>
-                    <a:latin typeface="+mn-lt"/>
-                    <a:ea typeface="+mn-ea"/>
-                    <a:cs typeface="+mn-cs"/>
-                  </a:defRPr>
-                </a:lvl9pPr>
-              </a:lstStyle>
-              <a:p>
-                <a:pPr marL="0" indent="0">
-                  <a:spcBef>
-                    <a:spcPts val="0"/>
-                  </a:spcBef>
-                  <a:buNone/>
-                </a:pPr>
-                <a:r>
-                  <a:rPr lang="en-US" sz="1200" b="1" dirty="0"/>
-                  <a:t>MDP</a:t>
-                </a:r>
-              </a:p>
-              <a:p>
-                <a:pPr marL="0" indent="0">
-                  <a:spcBef>
-                    <a:spcPts val="0"/>
-                  </a:spcBef>
-                  <a:buNone/>
-                </a:pPr>
-                <a14:m>
-                  <m:oMath xmlns:m="http://schemas.openxmlformats.org/officeDocument/2006/math">
-                    <m:r>
-                      <a:rPr lang="en-US" sz="1200" i="1" dirty="0" smtClean="0">
-                        <a:latin typeface="Cambria Math" panose="02040503050406030204" pitchFamily="18" charset="0"/>
-                      </a:rPr>
-                      <m:t>𝑠</m:t>
-                    </m:r>
-                    <m:r>
-                      <a:rPr lang="en-US" sz="1200" i="1" dirty="0" smtClean="0">
-                        <a:latin typeface="Cambria Math" panose="02040503050406030204" pitchFamily="18" charset="0"/>
-                      </a:rPr>
-                      <m:t>, </m:t>
-                    </m:r>
-                    <m:r>
-                      <a:rPr lang="en-US" sz="1200" i="1" dirty="0" smtClean="0">
-                        <a:latin typeface="Cambria Math" panose="02040503050406030204" pitchFamily="18" charset="0"/>
-                      </a:rPr>
-                      <m:t>𝑠</m:t>
-                    </m:r>
-                    <m:r>
-                      <a:rPr lang="en-US" sz="1200" b="0" i="1" dirty="0" smtClean="0">
-                        <a:latin typeface="Cambria Math" panose="02040503050406030204" pitchFamily="18" charset="0"/>
-                      </a:rPr>
-                      <m:t>′</m:t>
-                    </m:r>
-                  </m:oMath>
-                </a14:m>
-                <a:r>
-                  <a:rPr lang="en-US" sz="1200" dirty="0"/>
-                  <a:t> 	states</a:t>
-                </a:r>
-              </a:p>
-              <a:p>
-                <a:pPr marL="0" indent="0">
-                  <a:spcBef>
-                    <a:spcPts val="0"/>
-                  </a:spcBef>
-                  <a:buNone/>
-                </a:pPr>
-                <a14:m>
-                  <m:oMath xmlns:m="http://schemas.openxmlformats.org/officeDocument/2006/math">
-                    <m:r>
-                      <a:rPr lang="en-US" sz="1200" i="1" dirty="0" smtClean="0">
-                        <a:latin typeface="Cambria Math" panose="02040503050406030204" pitchFamily="18" charset="0"/>
-                      </a:rPr>
-                      <m:t>𝑎</m:t>
-                    </m:r>
-                  </m:oMath>
-                </a14:m>
-                <a:r>
-                  <a:rPr lang="en-US" sz="1200" dirty="0"/>
-                  <a:t> 	an action</a:t>
-                </a:r>
-              </a:p>
-              <a:p>
-                <a:pPr marL="0" indent="0">
-                  <a:spcBef>
-                    <a:spcPts val="0"/>
-                  </a:spcBef>
-                  <a:buNone/>
-                </a:pPr>
-                <a14:m>
-                  <m:oMath xmlns:m="http://schemas.openxmlformats.org/officeDocument/2006/math">
-                    <m:r>
-                      <a:rPr lang="en-US" sz="1200" i="1" dirty="0" smtClean="0">
-                        <a:latin typeface="Cambria Math" panose="02040503050406030204" pitchFamily="18" charset="0"/>
-                      </a:rPr>
-                      <m:t>𝑟</m:t>
-                    </m:r>
-                  </m:oMath>
-                </a14:m>
-                <a:r>
-                  <a:rPr lang="en-US" sz="1200" dirty="0"/>
-                  <a:t> 	a reward</a:t>
-                </a:r>
-              </a:p>
-              <a:p>
-                <a:pPr marL="0" indent="0">
-                  <a:spcBef>
-                    <a:spcPts val="0"/>
-                  </a:spcBef>
-                  <a:buNone/>
-                </a:pPr>
-                <a14:m>
-                  <m:oMath xmlns:m="http://schemas.openxmlformats.org/officeDocument/2006/math">
-                    <m:r>
-                      <a:rPr lang="en-US" sz="1200" i="1" dirty="0" smtClean="0">
-                        <a:latin typeface="Cambria Math" panose="02040503050406030204" pitchFamily="18" charset="0"/>
-                        <a:ea typeface="Cambria Math" panose="02040503050406030204" pitchFamily="18" charset="0"/>
-                      </a:rPr>
-                      <m:t>𝒮</m:t>
-                    </m:r>
-                  </m:oMath>
-                </a14:m>
-                <a:r>
-                  <a:rPr lang="en-US" sz="1200" dirty="0"/>
-                  <a:t> 	set of all (nonterminal) states, </a:t>
-                </a:r>
-                <a14:m>
-                  <m:oMath xmlns:m="http://schemas.openxmlformats.org/officeDocument/2006/math">
-                    <m:sSup>
-                      <m:sSupPr>
-                        <m:ctrlPr>
-                          <a:rPr lang="en-US" sz="1200" b="0" i="1" dirty="0" smtClean="0">
-                            <a:latin typeface="Cambria Math" panose="02040503050406030204" pitchFamily="18" charset="0"/>
-                            <a:ea typeface="Cambria Math" panose="02040503050406030204" pitchFamily="18" charset="0"/>
-                          </a:rPr>
-                        </m:ctrlPr>
-                      </m:sSupPr>
-                      <m:e>
-                        <m:r>
-                          <a:rPr lang="en-US" sz="1200" i="1" dirty="0">
-                            <a:latin typeface="Cambria Math" panose="02040503050406030204" pitchFamily="18" charset="0"/>
-                            <a:ea typeface="Cambria Math" panose="02040503050406030204" pitchFamily="18" charset="0"/>
-                          </a:rPr>
-                          <m:t>𝒮</m:t>
-                        </m:r>
-                      </m:e>
-                      <m:sup>
-                        <m:r>
-                          <a:rPr lang="en-US" sz="1200" b="0" i="1" dirty="0" smtClean="0">
-                            <a:latin typeface="Cambria Math" panose="02040503050406030204" pitchFamily="18" charset="0"/>
-                            <a:ea typeface="Cambria Math" panose="02040503050406030204" pitchFamily="18" charset="0"/>
-                          </a:rPr>
-                          <m:t>+</m:t>
-                        </m:r>
-                      </m:sup>
-                    </m:sSup>
-                  </m:oMath>
-                </a14:m>
-                <a:r>
-                  <a:rPr lang="en-US" sz="1200" dirty="0"/>
-                  <a:t> are all states </a:t>
-                </a:r>
-              </a:p>
-              <a:p>
-                <a:pPr marL="0" indent="0">
-                  <a:spcBef>
-                    <a:spcPts val="0"/>
-                  </a:spcBef>
-                  <a:buNone/>
-                </a:pPr>
-                <a14:m>
-                  <m:oMath xmlns:m="http://schemas.openxmlformats.org/officeDocument/2006/math">
-                    <m:r>
-                      <a:rPr lang="en-US" sz="1200" i="1" dirty="0" smtClean="0">
-                        <a:latin typeface="Cambria Math" panose="02040503050406030204" pitchFamily="18" charset="0"/>
-                        <a:ea typeface="Cambria Math" panose="02040503050406030204" pitchFamily="18" charset="0"/>
-                      </a:rPr>
-                      <m:t>𝒜</m:t>
-                    </m:r>
-                    <m:r>
-                      <a:rPr lang="en-US" sz="1200" i="1" dirty="0">
-                        <a:latin typeface="Cambria Math" panose="02040503050406030204" pitchFamily="18" charset="0"/>
-                      </a:rPr>
-                      <m:t>(</m:t>
-                    </m:r>
-                    <m:r>
-                      <a:rPr lang="en-US" sz="1200" i="1" dirty="0">
-                        <a:latin typeface="Cambria Math" panose="02040503050406030204" pitchFamily="18" charset="0"/>
-                      </a:rPr>
-                      <m:t>𝑠</m:t>
-                    </m:r>
-                    <m:r>
-                      <a:rPr lang="en-US" sz="1200" i="1" dirty="0">
-                        <a:latin typeface="Cambria Math" panose="02040503050406030204" pitchFamily="18" charset="0"/>
-                      </a:rPr>
-                      <m:t>)</m:t>
-                    </m:r>
-                  </m:oMath>
-                </a14:m>
-                <a:r>
-                  <a:rPr lang="en-US" sz="1200" dirty="0"/>
-                  <a:t>	set of all actions available in state </a:t>
-                </a:r>
-                <a14:m>
-                  <m:oMath xmlns:m="http://schemas.openxmlformats.org/officeDocument/2006/math">
-                    <m:r>
-                      <a:rPr lang="en-US" sz="1200" i="1" dirty="0" smtClean="0">
-                        <a:latin typeface="Cambria Math" panose="02040503050406030204" pitchFamily="18" charset="0"/>
-                      </a:rPr>
-                      <m:t>𝑠</m:t>
-                    </m:r>
-                  </m:oMath>
-                </a14:m>
-                <a:endParaRPr lang="en-US" sz="1200" dirty="0"/>
-              </a:p>
-              <a:p>
-                <a:pPr marL="0" indent="0">
-                  <a:spcBef>
-                    <a:spcPts val="0"/>
-                  </a:spcBef>
-                  <a:buNone/>
-                </a:pPr>
-                <a14:m>
-                  <m:oMath xmlns:m="http://schemas.openxmlformats.org/officeDocument/2006/math">
-                    <m:r>
-                      <a:rPr lang="en-US" sz="1200" i="1">
-                        <a:latin typeface="Cambria Math" panose="02040503050406030204" pitchFamily="18" charset="0"/>
-                      </a:rPr>
-                      <m:t>𝛾</m:t>
-                    </m:r>
-                  </m:oMath>
-                </a14:m>
-                <a:r>
-                  <a:rPr lang="en-US" sz="1200" dirty="0"/>
-                  <a:t> 	discount-rate parameter</a:t>
-                </a:r>
-                <a:endParaRPr lang="en-US" sz="1200" i="1" dirty="0">
-                  <a:latin typeface="Cambria Math" panose="02040503050406030204" pitchFamily="18" charset="0"/>
-                </a:endParaRPr>
-              </a:p>
-              <a:p>
-                <a:pPr marL="0" indent="0">
-                  <a:spcBef>
-                    <a:spcPts val="0"/>
-                  </a:spcBef>
-                  <a:buNone/>
-                </a:pPr>
-                <a14:m>
-                  <m:oMath xmlns:m="http://schemas.openxmlformats.org/officeDocument/2006/math">
-                    <m:r>
-                      <a:rPr lang="en-US" sz="1200" i="1" dirty="0" smtClean="0">
-                        <a:latin typeface="Cambria Math" panose="02040503050406030204" pitchFamily="18" charset="0"/>
-                      </a:rPr>
-                      <m:t>𝑡</m:t>
-                    </m:r>
-                  </m:oMath>
-                </a14:m>
-                <a:r>
-                  <a:rPr lang="en-US" sz="1200" dirty="0"/>
-                  <a:t> 	discrete time step</a:t>
-                </a:r>
-              </a:p>
-              <a:p>
-                <a:pPr marL="0" indent="0">
-                  <a:spcBef>
-                    <a:spcPts val="0"/>
-                  </a:spcBef>
-                  <a:buNone/>
-                </a:pPr>
-                <a14:m>
-                  <m:oMath xmlns:m="http://schemas.openxmlformats.org/officeDocument/2006/math">
-                    <m:r>
-                      <a:rPr lang="en-US" sz="1200" i="1" dirty="0" smtClean="0">
-                        <a:latin typeface="Cambria Math" panose="02040503050406030204" pitchFamily="18" charset="0"/>
-                      </a:rPr>
-                      <m:t>𝑇</m:t>
-                    </m:r>
-                  </m:oMath>
-                </a14:m>
-                <a:r>
-                  <a:rPr lang="en-US" sz="1200" dirty="0"/>
-                  <a:t> 	final time step of an episode (a.k.a. horizon)</a:t>
-                </a:r>
-              </a:p>
-              <a:p>
-                <a:pPr marL="0" indent="0">
-                  <a:spcBef>
-                    <a:spcPts val="0"/>
-                  </a:spcBef>
-                  <a:buNone/>
-                </a:pPr>
-                <a14:m>
-                  <m:oMath xmlns:m="http://schemas.openxmlformats.org/officeDocument/2006/math">
-                    <m:sSub>
-                      <m:sSubPr>
-                        <m:ctrlPr>
-                          <a:rPr lang="en-US" sz="1200" b="0" i="1" dirty="0" smtClean="0">
-                            <a:latin typeface="Cambria Math" panose="02040503050406030204" pitchFamily="18" charset="0"/>
-                          </a:rPr>
-                        </m:ctrlPr>
-                      </m:sSubPr>
-                      <m:e>
-                        <m:r>
-                          <a:rPr lang="en-US" sz="1200" i="1" dirty="0" smtClean="0">
-                            <a:latin typeface="Cambria Math" panose="02040503050406030204" pitchFamily="18" charset="0"/>
-                          </a:rPr>
-                          <m:t>𝐴</m:t>
-                        </m:r>
-                      </m:e>
-                      <m:sub>
-                        <m:r>
-                          <a:rPr lang="en-US" sz="1200" b="0" i="1" dirty="0" smtClean="0">
-                            <a:latin typeface="Cambria Math" panose="02040503050406030204" pitchFamily="18" charset="0"/>
-                          </a:rPr>
-                          <m:t>𝑡</m:t>
-                        </m:r>
-                      </m:sub>
-                    </m:sSub>
-                  </m:oMath>
-                </a14:m>
-                <a:r>
-                  <a:rPr lang="en-US" sz="1200" dirty="0"/>
-                  <a:t> 	random variable for the action at time </a:t>
-                </a:r>
-                <a14:m>
-                  <m:oMath xmlns:m="http://schemas.openxmlformats.org/officeDocument/2006/math">
-                    <m:r>
-                      <a:rPr lang="en-US" sz="1200" i="1" dirty="0" smtClean="0">
-                        <a:latin typeface="Cambria Math" panose="02040503050406030204" pitchFamily="18" charset="0"/>
-                      </a:rPr>
-                      <m:t>𝑡</m:t>
-                    </m:r>
-                  </m:oMath>
-                </a14:m>
-                <a:endParaRPr lang="en-US" sz="1200" dirty="0"/>
-              </a:p>
-              <a:p>
-                <a:pPr marL="0" indent="0">
-                  <a:spcBef>
-                    <a:spcPts val="0"/>
-                  </a:spcBef>
-                  <a:buNone/>
-                </a:pPr>
-                <a14:m>
-                  <m:oMath xmlns:m="http://schemas.openxmlformats.org/officeDocument/2006/math">
-                    <m:sSub>
-                      <m:sSubPr>
-                        <m:ctrlPr>
-                          <a:rPr lang="en-US" sz="1200" b="0" i="1" dirty="0" smtClean="0">
-                            <a:latin typeface="Cambria Math" panose="02040503050406030204" pitchFamily="18" charset="0"/>
-                          </a:rPr>
-                        </m:ctrlPr>
-                      </m:sSubPr>
-                      <m:e>
-                        <m:r>
-                          <a:rPr lang="en-US" sz="1200" i="1" dirty="0" smtClean="0">
-                            <a:latin typeface="Cambria Math" panose="02040503050406030204" pitchFamily="18" charset="0"/>
-                          </a:rPr>
-                          <m:t>𝑆</m:t>
-                        </m:r>
-                      </m:e>
-                      <m:sub>
-                        <m:r>
-                          <a:rPr lang="en-US" sz="1200" b="0" i="1" dirty="0" smtClean="0">
-                            <a:latin typeface="Cambria Math" panose="02040503050406030204" pitchFamily="18" charset="0"/>
-                          </a:rPr>
-                          <m:t>𝑡</m:t>
-                        </m:r>
-                      </m:sub>
-                    </m:sSub>
-                  </m:oMath>
-                </a14:m>
-                <a:r>
-                  <a:rPr lang="en-US" sz="1200" dirty="0"/>
-                  <a:t>	random variable for the state at time </a:t>
-                </a:r>
-                <a14:m>
-                  <m:oMath xmlns:m="http://schemas.openxmlformats.org/officeDocument/2006/math">
-                    <m:r>
-                      <a:rPr lang="en-US" sz="1200" i="1" dirty="0" smtClean="0">
-                        <a:latin typeface="Cambria Math" panose="02040503050406030204" pitchFamily="18" charset="0"/>
-                      </a:rPr>
-                      <m:t>𝑡</m:t>
-                    </m:r>
-                  </m:oMath>
-                </a14:m>
-                <a:endParaRPr lang="en-US" sz="1200" dirty="0"/>
-              </a:p>
-              <a:p>
-                <a:pPr marL="0" indent="0">
-                  <a:spcBef>
-                    <a:spcPts val="0"/>
-                  </a:spcBef>
-                  <a:buNone/>
-                </a:pPr>
-                <a14:m>
-                  <m:oMath xmlns:m="http://schemas.openxmlformats.org/officeDocument/2006/math">
-                    <m:sSub>
-                      <m:sSubPr>
-                        <m:ctrlPr>
-                          <a:rPr lang="en-US" sz="1200" b="0" i="1" dirty="0" smtClean="0">
-                            <a:latin typeface="Cambria Math" panose="02040503050406030204" pitchFamily="18" charset="0"/>
-                          </a:rPr>
-                        </m:ctrlPr>
-                      </m:sSubPr>
-                      <m:e>
-                        <m:r>
-                          <a:rPr lang="en-US" sz="1200" i="1" dirty="0" smtClean="0">
-                            <a:latin typeface="Cambria Math" panose="02040503050406030204" pitchFamily="18" charset="0"/>
-                          </a:rPr>
-                          <m:t>𝑅</m:t>
-                        </m:r>
-                      </m:e>
-                      <m:sub>
-                        <m:r>
-                          <a:rPr lang="en-US" sz="1200" b="0" i="1" dirty="0" smtClean="0">
-                            <a:latin typeface="Cambria Math" panose="02040503050406030204" pitchFamily="18" charset="0"/>
-                          </a:rPr>
-                          <m:t>𝑡</m:t>
-                        </m:r>
-                      </m:sub>
-                    </m:sSub>
-                  </m:oMath>
-                </a14:m>
-                <a:r>
-                  <a:rPr lang="en-US" sz="1200" dirty="0"/>
-                  <a:t> 	random variable for the reward at time </a:t>
-                </a:r>
-                <a14:m>
-                  <m:oMath xmlns:m="http://schemas.openxmlformats.org/officeDocument/2006/math">
-                    <m:r>
-                      <a:rPr lang="en-US" sz="1200" i="1" dirty="0" smtClean="0">
-                        <a:latin typeface="Cambria Math" panose="02040503050406030204" pitchFamily="18" charset="0"/>
-                      </a:rPr>
-                      <m:t>𝑡</m:t>
-                    </m:r>
-                  </m:oMath>
-                </a14:m>
-                <a:endParaRPr lang="en-US" sz="1200" dirty="0"/>
-              </a:p>
-              <a:p>
-                <a:pPr marL="0" indent="0">
-                  <a:lnSpc>
-                    <a:spcPct val="100000"/>
-                  </a:lnSpc>
-                  <a:spcBef>
-                    <a:spcPts val="0"/>
-                  </a:spcBef>
-                  <a:buNone/>
-                </a:pPr>
-                <a:endParaRPr lang="en-US" sz="1200" i="1" dirty="0">
-                  <a:latin typeface="Cambria Math" panose="02040503050406030204" pitchFamily="18" charset="0"/>
-                </a:endParaRPr>
-              </a:p>
-              <a:p>
-                <a:pPr marL="0" indent="0">
-                  <a:lnSpc>
-                    <a:spcPct val="100000"/>
-                  </a:lnSpc>
-                  <a:spcBef>
-                    <a:spcPts val="0"/>
-                  </a:spcBef>
-                  <a:buNone/>
-                </a:pPr>
-                <a14:m>
-                  <m:oMath xmlns:m="http://schemas.openxmlformats.org/officeDocument/2006/math">
-                    <m:r>
-                      <a:rPr lang="en-US" sz="1200" i="1" dirty="0">
-                        <a:latin typeface="Cambria Math" panose="02040503050406030204" pitchFamily="18" charset="0"/>
-                      </a:rPr>
-                      <m:t>𝑝</m:t>
-                    </m:r>
-                    <m:d>
-                      <m:dPr>
-                        <m:endChr m:val="|"/>
-                        <m:ctrlPr>
-                          <a:rPr lang="en-US" sz="1200" i="1" dirty="0">
-                            <a:latin typeface="Cambria Math" panose="02040503050406030204" pitchFamily="18" charset="0"/>
-                          </a:rPr>
-                        </m:ctrlPr>
-                      </m:dPr>
-                      <m:e>
-                        <m:sSup>
-                          <m:sSupPr>
-                            <m:ctrlPr>
-                              <a:rPr lang="en-US" sz="1200" i="1" dirty="0">
-                                <a:latin typeface="Cambria Math" panose="02040503050406030204" pitchFamily="18" charset="0"/>
-                              </a:rPr>
-                            </m:ctrlPr>
-                          </m:sSupPr>
-                          <m:e>
-                            <m:r>
-                              <a:rPr lang="en-US" sz="1200" i="1" dirty="0">
-                                <a:latin typeface="Cambria Math" panose="02040503050406030204" pitchFamily="18" charset="0"/>
-                              </a:rPr>
-                              <m:t>𝑠</m:t>
-                            </m:r>
-                          </m:e>
-                          <m:sup>
-                            <m:r>
-                              <a:rPr lang="en-US" sz="1200" i="1" dirty="0">
-                                <a:latin typeface="Cambria Math" panose="02040503050406030204" pitchFamily="18" charset="0"/>
-                              </a:rPr>
-                              <m:t>′</m:t>
-                            </m:r>
-                          </m:sup>
-                        </m:sSup>
-                        <m:r>
-                          <a:rPr lang="en-US" sz="1200" b="0" i="1" dirty="0" smtClean="0">
-                            <a:latin typeface="Cambria Math" panose="02040503050406030204" pitchFamily="18" charset="0"/>
-                          </a:rPr>
-                          <m:t>,</m:t>
-                        </m:r>
-                        <m:r>
-                          <a:rPr lang="en-US" sz="1200" b="0" i="1" dirty="0" smtClean="0">
-                            <a:latin typeface="Cambria Math" panose="02040503050406030204" pitchFamily="18" charset="0"/>
-                          </a:rPr>
-                          <m:t>𝑟</m:t>
-                        </m:r>
-                        <m:r>
-                          <a:rPr lang="en-US" sz="1200" i="1" dirty="0">
-                            <a:latin typeface="Cambria Math" panose="02040503050406030204" pitchFamily="18" charset="0"/>
-                          </a:rPr>
-                          <m:t> </m:t>
-                        </m:r>
-                      </m:e>
-                    </m:d>
-                    <m:r>
-                      <a:rPr lang="en-US" sz="1200" i="1" dirty="0">
-                        <a:latin typeface="Cambria Math" panose="02040503050406030204" pitchFamily="18" charset="0"/>
-                      </a:rPr>
-                      <m:t>𝑠</m:t>
-                    </m:r>
-                    <m:r>
-                      <a:rPr lang="en-US" sz="1200" i="1" dirty="0">
-                        <a:latin typeface="Cambria Math" panose="02040503050406030204" pitchFamily="18" charset="0"/>
-                      </a:rPr>
-                      <m:t>, </m:t>
-                    </m:r>
-                    <m:r>
-                      <a:rPr lang="en-US" sz="1200" i="1" dirty="0">
-                        <a:latin typeface="Cambria Math" panose="02040503050406030204" pitchFamily="18" charset="0"/>
-                      </a:rPr>
-                      <m:t>𝑎</m:t>
-                    </m:r>
-                    <m:r>
-                      <a:rPr lang="en-US" sz="1200" i="1" dirty="0">
-                        <a:latin typeface="Cambria Math" panose="02040503050406030204" pitchFamily="18" charset="0"/>
-                      </a:rPr>
-                      <m:t>)</m:t>
-                    </m:r>
-                  </m:oMath>
-                </a14:m>
-                <a:r>
-                  <a:rPr lang="en-US" sz="1200" dirty="0"/>
-                  <a:t>	probability of transition to state </a:t>
-                </a:r>
-                <a14:m>
-                  <m:oMath xmlns:m="http://schemas.openxmlformats.org/officeDocument/2006/math">
-                    <m:r>
-                      <a:rPr lang="en-US" sz="1200" i="1" dirty="0">
-                        <a:latin typeface="Cambria Math" panose="02040503050406030204" pitchFamily="18" charset="0"/>
-                      </a:rPr>
-                      <m:t>𝑠</m:t>
-                    </m:r>
-                    <m:r>
-                      <a:rPr lang="en-US" sz="1200" i="1" dirty="0">
-                        <a:latin typeface="Cambria Math" panose="02040503050406030204" pitchFamily="18" charset="0"/>
-                      </a:rPr>
-                      <m:t>′</m:t>
-                    </m:r>
-                  </m:oMath>
-                </a14:m>
-                <a:r>
-                  <a:rPr lang="en-US" sz="1200" dirty="0"/>
-                  <a:t> and receiving reward </a:t>
-                </a:r>
-                <a14:m>
-                  <m:oMath xmlns:m="http://schemas.openxmlformats.org/officeDocument/2006/math">
-                    <m:r>
-                      <a:rPr lang="en-US" sz="1200" b="0" i="1" smtClean="0">
-                        <a:latin typeface="Cambria Math" panose="02040503050406030204" pitchFamily="18" charset="0"/>
-                      </a:rPr>
-                      <m:t>𝑟</m:t>
-                    </m:r>
-                  </m:oMath>
-                </a14:m>
-                <a:r>
-                  <a:rPr lang="en-US" sz="1200" dirty="0"/>
-                  <a:t>, </a:t>
-                </a:r>
-                <a:br>
-                  <a:rPr lang="en-US" sz="1200" dirty="0"/>
-                </a:br>
-                <a:r>
-                  <a:rPr lang="en-US" sz="1200" dirty="0"/>
-                  <a:t>	from state </a:t>
-                </a:r>
-                <a14:m>
-                  <m:oMath xmlns:m="http://schemas.openxmlformats.org/officeDocument/2006/math">
-                    <m:r>
-                      <a:rPr lang="en-US" sz="1200" i="1" dirty="0">
-                        <a:latin typeface="Cambria Math" panose="02040503050406030204" pitchFamily="18" charset="0"/>
-                      </a:rPr>
-                      <m:t>𝑠</m:t>
-                    </m:r>
-                  </m:oMath>
-                </a14:m>
-                <a:r>
-                  <a:rPr lang="en-US" sz="1200" dirty="0"/>
-                  <a:t> taking action </a:t>
-                </a:r>
-                <a14:m>
-                  <m:oMath xmlns:m="http://schemas.openxmlformats.org/officeDocument/2006/math">
-                    <m:r>
-                      <a:rPr lang="en-US" sz="1200" i="1" dirty="0">
-                        <a:latin typeface="Cambria Math" panose="02040503050406030204" pitchFamily="18" charset="0"/>
-                      </a:rPr>
-                      <m:t>𝑎</m:t>
-                    </m:r>
-                  </m:oMath>
-                </a14:m>
-                <a:r>
-                  <a:rPr lang="en-US" sz="1200" dirty="0"/>
-                  <a:t>.</a:t>
-                </a:r>
-              </a:p>
-              <a:p>
-                <a:pPr marL="0" indent="0">
-                  <a:lnSpc>
-                    <a:spcPct val="100000"/>
-                  </a:lnSpc>
-                  <a:spcBef>
-                    <a:spcPts val="0"/>
-                  </a:spcBef>
-                  <a:buNone/>
-                </a:pPr>
-                <a14:m>
-                  <m:oMath xmlns:m="http://schemas.openxmlformats.org/officeDocument/2006/math">
-                    <m:r>
-                      <a:rPr lang="en-US" sz="1200" i="1" dirty="0">
-                        <a:latin typeface="Cambria Math" panose="02040503050406030204" pitchFamily="18" charset="0"/>
-                      </a:rPr>
-                      <m:t>𝑝</m:t>
-                    </m:r>
-                    <m:d>
-                      <m:dPr>
-                        <m:endChr m:val="|"/>
-                        <m:ctrlPr>
-                          <a:rPr lang="en-US" sz="1200" i="1" dirty="0">
-                            <a:latin typeface="Cambria Math" panose="02040503050406030204" pitchFamily="18" charset="0"/>
-                          </a:rPr>
-                        </m:ctrlPr>
-                      </m:dPr>
-                      <m:e>
-                        <m:sSup>
-                          <m:sSupPr>
-                            <m:ctrlPr>
-                              <a:rPr lang="en-US" sz="1200" i="1" dirty="0">
-                                <a:latin typeface="Cambria Math" panose="02040503050406030204" pitchFamily="18" charset="0"/>
-                              </a:rPr>
-                            </m:ctrlPr>
-                          </m:sSupPr>
-                          <m:e>
-                            <m:r>
-                              <a:rPr lang="en-US" sz="1200" i="1" dirty="0">
-                                <a:latin typeface="Cambria Math" panose="02040503050406030204" pitchFamily="18" charset="0"/>
-                              </a:rPr>
-                              <m:t>𝑠</m:t>
-                            </m:r>
-                          </m:e>
-                          <m:sup>
-                            <m:r>
-                              <a:rPr lang="en-US" sz="1200" i="1" dirty="0">
-                                <a:latin typeface="Cambria Math" panose="02040503050406030204" pitchFamily="18" charset="0"/>
-                              </a:rPr>
-                              <m:t>′</m:t>
-                            </m:r>
-                          </m:sup>
-                        </m:sSup>
-                      </m:e>
-                    </m:d>
-                    <m:r>
-                      <a:rPr lang="en-US" sz="1200" i="1" dirty="0">
-                        <a:latin typeface="Cambria Math" panose="02040503050406030204" pitchFamily="18" charset="0"/>
-                      </a:rPr>
-                      <m:t>𝑠</m:t>
-                    </m:r>
-                    <m:r>
-                      <a:rPr lang="en-US" sz="1200" i="1" dirty="0">
-                        <a:latin typeface="Cambria Math" panose="02040503050406030204" pitchFamily="18" charset="0"/>
-                      </a:rPr>
-                      <m:t>, </m:t>
-                    </m:r>
-                    <m:r>
-                      <a:rPr lang="en-US" sz="1200" i="1" dirty="0">
-                        <a:latin typeface="Cambria Math" panose="02040503050406030204" pitchFamily="18" charset="0"/>
-                      </a:rPr>
-                      <m:t>𝑎</m:t>
-                    </m:r>
-                    <m:r>
-                      <a:rPr lang="en-US" sz="1200" i="1" dirty="0">
-                        <a:latin typeface="Cambria Math" panose="02040503050406030204" pitchFamily="18" charset="0"/>
-                      </a:rPr>
-                      <m:t>)</m:t>
-                    </m:r>
-                  </m:oMath>
-                </a14:m>
-                <a:r>
-                  <a:rPr lang="en-US" sz="1200" dirty="0"/>
-                  <a:t> 	probability of transition to state </a:t>
-                </a:r>
-                <a14:m>
-                  <m:oMath xmlns:m="http://schemas.openxmlformats.org/officeDocument/2006/math">
-                    <m:r>
-                      <a:rPr lang="en-US" sz="1200" i="1" dirty="0">
-                        <a:latin typeface="Cambria Math" panose="02040503050406030204" pitchFamily="18" charset="0"/>
-                      </a:rPr>
-                      <m:t>𝑠</m:t>
-                    </m:r>
-                    <m:r>
-                      <a:rPr lang="en-US" sz="1200" i="1" dirty="0">
-                        <a:latin typeface="Cambria Math" panose="02040503050406030204" pitchFamily="18" charset="0"/>
-                      </a:rPr>
-                      <m:t>′</m:t>
-                    </m:r>
-                  </m:oMath>
-                </a14:m>
-                <a:r>
-                  <a:rPr lang="en-US" sz="1200" dirty="0"/>
-                  <a:t> fom state </a:t>
-                </a:r>
-                <a14:m>
-                  <m:oMath xmlns:m="http://schemas.openxmlformats.org/officeDocument/2006/math">
-                    <m:r>
-                      <a:rPr lang="en-US" sz="1200" i="1" dirty="0">
-                        <a:latin typeface="Cambria Math" panose="02040503050406030204" pitchFamily="18" charset="0"/>
-                      </a:rPr>
-                      <m:t>𝑠</m:t>
-                    </m:r>
-                  </m:oMath>
-                </a14:m>
-                <a:r>
-                  <a:rPr lang="en-US" sz="1200" dirty="0"/>
-                  <a:t> taking action </a:t>
-                </a:r>
-                <a14:m>
-                  <m:oMath xmlns:m="http://schemas.openxmlformats.org/officeDocument/2006/math">
-                    <m:r>
-                      <a:rPr lang="en-US" sz="1200" i="1" dirty="0">
-                        <a:latin typeface="Cambria Math" panose="02040503050406030204" pitchFamily="18" charset="0"/>
-                      </a:rPr>
-                      <m:t>𝑎</m:t>
-                    </m:r>
-                  </m:oMath>
-                </a14:m>
-                <a:r>
-                  <a:rPr lang="en-US" sz="1200" dirty="0"/>
-                  <a:t>.</a:t>
-                </a:r>
-              </a:p>
-              <a:p>
-                <a:pPr marL="0" indent="0">
-                  <a:lnSpc>
-                    <a:spcPct val="100000"/>
-                  </a:lnSpc>
-                  <a:spcBef>
-                    <a:spcPts val="0"/>
-                  </a:spcBef>
-                  <a:buNone/>
-                </a:pPr>
-                <a14:m>
-                  <m:oMath xmlns:m="http://schemas.openxmlformats.org/officeDocument/2006/math">
-                    <m:r>
-                      <a:rPr lang="en-US" sz="1200" b="0" i="1" smtClean="0">
-                        <a:latin typeface="Cambria Math" panose="02040503050406030204" pitchFamily="18" charset="0"/>
-                      </a:rPr>
-                      <m:t>𝑟</m:t>
-                    </m:r>
-                    <m:r>
-                      <a:rPr lang="en-US" sz="1200" b="0" i="1" smtClean="0">
-                        <a:latin typeface="Cambria Math" panose="02040503050406030204" pitchFamily="18" charset="0"/>
-                      </a:rPr>
-                      <m:t>(</m:t>
-                    </m:r>
-                    <m:r>
-                      <a:rPr lang="en-US" sz="1200" b="0" i="1" smtClean="0">
-                        <a:latin typeface="Cambria Math" panose="02040503050406030204" pitchFamily="18" charset="0"/>
-                      </a:rPr>
-                      <m:t>𝑠</m:t>
-                    </m:r>
-                    <m:r>
-                      <a:rPr lang="en-US" sz="1200" b="0" i="1" smtClean="0">
-                        <a:latin typeface="Cambria Math" panose="02040503050406030204" pitchFamily="18" charset="0"/>
-                      </a:rPr>
-                      <m:t>,</m:t>
-                    </m:r>
-                    <m:r>
-                      <a:rPr lang="en-US" sz="1200" b="0" i="1" smtClean="0">
-                        <a:latin typeface="Cambria Math" panose="02040503050406030204" pitchFamily="18" charset="0"/>
-                      </a:rPr>
-                      <m:t>𝑎</m:t>
-                    </m:r>
-                    <m:r>
-                      <a:rPr lang="en-US" sz="1200" b="0" i="1" smtClean="0">
-                        <a:latin typeface="Cambria Math" panose="02040503050406030204" pitchFamily="18" charset="0"/>
-                      </a:rPr>
-                      <m:t>)</m:t>
-                    </m:r>
-                  </m:oMath>
-                </a14:m>
-                <a:r>
-                  <a:rPr lang="en-US" sz="1200" dirty="0"/>
-                  <a:t>	expected immediate reward from state </a:t>
-                </a:r>
-                <a14:m>
-                  <m:oMath xmlns:m="http://schemas.openxmlformats.org/officeDocument/2006/math">
-                    <m:r>
-                      <a:rPr lang="en-US" sz="1200" i="1" dirty="0">
-                        <a:latin typeface="Cambria Math" panose="02040503050406030204" pitchFamily="18" charset="0"/>
-                      </a:rPr>
-                      <m:t>𝑠</m:t>
-                    </m:r>
-                  </m:oMath>
-                </a14:m>
-                <a:r>
-                  <a:rPr lang="en-US" sz="1200" dirty="0"/>
-                  <a:t> after action </a:t>
-                </a:r>
-                <a14:m>
-                  <m:oMath xmlns:m="http://schemas.openxmlformats.org/officeDocument/2006/math">
-                    <m:r>
-                      <a:rPr lang="en-US" sz="1200" i="1" dirty="0">
-                        <a:latin typeface="Cambria Math" panose="02040503050406030204" pitchFamily="18" charset="0"/>
-                      </a:rPr>
-                      <m:t>𝑎</m:t>
-                    </m:r>
-                    <m:r>
-                      <a:rPr lang="en-US" sz="1200" b="0" i="1" dirty="0" smtClean="0">
-                        <a:latin typeface="Cambria Math" panose="02040503050406030204" pitchFamily="18" charset="0"/>
-                      </a:rPr>
-                      <m:t>.</m:t>
-                    </m:r>
-                  </m:oMath>
-                </a14:m>
-                <a:endParaRPr lang="en-US" sz="1200" b="0" dirty="0"/>
-              </a:p>
-              <a:p>
-                <a:pPr marL="0" indent="0">
-                  <a:lnSpc>
-                    <a:spcPct val="100000"/>
-                  </a:lnSpc>
-                  <a:spcBef>
-                    <a:spcPts val="0"/>
-                  </a:spcBef>
-                  <a:buNone/>
-                </a:pPr>
-                <a14:m>
-                  <m:oMath xmlns:m="http://schemas.openxmlformats.org/officeDocument/2006/math">
-                    <m:r>
-                      <a:rPr lang="en-US" sz="1200" i="1">
-                        <a:latin typeface="Cambria Math" panose="02040503050406030204" pitchFamily="18" charset="0"/>
-                      </a:rPr>
-                      <m:t>𝑟</m:t>
-                    </m:r>
-                    <m:r>
-                      <a:rPr lang="en-US" sz="1200" i="1">
-                        <a:latin typeface="Cambria Math" panose="02040503050406030204" pitchFamily="18" charset="0"/>
-                      </a:rPr>
-                      <m:t>(</m:t>
-                    </m:r>
-                    <m:r>
-                      <a:rPr lang="en-US" sz="1200" i="1">
-                        <a:latin typeface="Cambria Math" panose="02040503050406030204" pitchFamily="18" charset="0"/>
-                      </a:rPr>
-                      <m:t>𝑠</m:t>
-                    </m:r>
-                    <m:r>
-                      <a:rPr lang="en-US" sz="1200" i="1">
-                        <a:latin typeface="Cambria Math" panose="02040503050406030204" pitchFamily="18" charset="0"/>
-                      </a:rPr>
-                      <m:t>,</m:t>
-                    </m:r>
-                    <m:r>
-                      <a:rPr lang="en-US" sz="1200" i="1">
-                        <a:latin typeface="Cambria Math" panose="02040503050406030204" pitchFamily="18" charset="0"/>
-                      </a:rPr>
-                      <m:t>𝑎</m:t>
-                    </m:r>
-                    <m:r>
-                      <a:rPr lang="en-US" sz="1200" b="0" i="1" smtClean="0">
-                        <a:latin typeface="Cambria Math" panose="02040503050406030204" pitchFamily="18" charset="0"/>
-                      </a:rPr>
-                      <m:t>,</m:t>
-                    </m:r>
-                    <m:r>
-                      <a:rPr lang="en-US" sz="1200" b="0" i="1" smtClean="0">
-                        <a:latin typeface="Cambria Math" panose="02040503050406030204" pitchFamily="18" charset="0"/>
-                      </a:rPr>
-                      <m:t>𝑠</m:t>
-                    </m:r>
-                    <m:r>
-                      <a:rPr lang="en-US" sz="1200" b="0" i="1" smtClean="0">
-                        <a:latin typeface="Cambria Math" panose="02040503050406030204" pitchFamily="18" charset="0"/>
-                      </a:rPr>
-                      <m:t>′)</m:t>
-                    </m:r>
-                  </m:oMath>
-                </a14:m>
-                <a:r>
-                  <a:rPr lang="en-US" sz="1200" dirty="0"/>
-                  <a:t>	expected immediate reward from state </a:t>
-                </a:r>
-                <a14:m>
-                  <m:oMath xmlns:m="http://schemas.openxmlformats.org/officeDocument/2006/math">
-                    <m:r>
-                      <a:rPr lang="en-US" sz="1200" i="1" dirty="0">
-                        <a:latin typeface="Cambria Math" panose="02040503050406030204" pitchFamily="18" charset="0"/>
-                      </a:rPr>
-                      <m:t>𝑠</m:t>
-                    </m:r>
-                  </m:oMath>
-                </a14:m>
-                <a:r>
-                  <a:rPr lang="en-US" sz="1200" dirty="0"/>
-                  <a:t> to </a:t>
-                </a:r>
-                <a14:m>
-                  <m:oMath xmlns:m="http://schemas.openxmlformats.org/officeDocument/2006/math">
-                    <m:sSup>
-                      <m:sSupPr>
-                        <m:ctrlPr>
-                          <a:rPr lang="en-US" sz="1200" b="0" i="1" smtClean="0">
-                            <a:latin typeface="Cambria Math" panose="02040503050406030204" pitchFamily="18" charset="0"/>
-                          </a:rPr>
-                        </m:ctrlPr>
-                      </m:sSupPr>
-                      <m:e>
-                        <m:r>
-                          <a:rPr lang="en-US" sz="1200" b="0" i="1" smtClean="0">
-                            <a:latin typeface="Cambria Math" panose="02040503050406030204" pitchFamily="18" charset="0"/>
-                          </a:rPr>
-                          <m:t>𝑠</m:t>
-                        </m:r>
-                      </m:e>
-                      <m:sup>
-                        <m:r>
-                          <a:rPr lang="en-US" sz="1200" b="0" i="1" smtClean="0">
-                            <a:latin typeface="Cambria Math" panose="02040503050406030204" pitchFamily="18" charset="0"/>
-                          </a:rPr>
-                          <m:t>′</m:t>
-                        </m:r>
-                      </m:sup>
-                    </m:sSup>
-                  </m:oMath>
-                </a14:m>
-                <a:r>
-                  <a:rPr lang="en-US" sz="1200" dirty="0"/>
-                  <a:t> with action </a:t>
-                </a:r>
-                <a14:m>
-                  <m:oMath xmlns:m="http://schemas.openxmlformats.org/officeDocument/2006/math">
-                    <m:r>
-                      <a:rPr lang="en-US" sz="1200" i="1" dirty="0">
-                        <a:latin typeface="Cambria Math" panose="02040503050406030204" pitchFamily="18" charset="0"/>
-                      </a:rPr>
-                      <m:t>𝑎</m:t>
-                    </m:r>
-                    <m:r>
-                      <a:rPr lang="en-US" sz="1200" b="0" i="1" dirty="0" smtClean="0">
-                        <a:latin typeface="Cambria Math" panose="02040503050406030204" pitchFamily="18" charset="0"/>
-                      </a:rPr>
-                      <m:t>.</m:t>
-                    </m:r>
-                  </m:oMath>
-                </a14:m>
-                <a:endParaRPr lang="en-US" sz="1200" i="1" dirty="0">
-                  <a:latin typeface="Cambria Math" panose="02040503050406030204" pitchFamily="18" charset="0"/>
-                </a:endParaRPr>
-              </a:p>
-              <a:p>
-                <a:pPr marL="0" indent="0">
-                  <a:spcBef>
-                    <a:spcPts val="0"/>
-                  </a:spcBef>
-                  <a:buNone/>
-                </a:pPr>
-                <a:endParaRPr lang="en-US" sz="1200" i="1" dirty="0">
-                  <a:latin typeface="Cambria Math" panose="02040503050406030204" pitchFamily="18" charset="0"/>
-                </a:endParaRPr>
-              </a:p>
-              <a:p>
-                <a:pPr marL="0" indent="0">
-                  <a:spcBef>
-                    <a:spcPts val="0"/>
-                  </a:spcBef>
-                  <a:buNone/>
-                </a:pPr>
-                <a14:m>
-                  <m:oMath xmlns:m="http://schemas.openxmlformats.org/officeDocument/2006/math">
-                    <m:r>
-                      <a:rPr lang="en-US" sz="1200" i="1" dirty="0">
-                        <a:latin typeface="Cambria Math" panose="02040503050406030204" pitchFamily="18" charset="0"/>
-                      </a:rPr>
-                      <m:t>𝜋</m:t>
-                    </m:r>
-                    <m:r>
-                      <a:rPr lang="en-US" sz="1200" i="1" dirty="0">
-                        <a:latin typeface="Cambria Math" panose="02040503050406030204" pitchFamily="18" charset="0"/>
-                      </a:rPr>
-                      <m:t>(</m:t>
-                    </m:r>
-                    <m:r>
-                      <a:rPr lang="en-US" sz="1200" i="1" dirty="0" err="1">
-                        <a:latin typeface="Cambria Math" panose="02040503050406030204" pitchFamily="18" charset="0"/>
-                      </a:rPr>
-                      <m:t>𝑎</m:t>
-                    </m:r>
-                    <m:r>
-                      <a:rPr lang="en-US" sz="1200" i="1" dirty="0" err="1">
-                        <a:latin typeface="Cambria Math" panose="02040503050406030204" pitchFamily="18" charset="0"/>
-                      </a:rPr>
-                      <m:t>|</m:t>
-                    </m:r>
-                    <m:r>
-                      <a:rPr lang="en-US" sz="1200" i="1" dirty="0" err="1">
-                        <a:latin typeface="Cambria Math" panose="02040503050406030204" pitchFamily="18" charset="0"/>
-                      </a:rPr>
-                      <m:t>𝑠</m:t>
-                    </m:r>
-                    <m:r>
-                      <a:rPr lang="en-US" sz="1200" i="1" dirty="0">
-                        <a:latin typeface="Cambria Math" panose="02040503050406030204" pitchFamily="18" charset="0"/>
-                      </a:rPr>
-                      <m:t>)</m:t>
-                    </m:r>
-                  </m:oMath>
-                </a14:m>
-                <a:r>
-                  <a:rPr lang="en-US" sz="1200" dirty="0"/>
-                  <a:t>	probability of taking action </a:t>
-                </a:r>
-                <a14:m>
-                  <m:oMath xmlns:m="http://schemas.openxmlformats.org/officeDocument/2006/math">
-                    <m:r>
-                      <a:rPr lang="en-US" sz="1200" i="1" dirty="0">
-                        <a:latin typeface="Cambria Math" panose="02040503050406030204" pitchFamily="18" charset="0"/>
-                      </a:rPr>
-                      <m:t>𝑎</m:t>
-                    </m:r>
-                  </m:oMath>
-                </a14:m>
-                <a:r>
-                  <a:rPr lang="en-US" sz="1200" dirty="0"/>
-                  <a:t> in state </a:t>
-                </a:r>
-                <a14:m>
-                  <m:oMath xmlns:m="http://schemas.openxmlformats.org/officeDocument/2006/math">
-                    <m:r>
-                      <a:rPr lang="en-US" sz="1200" i="1" dirty="0">
-                        <a:latin typeface="Cambria Math" panose="02040503050406030204" pitchFamily="18" charset="0"/>
-                      </a:rPr>
-                      <m:t>𝑠</m:t>
-                    </m:r>
-                  </m:oMath>
-                </a14:m>
-                <a:r>
-                  <a:rPr lang="en-US" sz="1200" dirty="0"/>
-                  <a:t> under stochastic policy </a:t>
-                </a:r>
-                <a14:m>
-                  <m:oMath xmlns:m="http://schemas.openxmlformats.org/officeDocument/2006/math">
-                    <m:r>
-                      <a:rPr lang="en-US" sz="1200" i="1" dirty="0">
-                        <a:latin typeface="Cambria Math" panose="02040503050406030204" pitchFamily="18" charset="0"/>
-                      </a:rPr>
-                      <m:t>𝜋</m:t>
-                    </m:r>
-                  </m:oMath>
-                </a14:m>
-                <a:endParaRPr lang="en-US" sz="1200" dirty="0">
-                  <a:ea typeface="Cambria Math" panose="02040503050406030204" pitchFamily="18" charset="0"/>
-                </a:endParaRPr>
-              </a:p>
-              <a:p>
-                <a:pPr marL="0" indent="0">
-                  <a:spcBef>
-                    <a:spcPts val="0"/>
-                  </a:spcBef>
-                  <a:buNone/>
-                </a:pPr>
-                <a14:m>
-                  <m:oMath xmlns:m="http://schemas.openxmlformats.org/officeDocument/2006/math">
-                    <m:r>
-                      <a:rPr lang="en-US" sz="1200" i="1" dirty="0" smtClean="0">
-                        <a:latin typeface="Cambria Math" panose="02040503050406030204" pitchFamily="18" charset="0"/>
-                      </a:rPr>
-                      <m:t>𝜋</m:t>
-                    </m:r>
-                    <m:r>
-                      <a:rPr lang="en-US" sz="1200" i="1" dirty="0" smtClean="0">
-                        <a:latin typeface="Cambria Math" panose="02040503050406030204" pitchFamily="18" charset="0"/>
-                      </a:rPr>
-                      <m:t>(</m:t>
-                    </m:r>
-                    <m:r>
-                      <a:rPr lang="en-US" sz="1200" i="1" dirty="0" smtClean="0">
-                        <a:latin typeface="Cambria Math" panose="02040503050406030204" pitchFamily="18" charset="0"/>
-                      </a:rPr>
-                      <m:t>𝑠</m:t>
-                    </m:r>
-                    <m:r>
-                      <a:rPr lang="en-US" sz="1200" i="1" dirty="0" smtClean="0">
-                        <a:latin typeface="Cambria Math" panose="02040503050406030204" pitchFamily="18" charset="0"/>
-                      </a:rPr>
-                      <m:t>)</m:t>
-                    </m:r>
-                  </m:oMath>
-                </a14:m>
-                <a:r>
-                  <a:rPr lang="en-US" sz="1200" dirty="0"/>
-                  <a:t>	action taken in state </a:t>
-                </a:r>
-                <a14:m>
-                  <m:oMath xmlns:m="http://schemas.openxmlformats.org/officeDocument/2006/math">
-                    <m:r>
-                      <a:rPr lang="en-US" sz="1200" i="1" dirty="0" smtClean="0">
-                        <a:latin typeface="Cambria Math" panose="02040503050406030204" pitchFamily="18" charset="0"/>
-                      </a:rPr>
-                      <m:t>𝑠</m:t>
-                    </m:r>
-                  </m:oMath>
-                </a14:m>
-                <a:r>
-                  <a:rPr lang="en-US" sz="1200" dirty="0"/>
-                  <a:t> under deterministic policy </a:t>
-                </a:r>
-                <a14:m>
-                  <m:oMath xmlns:m="http://schemas.openxmlformats.org/officeDocument/2006/math">
-                    <m:r>
-                      <a:rPr lang="en-US" sz="1200" b="0" i="1" dirty="0" smtClean="0">
-                        <a:latin typeface="Cambria Math" panose="02040503050406030204" pitchFamily="18" charset="0"/>
-                      </a:rPr>
-                      <m:t>𝜋</m:t>
-                    </m:r>
-                  </m:oMath>
-                </a14:m>
-                <a:endParaRPr lang="en-US" sz="1200" dirty="0"/>
-              </a:p>
-            </p:txBody>
-          </p:sp>
-        </mc:Choice>
-        <mc:Fallback xmlns="">
-          <p:sp>
-            <p:nvSpPr>
-              <p:cNvPr id="11" name="Content Placeholder 2">
-                <a:extLst>
-                  <a:ext uri="{FF2B5EF4-FFF2-40B4-BE49-F238E27FC236}">
-                    <a16:creationId xmlns:a16="http://schemas.microsoft.com/office/drawing/2014/main" id="{6F45EA4F-65F9-5141-0B09-C395CF9CA7A0}"/>
-                  </a:ext>
-                </a:extLst>
-              </p:cNvPr>
-              <p:cNvSpPr txBox="1">
-                <a:spLocks noRot="1" noChangeAspect="1" noMove="1" noResize="1" noEditPoints="1" noAdjustHandles="1" noChangeArrowheads="1" noChangeShapeType="1" noTextEdit="1"/>
-              </p:cNvSpPr>
-              <p:nvPr/>
-            </p:nvSpPr>
-            <p:spPr>
-              <a:xfrm>
-                <a:off x="6267338" y="1124198"/>
-                <a:ext cx="5273179" cy="3693383"/>
-              </a:xfrm>
-              <a:prstGeom prst="rect">
-                <a:avLst/>
-              </a:prstGeom>
-              <a:blipFill>
-                <a:blip r:embed="rId4"/>
-                <a:stretch>
-                  <a:fillRect t="-328"/>
-                </a:stretch>
-              </a:blipFill>
-            </p:spPr>
-            <p:txBody>
-              <a:bodyPr/>
-              <a:lstStyle/>
-              <a:p>
-                <a:r>
-                  <a:rPr lang="en-US">
-                    <a:noFill/>
-                  </a:rPr>
-                  <a:t> </a:t>
-                </a:r>
-              </a:p>
-            </p:txBody>
-          </p:sp>
-        </mc:Fallback>
-      </mc:AlternateContent>
-      <mc:AlternateContent xmlns:mc="http://schemas.openxmlformats.org/markup-compatibility/2006" xmlns:a14="http://schemas.microsoft.com/office/drawing/2010/main">
-        <mc:Choice Requires="a14">
-          <p:sp>
-            <p:nvSpPr>
-              <p:cNvPr id="4" name="Content Placeholder 2">
+              <p:cNvPr id="4" name="Content Placeholder 2" descr="Temporal Difference Learning. U sub t target for estimate at time t. delta sub t TD error">
                 <a:extLst>
                   <a:ext uri="{FF2B5EF4-FFF2-40B4-BE49-F238E27FC236}">
                     <a16:creationId xmlns:a16="http://schemas.microsoft.com/office/drawing/2014/main" id="{4C5E539A-F9A7-F959-ACD3-4ADE5900F587}"/>
@@ -17924,7 +16603,7 @@
                     <m:sSub>
                       <m:sSubPr>
                         <m:ctrlPr>
-                          <a:rPr lang="en-US" sz="1200" i="1" dirty="0">
+                          <a:rPr lang="en-US" sz="1200" b="0" i="1" dirty="0" smtClean="0">
                             <a:solidFill>
                               <a:schemeClr val="tx1"/>
                             </a:solidFill>
@@ -17972,7 +16651,7 @@
         <mc:Fallback xmlns="">
           <p:sp>
             <p:nvSpPr>
-              <p:cNvPr id="4" name="Content Placeholder 2">
+              <p:cNvPr id="4" name="Content Placeholder 2" descr="Temporal Difference Learning. U sub t target for estimate at time t. delta sub t TD error">
                 <a:extLst>
                   <a:ext uri="{FF2B5EF4-FFF2-40B4-BE49-F238E27FC236}">
                     <a16:creationId xmlns:a16="http://schemas.microsoft.com/office/drawing/2014/main" id="{4C5E539A-F9A7-F959-ACD3-4ADE5900F587}"/>
@@ -18018,7 +16697,1403 @@
         <mc:Choice Requires="a14">
           <p:sp>
             <p:nvSpPr>
-              <p:cNvPr id="5" name="Content Placeholder 2">
+              <p:cNvPr id="11" name="Content Placeholder 2" descr="MDP. s, s prime states. a an action. r a reward. S set of all (nonterminal) states, S to the power plus are all states. A(s) set of all actions available in state s. gamma discount-rate parameter. t discrete time step. T final time step of an episode (a.k.a. horizon). A sub t random variable for the action at time t. S sub t random variable for the state at time t. R sub t random variable for the reward at time t. p (s prime,r | s, a) probability of transition to state s prime and receiving reward r, from state s taking action a . p (s prime | s, a) probability of transition to state s prime fom state s taking action a . r(s,a) expected immediate reward from state s after action a. r(s,a,s prime) expected immediate reward from state s to s prime with action a. pi (a given s) probability of taking action a in state s under stochastic policy pi. pi (s) action taken in state s under deterministic policy pi">
+                <a:extLst>
+                  <a:ext uri="{FF2B5EF4-FFF2-40B4-BE49-F238E27FC236}">
+                    <a16:creationId xmlns:a16="http://schemas.microsoft.com/office/drawing/2014/main" id="{6F45EA4F-65F9-5141-0B09-C395CF9CA7A0}"/>
+                  </a:ext>
+                </a:extLst>
+              </p:cNvPr>
+              <p:cNvSpPr txBox="1">
+                <a:spLocks/>
+              </p:cNvSpPr>
+              <p:nvPr/>
+            </p:nvSpPr>
+            <p:spPr>
+              <a:xfrm>
+                <a:off x="6267338" y="1124198"/>
+                <a:ext cx="5273179" cy="3693383"/>
+              </a:xfrm>
+              <a:prstGeom prst="rect">
+                <a:avLst/>
+              </a:prstGeom>
+            </p:spPr>
+            <p:style>
+              <a:lnRef idx="2">
+                <a:schemeClr val="accent2"/>
+              </a:lnRef>
+              <a:fillRef idx="1">
+                <a:schemeClr val="lt1"/>
+              </a:fillRef>
+              <a:effectRef idx="0">
+                <a:schemeClr val="accent2"/>
+              </a:effectRef>
+              <a:fontRef idx="minor">
+                <a:schemeClr val="dk1"/>
+              </a:fontRef>
+            </p:style>
+            <p:txBody>
+              <a:bodyPr vert="horz" wrap="square" lIns="91440" tIns="45720" rIns="91440" bIns="45720" rtlCol="0">
+                <a:spAutoFit/>
+              </a:bodyPr>
+              <a:lstStyle>
+                <a:lvl1pPr marL="228600" indent="-228600" algn="l" defTabSz="914400" rtl="0" eaLnBrk="1" latinLnBrk="0" hangingPunct="1">
+                  <a:lnSpc>
+                    <a:spcPct val="90000"/>
+                  </a:lnSpc>
+                  <a:spcBef>
+                    <a:spcPts val="1000"/>
+                  </a:spcBef>
+                  <a:buFont typeface="Arial" panose="020B0604020202020204" pitchFamily="34" charset="0"/>
+                  <a:buChar char="•"/>
+                  <a:defRPr sz="2800" kern="1200">
+                    <a:solidFill>
+                      <a:schemeClr val="tx1"/>
+                    </a:solidFill>
+                    <a:latin typeface="+mn-lt"/>
+                    <a:ea typeface="+mn-ea"/>
+                    <a:cs typeface="+mn-cs"/>
+                  </a:defRPr>
+                </a:lvl1pPr>
+                <a:lvl2pPr marL="685800" indent="-228600" algn="l" defTabSz="914400" rtl="0" eaLnBrk="1" latinLnBrk="0" hangingPunct="1">
+                  <a:lnSpc>
+                    <a:spcPct val="90000"/>
+                  </a:lnSpc>
+                  <a:spcBef>
+                    <a:spcPts val="500"/>
+                  </a:spcBef>
+                  <a:buFont typeface="Arial" panose="020B0604020202020204" pitchFamily="34" charset="0"/>
+                  <a:buChar char="•"/>
+                  <a:defRPr sz="2400" kern="1200">
+                    <a:solidFill>
+                      <a:schemeClr val="tx1"/>
+                    </a:solidFill>
+                    <a:latin typeface="+mn-lt"/>
+                    <a:ea typeface="+mn-ea"/>
+                    <a:cs typeface="+mn-cs"/>
+                  </a:defRPr>
+                </a:lvl2pPr>
+                <a:lvl3pPr marL="1143000" indent="-228600" algn="l" defTabSz="914400" rtl="0" eaLnBrk="1" latinLnBrk="0" hangingPunct="1">
+                  <a:lnSpc>
+                    <a:spcPct val="90000"/>
+                  </a:lnSpc>
+                  <a:spcBef>
+                    <a:spcPts val="500"/>
+                  </a:spcBef>
+                  <a:buFont typeface="Arial" panose="020B0604020202020204" pitchFamily="34" charset="0"/>
+                  <a:buChar char="•"/>
+                  <a:defRPr sz="2000" kern="1200">
+                    <a:solidFill>
+                      <a:schemeClr val="tx1"/>
+                    </a:solidFill>
+                    <a:latin typeface="+mn-lt"/>
+                    <a:ea typeface="+mn-ea"/>
+                    <a:cs typeface="+mn-cs"/>
+                  </a:defRPr>
+                </a:lvl3pPr>
+                <a:lvl4pPr marL="1600200" indent="-228600" algn="l" defTabSz="914400" rtl="0" eaLnBrk="1" latinLnBrk="0" hangingPunct="1">
+                  <a:lnSpc>
+                    <a:spcPct val="90000"/>
+                  </a:lnSpc>
+                  <a:spcBef>
+                    <a:spcPts val="500"/>
+                  </a:spcBef>
+                  <a:buFont typeface="Arial" panose="020B0604020202020204" pitchFamily="34" charset="0"/>
+                  <a:buChar char="•"/>
+                  <a:defRPr sz="1800" kern="1200">
+                    <a:solidFill>
+                      <a:schemeClr val="tx1"/>
+                    </a:solidFill>
+                    <a:latin typeface="+mn-lt"/>
+                    <a:ea typeface="+mn-ea"/>
+                    <a:cs typeface="+mn-cs"/>
+                  </a:defRPr>
+                </a:lvl4pPr>
+                <a:lvl5pPr marL="2057400" indent="-228600" algn="l" defTabSz="914400" rtl="0" eaLnBrk="1" latinLnBrk="0" hangingPunct="1">
+                  <a:lnSpc>
+                    <a:spcPct val="90000"/>
+                  </a:lnSpc>
+                  <a:spcBef>
+                    <a:spcPts val="500"/>
+                  </a:spcBef>
+                  <a:buFont typeface="Arial" panose="020B0604020202020204" pitchFamily="34" charset="0"/>
+                  <a:buChar char="•"/>
+                  <a:defRPr sz="1800" kern="1200">
+                    <a:solidFill>
+                      <a:schemeClr val="tx1"/>
+                    </a:solidFill>
+                    <a:latin typeface="+mn-lt"/>
+                    <a:ea typeface="+mn-ea"/>
+                    <a:cs typeface="+mn-cs"/>
+                  </a:defRPr>
+                </a:lvl5pPr>
+                <a:lvl6pPr marL="2514600" indent="-228600" algn="l" defTabSz="914400" rtl="0" eaLnBrk="1" latinLnBrk="0" hangingPunct="1">
+                  <a:lnSpc>
+                    <a:spcPct val="90000"/>
+                  </a:lnSpc>
+                  <a:spcBef>
+                    <a:spcPts val="500"/>
+                  </a:spcBef>
+                  <a:buFont typeface="Arial" panose="020B0604020202020204" pitchFamily="34" charset="0"/>
+                  <a:buChar char="•"/>
+                  <a:defRPr sz="1800" kern="1200">
+                    <a:solidFill>
+                      <a:schemeClr val="tx1"/>
+                    </a:solidFill>
+                    <a:latin typeface="+mn-lt"/>
+                    <a:ea typeface="+mn-ea"/>
+                    <a:cs typeface="+mn-cs"/>
+                  </a:defRPr>
+                </a:lvl6pPr>
+                <a:lvl7pPr marL="2971800" indent="-228600" algn="l" defTabSz="914400" rtl="0" eaLnBrk="1" latinLnBrk="0" hangingPunct="1">
+                  <a:lnSpc>
+                    <a:spcPct val="90000"/>
+                  </a:lnSpc>
+                  <a:spcBef>
+                    <a:spcPts val="500"/>
+                  </a:spcBef>
+                  <a:buFont typeface="Arial" panose="020B0604020202020204" pitchFamily="34" charset="0"/>
+                  <a:buChar char="•"/>
+                  <a:defRPr sz="1800" kern="1200">
+                    <a:solidFill>
+                      <a:schemeClr val="tx1"/>
+                    </a:solidFill>
+                    <a:latin typeface="+mn-lt"/>
+                    <a:ea typeface="+mn-ea"/>
+                    <a:cs typeface="+mn-cs"/>
+                  </a:defRPr>
+                </a:lvl7pPr>
+                <a:lvl8pPr marL="3429000" indent="-228600" algn="l" defTabSz="914400" rtl="0" eaLnBrk="1" latinLnBrk="0" hangingPunct="1">
+                  <a:lnSpc>
+                    <a:spcPct val="90000"/>
+                  </a:lnSpc>
+                  <a:spcBef>
+                    <a:spcPts val="500"/>
+                  </a:spcBef>
+                  <a:buFont typeface="Arial" panose="020B0604020202020204" pitchFamily="34" charset="0"/>
+                  <a:buChar char="•"/>
+                  <a:defRPr sz="1800" kern="1200">
+                    <a:solidFill>
+                      <a:schemeClr val="tx1"/>
+                    </a:solidFill>
+                    <a:latin typeface="+mn-lt"/>
+                    <a:ea typeface="+mn-ea"/>
+                    <a:cs typeface="+mn-cs"/>
+                  </a:defRPr>
+                </a:lvl8pPr>
+                <a:lvl9pPr marL="3886200" indent="-228600" algn="l" defTabSz="914400" rtl="0" eaLnBrk="1" latinLnBrk="0" hangingPunct="1">
+                  <a:lnSpc>
+                    <a:spcPct val="90000"/>
+                  </a:lnSpc>
+                  <a:spcBef>
+                    <a:spcPts val="500"/>
+                  </a:spcBef>
+                  <a:buFont typeface="Arial" panose="020B0604020202020204" pitchFamily="34" charset="0"/>
+                  <a:buChar char="•"/>
+                  <a:defRPr sz="1800" kern="1200">
+                    <a:solidFill>
+                      <a:schemeClr val="tx1"/>
+                    </a:solidFill>
+                    <a:latin typeface="+mn-lt"/>
+                    <a:ea typeface="+mn-ea"/>
+                    <a:cs typeface="+mn-cs"/>
+                  </a:defRPr>
+                </a:lvl9pPr>
+              </a:lstStyle>
+              <a:p>
+                <a:pPr marL="0" indent="0">
+                  <a:spcBef>
+                    <a:spcPts val="0"/>
+                  </a:spcBef>
+                  <a:buNone/>
+                </a:pPr>
+                <a:r>
+                  <a:rPr lang="en-US" sz="1200" b="1" dirty="0"/>
+                  <a:t>MDP</a:t>
+                </a:r>
+              </a:p>
+              <a:p>
+                <a:pPr marL="0" indent="0">
+                  <a:spcBef>
+                    <a:spcPts val="0"/>
+                  </a:spcBef>
+                  <a:buNone/>
+                </a:pPr>
+                <a14:m>
+                  <m:oMath xmlns:m="http://schemas.openxmlformats.org/officeDocument/2006/math">
+                    <m:r>
+                      <a:rPr lang="en-US" sz="1200" i="1" dirty="0" smtClean="0">
+                        <a:latin typeface="Cambria Math" panose="02040503050406030204" pitchFamily="18" charset="0"/>
+                      </a:rPr>
+                      <m:t>𝑠</m:t>
+                    </m:r>
+                    <m:r>
+                      <a:rPr lang="en-US" sz="1200" i="1" dirty="0" smtClean="0">
+                        <a:latin typeface="Cambria Math" panose="02040503050406030204" pitchFamily="18" charset="0"/>
+                      </a:rPr>
+                      <m:t>, </m:t>
+                    </m:r>
+                    <m:r>
+                      <a:rPr lang="en-US" sz="1200" i="1" dirty="0" smtClean="0">
+                        <a:latin typeface="Cambria Math" panose="02040503050406030204" pitchFamily="18" charset="0"/>
+                      </a:rPr>
+                      <m:t>𝑠</m:t>
+                    </m:r>
+                    <m:r>
+                      <a:rPr lang="en-US" sz="1200" b="0" i="1" dirty="0" smtClean="0">
+                        <a:latin typeface="Cambria Math" panose="02040503050406030204" pitchFamily="18" charset="0"/>
+                      </a:rPr>
+                      <m:t>′</m:t>
+                    </m:r>
+                  </m:oMath>
+                </a14:m>
+                <a:r>
+                  <a:rPr lang="en-US" sz="1200" dirty="0"/>
+                  <a:t> 	states</a:t>
+                </a:r>
+              </a:p>
+              <a:p>
+                <a:pPr marL="0" indent="0">
+                  <a:spcBef>
+                    <a:spcPts val="0"/>
+                  </a:spcBef>
+                  <a:buNone/>
+                </a:pPr>
+                <a14:m>
+                  <m:oMath xmlns:m="http://schemas.openxmlformats.org/officeDocument/2006/math">
+                    <m:r>
+                      <a:rPr lang="en-US" sz="1200" i="1" dirty="0" smtClean="0">
+                        <a:latin typeface="Cambria Math" panose="02040503050406030204" pitchFamily="18" charset="0"/>
+                      </a:rPr>
+                      <m:t>𝑎</m:t>
+                    </m:r>
+                  </m:oMath>
+                </a14:m>
+                <a:r>
+                  <a:rPr lang="en-US" sz="1200" dirty="0"/>
+                  <a:t> 	an action</a:t>
+                </a:r>
+              </a:p>
+              <a:p>
+                <a:pPr marL="0" indent="0">
+                  <a:spcBef>
+                    <a:spcPts val="0"/>
+                  </a:spcBef>
+                  <a:buNone/>
+                </a:pPr>
+                <a14:m>
+                  <m:oMath xmlns:m="http://schemas.openxmlformats.org/officeDocument/2006/math">
+                    <m:r>
+                      <a:rPr lang="en-US" sz="1200" i="1" dirty="0" smtClean="0">
+                        <a:latin typeface="Cambria Math" panose="02040503050406030204" pitchFamily="18" charset="0"/>
+                      </a:rPr>
+                      <m:t>𝑟</m:t>
+                    </m:r>
+                  </m:oMath>
+                </a14:m>
+                <a:r>
+                  <a:rPr lang="en-US" sz="1200" dirty="0"/>
+                  <a:t> 	a reward</a:t>
+                </a:r>
+              </a:p>
+              <a:p>
+                <a:pPr marL="0" indent="0">
+                  <a:spcBef>
+                    <a:spcPts val="0"/>
+                  </a:spcBef>
+                  <a:buNone/>
+                </a:pPr>
+                <a14:m>
+                  <m:oMath xmlns:m="http://schemas.openxmlformats.org/officeDocument/2006/math">
+                    <m:r>
+                      <a:rPr lang="en-US" sz="1200" i="1" dirty="0" smtClean="0">
+                        <a:latin typeface="Cambria Math" panose="02040503050406030204" pitchFamily="18" charset="0"/>
+                        <a:ea typeface="Cambria Math" panose="02040503050406030204" pitchFamily="18" charset="0"/>
+                      </a:rPr>
+                      <m:t>𝒮</m:t>
+                    </m:r>
+                  </m:oMath>
+                </a14:m>
+                <a:r>
+                  <a:rPr lang="en-US" sz="1200" dirty="0"/>
+                  <a:t> 	set of all (nonterminal) states, </a:t>
+                </a:r>
+                <a14:m>
+                  <m:oMath xmlns:m="http://schemas.openxmlformats.org/officeDocument/2006/math">
+                    <m:sSup>
+                      <m:sSupPr>
+                        <m:ctrlPr>
+                          <a:rPr lang="en-US" sz="1200" i="1" dirty="0">
+                            <a:latin typeface="Cambria Math" panose="02040503050406030204" pitchFamily="18" charset="0"/>
+                            <a:ea typeface="Cambria Math" panose="02040503050406030204" pitchFamily="18" charset="0"/>
+                          </a:rPr>
+                        </m:ctrlPr>
+                      </m:sSupPr>
+                      <m:e>
+                        <m:r>
+                          <a:rPr lang="en-US" sz="1200" i="1" dirty="0">
+                            <a:latin typeface="Cambria Math" panose="02040503050406030204" pitchFamily="18" charset="0"/>
+                            <a:ea typeface="Cambria Math" panose="02040503050406030204" pitchFamily="18" charset="0"/>
+                          </a:rPr>
+                          <m:t>𝒮</m:t>
+                        </m:r>
+                      </m:e>
+                      <m:sup>
+                        <m:r>
+                          <a:rPr lang="en-US" sz="1200" b="0" i="1" dirty="0" smtClean="0">
+                            <a:latin typeface="Cambria Math" panose="02040503050406030204" pitchFamily="18" charset="0"/>
+                            <a:ea typeface="Cambria Math" panose="02040503050406030204" pitchFamily="18" charset="0"/>
+                          </a:rPr>
+                          <m:t>+</m:t>
+                        </m:r>
+                      </m:sup>
+                    </m:sSup>
+                  </m:oMath>
+                </a14:m>
+                <a:r>
+                  <a:rPr lang="en-US" sz="1200" dirty="0"/>
+                  <a:t> are all states </a:t>
+                </a:r>
+              </a:p>
+              <a:p>
+                <a:pPr marL="0" indent="0">
+                  <a:spcBef>
+                    <a:spcPts val="0"/>
+                  </a:spcBef>
+                  <a:buNone/>
+                </a:pPr>
+                <a14:m>
+                  <m:oMath xmlns:m="http://schemas.openxmlformats.org/officeDocument/2006/math">
+                    <m:r>
+                      <a:rPr lang="en-US" sz="1200" i="1" dirty="0" smtClean="0">
+                        <a:latin typeface="Cambria Math" panose="02040503050406030204" pitchFamily="18" charset="0"/>
+                        <a:ea typeface="Cambria Math" panose="02040503050406030204" pitchFamily="18" charset="0"/>
+                      </a:rPr>
+                      <m:t>𝒜</m:t>
+                    </m:r>
+                    <m:r>
+                      <a:rPr lang="en-US" sz="1200" i="1" dirty="0">
+                        <a:latin typeface="Cambria Math" panose="02040503050406030204" pitchFamily="18" charset="0"/>
+                      </a:rPr>
+                      <m:t>(</m:t>
+                    </m:r>
+                    <m:r>
+                      <a:rPr lang="en-US" sz="1200" i="1" dirty="0">
+                        <a:latin typeface="Cambria Math" panose="02040503050406030204" pitchFamily="18" charset="0"/>
+                      </a:rPr>
+                      <m:t>𝑠</m:t>
+                    </m:r>
+                    <m:r>
+                      <a:rPr lang="en-US" sz="1200" i="1" dirty="0">
+                        <a:latin typeface="Cambria Math" panose="02040503050406030204" pitchFamily="18" charset="0"/>
+                      </a:rPr>
+                      <m:t>)</m:t>
+                    </m:r>
+                  </m:oMath>
+                </a14:m>
+                <a:r>
+                  <a:rPr lang="en-US" sz="1200" dirty="0"/>
+                  <a:t>	set of all actions available in state </a:t>
+                </a:r>
+                <a14:m>
+                  <m:oMath xmlns:m="http://schemas.openxmlformats.org/officeDocument/2006/math">
+                    <m:r>
+                      <a:rPr lang="en-US" sz="1200" i="1" dirty="0" smtClean="0">
+                        <a:latin typeface="Cambria Math" panose="02040503050406030204" pitchFamily="18" charset="0"/>
+                      </a:rPr>
+                      <m:t>𝑠</m:t>
+                    </m:r>
+                  </m:oMath>
+                </a14:m>
+                <a:endParaRPr lang="en-US" sz="1200" dirty="0"/>
+              </a:p>
+              <a:p>
+                <a:pPr marL="0" indent="0">
+                  <a:spcBef>
+                    <a:spcPts val="0"/>
+                  </a:spcBef>
+                  <a:buNone/>
+                </a:pPr>
+                <a14:m>
+                  <m:oMath xmlns:m="http://schemas.openxmlformats.org/officeDocument/2006/math">
+                    <m:r>
+                      <a:rPr lang="en-US" sz="1200" i="1">
+                        <a:latin typeface="Cambria Math" panose="02040503050406030204" pitchFamily="18" charset="0"/>
+                      </a:rPr>
+                      <m:t>𝛾</m:t>
+                    </m:r>
+                  </m:oMath>
+                </a14:m>
+                <a:r>
+                  <a:rPr lang="en-US" sz="1200" dirty="0"/>
+                  <a:t> 	discount-rate parameter</a:t>
+                </a:r>
+                <a:endParaRPr lang="en-US" sz="1200" i="1" dirty="0">
+                  <a:latin typeface="Cambria Math" panose="02040503050406030204" pitchFamily="18" charset="0"/>
+                </a:endParaRPr>
+              </a:p>
+              <a:p>
+                <a:pPr marL="0" indent="0">
+                  <a:spcBef>
+                    <a:spcPts val="0"/>
+                  </a:spcBef>
+                  <a:buNone/>
+                </a:pPr>
+                <a14:m>
+                  <m:oMath xmlns:m="http://schemas.openxmlformats.org/officeDocument/2006/math">
+                    <m:r>
+                      <a:rPr lang="en-US" sz="1200" i="1" dirty="0" smtClean="0">
+                        <a:latin typeface="Cambria Math" panose="02040503050406030204" pitchFamily="18" charset="0"/>
+                      </a:rPr>
+                      <m:t>𝑡</m:t>
+                    </m:r>
+                  </m:oMath>
+                </a14:m>
+                <a:r>
+                  <a:rPr lang="en-US" sz="1200" dirty="0"/>
+                  <a:t> 	discrete time step</a:t>
+                </a:r>
+              </a:p>
+              <a:p>
+                <a:pPr marL="0" indent="0">
+                  <a:spcBef>
+                    <a:spcPts val="0"/>
+                  </a:spcBef>
+                  <a:buNone/>
+                </a:pPr>
+                <a14:m>
+                  <m:oMath xmlns:m="http://schemas.openxmlformats.org/officeDocument/2006/math">
+                    <m:r>
+                      <a:rPr lang="en-US" sz="1200" i="1" dirty="0" smtClean="0">
+                        <a:latin typeface="Cambria Math" panose="02040503050406030204" pitchFamily="18" charset="0"/>
+                      </a:rPr>
+                      <m:t>𝑇</m:t>
+                    </m:r>
+                  </m:oMath>
+                </a14:m>
+                <a:r>
+                  <a:rPr lang="en-US" sz="1200" dirty="0"/>
+                  <a:t> 	final time step of an episode (a.k.a. horizon)</a:t>
+                </a:r>
+              </a:p>
+              <a:p>
+                <a:pPr marL="0" indent="0">
+                  <a:spcBef>
+                    <a:spcPts val="0"/>
+                  </a:spcBef>
+                  <a:buNone/>
+                </a:pPr>
+                <a14:m>
+                  <m:oMath xmlns:m="http://schemas.openxmlformats.org/officeDocument/2006/math">
+                    <m:sSub>
+                      <m:sSubPr>
+                        <m:ctrlPr>
+                          <a:rPr lang="en-US" sz="1200" i="1" dirty="0" smtClean="0">
+                            <a:latin typeface="Cambria Math" panose="02040503050406030204" pitchFamily="18" charset="0"/>
+                          </a:rPr>
+                        </m:ctrlPr>
+                      </m:sSubPr>
+                      <m:e>
+                        <m:r>
+                          <a:rPr lang="en-US" sz="1200" i="1" dirty="0" smtClean="0">
+                            <a:latin typeface="Cambria Math" panose="02040503050406030204" pitchFamily="18" charset="0"/>
+                          </a:rPr>
+                          <m:t>𝐴</m:t>
+                        </m:r>
+                      </m:e>
+                      <m:sub>
+                        <m:r>
+                          <a:rPr lang="en-US" sz="1200" b="0" i="1" dirty="0" smtClean="0">
+                            <a:latin typeface="Cambria Math" panose="02040503050406030204" pitchFamily="18" charset="0"/>
+                          </a:rPr>
+                          <m:t>𝑡</m:t>
+                        </m:r>
+                      </m:sub>
+                    </m:sSub>
+                  </m:oMath>
+                </a14:m>
+                <a:r>
+                  <a:rPr lang="en-US" sz="1200" dirty="0"/>
+                  <a:t> 	random variable for the action at time </a:t>
+                </a:r>
+                <a14:m>
+                  <m:oMath xmlns:m="http://schemas.openxmlformats.org/officeDocument/2006/math">
+                    <m:r>
+                      <a:rPr lang="en-US" sz="1200" i="1" dirty="0" smtClean="0">
+                        <a:latin typeface="Cambria Math" panose="02040503050406030204" pitchFamily="18" charset="0"/>
+                      </a:rPr>
+                      <m:t>𝑡</m:t>
+                    </m:r>
+                  </m:oMath>
+                </a14:m>
+                <a:endParaRPr lang="en-US" sz="1200" dirty="0"/>
+              </a:p>
+              <a:p>
+                <a:pPr marL="0" indent="0">
+                  <a:spcBef>
+                    <a:spcPts val="0"/>
+                  </a:spcBef>
+                  <a:buNone/>
+                </a:pPr>
+                <a14:m>
+                  <m:oMath xmlns:m="http://schemas.openxmlformats.org/officeDocument/2006/math">
+                    <m:sSub>
+                      <m:sSubPr>
+                        <m:ctrlPr>
+                          <a:rPr lang="en-US" sz="1200" i="1" dirty="0" smtClean="0">
+                            <a:latin typeface="Cambria Math" panose="02040503050406030204" pitchFamily="18" charset="0"/>
+                          </a:rPr>
+                        </m:ctrlPr>
+                      </m:sSubPr>
+                      <m:e>
+                        <m:r>
+                          <a:rPr lang="en-US" sz="1200" i="1" dirty="0" smtClean="0">
+                            <a:latin typeface="Cambria Math" panose="02040503050406030204" pitchFamily="18" charset="0"/>
+                          </a:rPr>
+                          <m:t>𝑆</m:t>
+                        </m:r>
+                      </m:e>
+                      <m:sub>
+                        <m:r>
+                          <a:rPr lang="en-US" sz="1200" b="0" i="1" dirty="0" smtClean="0">
+                            <a:latin typeface="Cambria Math" panose="02040503050406030204" pitchFamily="18" charset="0"/>
+                          </a:rPr>
+                          <m:t>𝑡</m:t>
+                        </m:r>
+                      </m:sub>
+                    </m:sSub>
+                  </m:oMath>
+                </a14:m>
+                <a:r>
+                  <a:rPr lang="en-US" sz="1200" dirty="0"/>
+                  <a:t>	random variable for the state at time </a:t>
+                </a:r>
+                <a14:m>
+                  <m:oMath xmlns:m="http://schemas.openxmlformats.org/officeDocument/2006/math">
+                    <m:r>
+                      <a:rPr lang="en-US" sz="1200" i="1" dirty="0" smtClean="0">
+                        <a:latin typeface="Cambria Math" panose="02040503050406030204" pitchFamily="18" charset="0"/>
+                      </a:rPr>
+                      <m:t>𝑡</m:t>
+                    </m:r>
+                  </m:oMath>
+                </a14:m>
+                <a:endParaRPr lang="en-US" sz="1200" dirty="0"/>
+              </a:p>
+              <a:p>
+                <a:pPr marL="0" indent="0">
+                  <a:spcBef>
+                    <a:spcPts val="0"/>
+                  </a:spcBef>
+                  <a:buNone/>
+                </a:pPr>
+                <a14:m>
+                  <m:oMath xmlns:m="http://schemas.openxmlformats.org/officeDocument/2006/math">
+                    <m:sSub>
+                      <m:sSubPr>
+                        <m:ctrlPr>
+                          <a:rPr lang="en-US" sz="1200" i="1" dirty="0" smtClean="0">
+                            <a:latin typeface="Cambria Math" panose="02040503050406030204" pitchFamily="18" charset="0"/>
+                          </a:rPr>
+                        </m:ctrlPr>
+                      </m:sSubPr>
+                      <m:e>
+                        <m:r>
+                          <a:rPr lang="en-US" sz="1200" i="1" dirty="0" smtClean="0">
+                            <a:latin typeface="Cambria Math" panose="02040503050406030204" pitchFamily="18" charset="0"/>
+                          </a:rPr>
+                          <m:t>𝑅</m:t>
+                        </m:r>
+                      </m:e>
+                      <m:sub>
+                        <m:r>
+                          <a:rPr lang="en-US" sz="1200" b="0" i="1" dirty="0" smtClean="0">
+                            <a:latin typeface="Cambria Math" panose="02040503050406030204" pitchFamily="18" charset="0"/>
+                          </a:rPr>
+                          <m:t>𝑡</m:t>
+                        </m:r>
+                      </m:sub>
+                    </m:sSub>
+                  </m:oMath>
+                </a14:m>
+                <a:r>
+                  <a:rPr lang="en-US" sz="1200" dirty="0"/>
+                  <a:t> 	random variable for the reward at time </a:t>
+                </a:r>
+                <a14:m>
+                  <m:oMath xmlns:m="http://schemas.openxmlformats.org/officeDocument/2006/math">
+                    <m:r>
+                      <a:rPr lang="en-US" sz="1200" i="1" dirty="0" smtClean="0">
+                        <a:latin typeface="Cambria Math" panose="02040503050406030204" pitchFamily="18" charset="0"/>
+                      </a:rPr>
+                      <m:t>𝑡</m:t>
+                    </m:r>
+                  </m:oMath>
+                </a14:m>
+                <a:endParaRPr lang="en-US" sz="1200" dirty="0"/>
+              </a:p>
+              <a:p>
+                <a:pPr marL="0" indent="0">
+                  <a:lnSpc>
+                    <a:spcPct val="100000"/>
+                  </a:lnSpc>
+                  <a:spcBef>
+                    <a:spcPts val="0"/>
+                  </a:spcBef>
+                  <a:buNone/>
+                </a:pPr>
+                <a:endParaRPr lang="en-US" sz="1200" i="1" dirty="0">
+                  <a:latin typeface="Cambria Math" panose="02040503050406030204" pitchFamily="18" charset="0"/>
+                </a:endParaRPr>
+              </a:p>
+              <a:p>
+                <a:pPr marL="0" indent="0">
+                  <a:lnSpc>
+                    <a:spcPct val="100000"/>
+                  </a:lnSpc>
+                  <a:spcBef>
+                    <a:spcPts val="0"/>
+                  </a:spcBef>
+                  <a:buNone/>
+                </a:pPr>
+                <a14:m>
+                  <m:oMath xmlns:m="http://schemas.openxmlformats.org/officeDocument/2006/math">
+                    <m:r>
+                      <a:rPr lang="en-US" sz="1200" i="1" dirty="0">
+                        <a:latin typeface="Cambria Math" panose="02040503050406030204" pitchFamily="18" charset="0"/>
+                      </a:rPr>
+                      <m:t>𝑝</m:t>
+                    </m:r>
+                    <m:d>
+                      <m:dPr>
+                        <m:endChr m:val="|"/>
+                        <m:ctrlPr>
+                          <a:rPr lang="en-US" sz="1200" i="1" dirty="0">
+                            <a:latin typeface="Cambria Math" panose="02040503050406030204" pitchFamily="18" charset="0"/>
+                          </a:rPr>
+                        </m:ctrlPr>
+                      </m:dPr>
+                      <m:e>
+                        <m:sSup>
+                          <m:sSupPr>
+                            <m:ctrlPr>
+                              <a:rPr lang="en-US" sz="1200" i="1" dirty="0">
+                                <a:latin typeface="Cambria Math" panose="02040503050406030204" pitchFamily="18" charset="0"/>
+                              </a:rPr>
+                            </m:ctrlPr>
+                          </m:sSupPr>
+                          <m:e>
+                            <m:r>
+                              <a:rPr lang="en-US" sz="1200" i="1" dirty="0">
+                                <a:latin typeface="Cambria Math" panose="02040503050406030204" pitchFamily="18" charset="0"/>
+                              </a:rPr>
+                              <m:t>𝑠</m:t>
+                            </m:r>
+                          </m:e>
+                          <m:sup>
+                            <m:r>
+                              <a:rPr lang="en-US" sz="1200" i="1" dirty="0">
+                                <a:latin typeface="Cambria Math" panose="02040503050406030204" pitchFamily="18" charset="0"/>
+                              </a:rPr>
+                              <m:t>′</m:t>
+                            </m:r>
+                          </m:sup>
+                        </m:sSup>
+                        <m:r>
+                          <a:rPr lang="en-US" sz="1200" b="0" i="1" dirty="0" smtClean="0">
+                            <a:latin typeface="Cambria Math" panose="02040503050406030204" pitchFamily="18" charset="0"/>
+                          </a:rPr>
+                          <m:t>,</m:t>
+                        </m:r>
+                        <m:r>
+                          <a:rPr lang="en-US" sz="1200" b="0" i="1" dirty="0" smtClean="0">
+                            <a:latin typeface="Cambria Math" panose="02040503050406030204" pitchFamily="18" charset="0"/>
+                          </a:rPr>
+                          <m:t>𝑟</m:t>
+                        </m:r>
+                        <m:r>
+                          <a:rPr lang="en-US" sz="1200" i="1" dirty="0">
+                            <a:latin typeface="Cambria Math" panose="02040503050406030204" pitchFamily="18" charset="0"/>
+                          </a:rPr>
+                          <m:t> </m:t>
+                        </m:r>
+                      </m:e>
+                    </m:d>
+                    <m:r>
+                      <a:rPr lang="en-US" sz="1200" i="1" dirty="0">
+                        <a:latin typeface="Cambria Math" panose="02040503050406030204" pitchFamily="18" charset="0"/>
+                      </a:rPr>
+                      <m:t>𝑠</m:t>
+                    </m:r>
+                    <m:r>
+                      <a:rPr lang="en-US" sz="1200" i="1" dirty="0">
+                        <a:latin typeface="Cambria Math" panose="02040503050406030204" pitchFamily="18" charset="0"/>
+                      </a:rPr>
+                      <m:t>, </m:t>
+                    </m:r>
+                    <m:r>
+                      <a:rPr lang="en-US" sz="1200" i="1" dirty="0">
+                        <a:latin typeface="Cambria Math" panose="02040503050406030204" pitchFamily="18" charset="0"/>
+                      </a:rPr>
+                      <m:t>𝑎</m:t>
+                    </m:r>
+                    <m:r>
+                      <a:rPr lang="en-US" sz="1200" i="1" dirty="0">
+                        <a:latin typeface="Cambria Math" panose="02040503050406030204" pitchFamily="18" charset="0"/>
+                      </a:rPr>
+                      <m:t>)</m:t>
+                    </m:r>
+                  </m:oMath>
+                </a14:m>
+                <a:r>
+                  <a:rPr lang="en-US" sz="1200" dirty="0"/>
+                  <a:t>	probability of transition to state </a:t>
+                </a:r>
+                <a14:m>
+                  <m:oMath xmlns:m="http://schemas.openxmlformats.org/officeDocument/2006/math">
+                    <m:r>
+                      <a:rPr lang="en-US" sz="1200" i="1" dirty="0">
+                        <a:latin typeface="Cambria Math" panose="02040503050406030204" pitchFamily="18" charset="0"/>
+                      </a:rPr>
+                      <m:t>𝑠</m:t>
+                    </m:r>
+                    <m:r>
+                      <a:rPr lang="en-US" sz="1200" i="1" dirty="0">
+                        <a:latin typeface="Cambria Math" panose="02040503050406030204" pitchFamily="18" charset="0"/>
+                      </a:rPr>
+                      <m:t>′</m:t>
+                    </m:r>
+                  </m:oMath>
+                </a14:m>
+                <a:r>
+                  <a:rPr lang="en-US" sz="1200" dirty="0"/>
+                  <a:t> and receiving reward </a:t>
+                </a:r>
+                <a14:m>
+                  <m:oMath xmlns:m="http://schemas.openxmlformats.org/officeDocument/2006/math">
+                    <m:r>
+                      <a:rPr lang="en-US" sz="1200" b="0" i="1" smtClean="0">
+                        <a:latin typeface="Cambria Math" panose="02040503050406030204" pitchFamily="18" charset="0"/>
+                      </a:rPr>
+                      <m:t>𝑟</m:t>
+                    </m:r>
+                  </m:oMath>
+                </a14:m>
+                <a:r>
+                  <a:rPr lang="en-US" sz="1200" dirty="0"/>
+                  <a:t>, </a:t>
+                </a:r>
+                <a:br>
+                  <a:rPr lang="en-US" sz="1200" dirty="0"/>
+                </a:br>
+                <a:r>
+                  <a:rPr lang="en-US" sz="1200" dirty="0"/>
+                  <a:t>	from state </a:t>
+                </a:r>
+                <a14:m>
+                  <m:oMath xmlns:m="http://schemas.openxmlformats.org/officeDocument/2006/math">
+                    <m:r>
+                      <a:rPr lang="en-US" sz="1200" i="1" dirty="0">
+                        <a:latin typeface="Cambria Math" panose="02040503050406030204" pitchFamily="18" charset="0"/>
+                      </a:rPr>
+                      <m:t>𝑠</m:t>
+                    </m:r>
+                  </m:oMath>
+                </a14:m>
+                <a:r>
+                  <a:rPr lang="en-US" sz="1200" dirty="0"/>
+                  <a:t> taking action </a:t>
+                </a:r>
+                <a14:m>
+                  <m:oMath xmlns:m="http://schemas.openxmlformats.org/officeDocument/2006/math">
+                    <m:r>
+                      <a:rPr lang="en-US" sz="1200" i="1" dirty="0">
+                        <a:latin typeface="Cambria Math" panose="02040503050406030204" pitchFamily="18" charset="0"/>
+                      </a:rPr>
+                      <m:t>𝑎</m:t>
+                    </m:r>
+                  </m:oMath>
+                </a14:m>
+                <a:r>
+                  <a:rPr lang="en-US" sz="1200" dirty="0"/>
+                  <a:t>.</a:t>
+                </a:r>
+              </a:p>
+              <a:p>
+                <a:pPr marL="0" indent="0">
+                  <a:lnSpc>
+                    <a:spcPct val="100000"/>
+                  </a:lnSpc>
+                  <a:spcBef>
+                    <a:spcPts val="0"/>
+                  </a:spcBef>
+                  <a:buNone/>
+                </a:pPr>
+                <a14:m>
+                  <m:oMath xmlns:m="http://schemas.openxmlformats.org/officeDocument/2006/math">
+                    <m:r>
+                      <a:rPr lang="en-US" sz="1200" i="1" dirty="0">
+                        <a:latin typeface="Cambria Math" panose="02040503050406030204" pitchFamily="18" charset="0"/>
+                      </a:rPr>
+                      <m:t>𝑝</m:t>
+                    </m:r>
+                    <m:d>
+                      <m:dPr>
+                        <m:endChr m:val="|"/>
+                        <m:ctrlPr>
+                          <a:rPr lang="en-US" sz="1200" i="1" dirty="0">
+                            <a:latin typeface="Cambria Math" panose="02040503050406030204" pitchFamily="18" charset="0"/>
+                          </a:rPr>
+                        </m:ctrlPr>
+                      </m:dPr>
+                      <m:e>
+                        <m:sSup>
+                          <m:sSupPr>
+                            <m:ctrlPr>
+                              <a:rPr lang="en-US" sz="1200" i="1" dirty="0">
+                                <a:latin typeface="Cambria Math" panose="02040503050406030204" pitchFamily="18" charset="0"/>
+                              </a:rPr>
+                            </m:ctrlPr>
+                          </m:sSupPr>
+                          <m:e>
+                            <m:r>
+                              <a:rPr lang="en-US" sz="1200" i="1" dirty="0">
+                                <a:latin typeface="Cambria Math" panose="02040503050406030204" pitchFamily="18" charset="0"/>
+                              </a:rPr>
+                              <m:t>𝑠</m:t>
+                            </m:r>
+                          </m:e>
+                          <m:sup>
+                            <m:r>
+                              <a:rPr lang="en-US" sz="1200" i="1" dirty="0">
+                                <a:latin typeface="Cambria Math" panose="02040503050406030204" pitchFamily="18" charset="0"/>
+                              </a:rPr>
+                              <m:t>′</m:t>
+                            </m:r>
+                          </m:sup>
+                        </m:sSup>
+                      </m:e>
+                    </m:d>
+                    <m:r>
+                      <a:rPr lang="en-US" sz="1200" i="1" dirty="0">
+                        <a:latin typeface="Cambria Math" panose="02040503050406030204" pitchFamily="18" charset="0"/>
+                      </a:rPr>
+                      <m:t>𝑠</m:t>
+                    </m:r>
+                    <m:r>
+                      <a:rPr lang="en-US" sz="1200" i="1" dirty="0">
+                        <a:latin typeface="Cambria Math" panose="02040503050406030204" pitchFamily="18" charset="0"/>
+                      </a:rPr>
+                      <m:t>, </m:t>
+                    </m:r>
+                    <m:r>
+                      <a:rPr lang="en-US" sz="1200" i="1" dirty="0">
+                        <a:latin typeface="Cambria Math" panose="02040503050406030204" pitchFamily="18" charset="0"/>
+                      </a:rPr>
+                      <m:t>𝑎</m:t>
+                    </m:r>
+                    <m:r>
+                      <a:rPr lang="en-US" sz="1200" i="1" dirty="0">
+                        <a:latin typeface="Cambria Math" panose="02040503050406030204" pitchFamily="18" charset="0"/>
+                      </a:rPr>
+                      <m:t>)</m:t>
+                    </m:r>
+                  </m:oMath>
+                </a14:m>
+                <a:r>
+                  <a:rPr lang="en-US" sz="1200" dirty="0"/>
+                  <a:t> 	probability of transition to state </a:t>
+                </a:r>
+                <a14:m>
+                  <m:oMath xmlns:m="http://schemas.openxmlformats.org/officeDocument/2006/math">
+                    <m:r>
+                      <a:rPr lang="en-US" sz="1200" i="1" dirty="0">
+                        <a:latin typeface="Cambria Math" panose="02040503050406030204" pitchFamily="18" charset="0"/>
+                      </a:rPr>
+                      <m:t>𝑠</m:t>
+                    </m:r>
+                    <m:r>
+                      <a:rPr lang="en-US" sz="1200" i="1" dirty="0">
+                        <a:latin typeface="Cambria Math" panose="02040503050406030204" pitchFamily="18" charset="0"/>
+                      </a:rPr>
+                      <m:t>′</m:t>
+                    </m:r>
+                  </m:oMath>
+                </a14:m>
+                <a:r>
+                  <a:rPr lang="en-US" sz="1200" dirty="0"/>
+                  <a:t> fom state </a:t>
+                </a:r>
+                <a14:m>
+                  <m:oMath xmlns:m="http://schemas.openxmlformats.org/officeDocument/2006/math">
+                    <m:r>
+                      <a:rPr lang="en-US" sz="1200" i="1" dirty="0">
+                        <a:latin typeface="Cambria Math" panose="02040503050406030204" pitchFamily="18" charset="0"/>
+                      </a:rPr>
+                      <m:t>𝑠</m:t>
+                    </m:r>
+                  </m:oMath>
+                </a14:m>
+                <a:r>
+                  <a:rPr lang="en-US" sz="1200" dirty="0"/>
+                  <a:t> taking action </a:t>
+                </a:r>
+                <a14:m>
+                  <m:oMath xmlns:m="http://schemas.openxmlformats.org/officeDocument/2006/math">
+                    <m:r>
+                      <a:rPr lang="en-US" sz="1200" i="1" dirty="0">
+                        <a:latin typeface="Cambria Math" panose="02040503050406030204" pitchFamily="18" charset="0"/>
+                      </a:rPr>
+                      <m:t>𝑎</m:t>
+                    </m:r>
+                  </m:oMath>
+                </a14:m>
+                <a:r>
+                  <a:rPr lang="en-US" sz="1200" dirty="0"/>
+                  <a:t>.</a:t>
+                </a:r>
+              </a:p>
+              <a:p>
+                <a:pPr marL="0" indent="0">
+                  <a:lnSpc>
+                    <a:spcPct val="100000"/>
+                  </a:lnSpc>
+                  <a:spcBef>
+                    <a:spcPts val="0"/>
+                  </a:spcBef>
+                  <a:buNone/>
+                </a:pPr>
+                <a14:m>
+                  <m:oMath xmlns:m="http://schemas.openxmlformats.org/officeDocument/2006/math">
+                    <m:r>
+                      <a:rPr lang="en-US" sz="1200" b="0" i="1" smtClean="0">
+                        <a:latin typeface="Cambria Math" panose="02040503050406030204" pitchFamily="18" charset="0"/>
+                      </a:rPr>
+                      <m:t>𝑟</m:t>
+                    </m:r>
+                    <m:r>
+                      <a:rPr lang="en-US" sz="1200" b="0" i="1" smtClean="0">
+                        <a:latin typeface="Cambria Math" panose="02040503050406030204" pitchFamily="18" charset="0"/>
+                      </a:rPr>
+                      <m:t>(</m:t>
+                    </m:r>
+                    <m:r>
+                      <a:rPr lang="en-US" sz="1200" b="0" i="1" smtClean="0">
+                        <a:latin typeface="Cambria Math" panose="02040503050406030204" pitchFamily="18" charset="0"/>
+                      </a:rPr>
+                      <m:t>𝑠</m:t>
+                    </m:r>
+                    <m:r>
+                      <a:rPr lang="en-US" sz="1200" b="0" i="1" smtClean="0">
+                        <a:latin typeface="Cambria Math" panose="02040503050406030204" pitchFamily="18" charset="0"/>
+                      </a:rPr>
+                      <m:t>,</m:t>
+                    </m:r>
+                    <m:r>
+                      <a:rPr lang="en-US" sz="1200" b="0" i="1" smtClean="0">
+                        <a:latin typeface="Cambria Math" panose="02040503050406030204" pitchFamily="18" charset="0"/>
+                      </a:rPr>
+                      <m:t>𝑎</m:t>
+                    </m:r>
+                    <m:r>
+                      <a:rPr lang="en-US" sz="1200" b="0" i="1" smtClean="0">
+                        <a:latin typeface="Cambria Math" panose="02040503050406030204" pitchFamily="18" charset="0"/>
+                      </a:rPr>
+                      <m:t>)</m:t>
+                    </m:r>
+                  </m:oMath>
+                </a14:m>
+                <a:r>
+                  <a:rPr lang="en-US" sz="1200" dirty="0"/>
+                  <a:t>	expected immediate reward from state </a:t>
+                </a:r>
+                <a14:m>
+                  <m:oMath xmlns:m="http://schemas.openxmlformats.org/officeDocument/2006/math">
+                    <m:r>
+                      <a:rPr lang="en-US" sz="1200" i="1" dirty="0">
+                        <a:latin typeface="Cambria Math" panose="02040503050406030204" pitchFamily="18" charset="0"/>
+                      </a:rPr>
+                      <m:t>𝑠</m:t>
+                    </m:r>
+                  </m:oMath>
+                </a14:m>
+                <a:r>
+                  <a:rPr lang="en-US" sz="1200" dirty="0"/>
+                  <a:t> after action </a:t>
+                </a:r>
+                <a14:m>
+                  <m:oMath xmlns:m="http://schemas.openxmlformats.org/officeDocument/2006/math">
+                    <m:r>
+                      <a:rPr lang="en-US" sz="1200" i="1" dirty="0">
+                        <a:latin typeface="Cambria Math" panose="02040503050406030204" pitchFamily="18" charset="0"/>
+                      </a:rPr>
+                      <m:t>𝑎</m:t>
+                    </m:r>
+                    <m:r>
+                      <a:rPr lang="en-US" sz="1200" b="0" i="1" dirty="0" smtClean="0">
+                        <a:latin typeface="Cambria Math" panose="02040503050406030204" pitchFamily="18" charset="0"/>
+                      </a:rPr>
+                      <m:t>.</m:t>
+                    </m:r>
+                  </m:oMath>
+                </a14:m>
+                <a:endParaRPr lang="en-US" sz="1200" b="0" dirty="0"/>
+              </a:p>
+              <a:p>
+                <a:pPr marL="0" indent="0">
+                  <a:lnSpc>
+                    <a:spcPct val="100000"/>
+                  </a:lnSpc>
+                  <a:spcBef>
+                    <a:spcPts val="0"/>
+                  </a:spcBef>
+                  <a:buNone/>
+                </a:pPr>
+                <a14:m>
+                  <m:oMath xmlns:m="http://schemas.openxmlformats.org/officeDocument/2006/math">
+                    <m:r>
+                      <a:rPr lang="en-US" sz="1200" i="1">
+                        <a:latin typeface="Cambria Math" panose="02040503050406030204" pitchFamily="18" charset="0"/>
+                      </a:rPr>
+                      <m:t>𝑟</m:t>
+                    </m:r>
+                    <m:r>
+                      <a:rPr lang="en-US" sz="1200" i="1">
+                        <a:latin typeface="Cambria Math" panose="02040503050406030204" pitchFamily="18" charset="0"/>
+                      </a:rPr>
+                      <m:t>(</m:t>
+                    </m:r>
+                    <m:r>
+                      <a:rPr lang="en-US" sz="1200" i="1">
+                        <a:latin typeface="Cambria Math" panose="02040503050406030204" pitchFamily="18" charset="0"/>
+                      </a:rPr>
+                      <m:t>𝑠</m:t>
+                    </m:r>
+                    <m:r>
+                      <a:rPr lang="en-US" sz="1200" i="1">
+                        <a:latin typeface="Cambria Math" panose="02040503050406030204" pitchFamily="18" charset="0"/>
+                      </a:rPr>
+                      <m:t>,</m:t>
+                    </m:r>
+                    <m:r>
+                      <a:rPr lang="en-US" sz="1200" i="1">
+                        <a:latin typeface="Cambria Math" panose="02040503050406030204" pitchFamily="18" charset="0"/>
+                      </a:rPr>
+                      <m:t>𝑎</m:t>
+                    </m:r>
+                    <m:r>
+                      <a:rPr lang="en-US" sz="1200" b="0" i="1" smtClean="0">
+                        <a:latin typeface="Cambria Math" panose="02040503050406030204" pitchFamily="18" charset="0"/>
+                      </a:rPr>
+                      <m:t>,</m:t>
+                    </m:r>
+                    <m:r>
+                      <a:rPr lang="en-US" sz="1200" b="0" i="1" smtClean="0">
+                        <a:latin typeface="Cambria Math" panose="02040503050406030204" pitchFamily="18" charset="0"/>
+                      </a:rPr>
+                      <m:t>𝑠</m:t>
+                    </m:r>
+                    <m:r>
+                      <a:rPr lang="en-US" sz="1200" b="0" i="1" smtClean="0">
+                        <a:latin typeface="Cambria Math" panose="02040503050406030204" pitchFamily="18" charset="0"/>
+                      </a:rPr>
+                      <m:t>′)</m:t>
+                    </m:r>
+                  </m:oMath>
+                </a14:m>
+                <a:r>
+                  <a:rPr lang="en-US" sz="1200" dirty="0"/>
+                  <a:t>	expected immediate reward from state </a:t>
+                </a:r>
+                <a14:m>
+                  <m:oMath xmlns:m="http://schemas.openxmlformats.org/officeDocument/2006/math">
+                    <m:r>
+                      <a:rPr lang="en-US" sz="1200" i="1" dirty="0">
+                        <a:latin typeface="Cambria Math" panose="02040503050406030204" pitchFamily="18" charset="0"/>
+                      </a:rPr>
+                      <m:t>𝑠</m:t>
+                    </m:r>
+                  </m:oMath>
+                </a14:m>
+                <a:r>
+                  <a:rPr lang="en-US" sz="1200" dirty="0"/>
+                  <a:t> to </a:t>
+                </a:r>
+                <a14:m>
+                  <m:oMath xmlns:m="http://schemas.openxmlformats.org/officeDocument/2006/math">
+                    <m:sSup>
+                      <m:sSupPr>
+                        <m:ctrlPr>
+                          <a:rPr lang="en-US" sz="1200" b="0" i="1" smtClean="0">
+                            <a:latin typeface="Cambria Math" panose="02040503050406030204" pitchFamily="18" charset="0"/>
+                          </a:rPr>
+                        </m:ctrlPr>
+                      </m:sSupPr>
+                      <m:e>
+                        <m:r>
+                          <a:rPr lang="en-US" sz="1200" b="0" i="1" smtClean="0">
+                            <a:latin typeface="Cambria Math" panose="02040503050406030204" pitchFamily="18" charset="0"/>
+                          </a:rPr>
+                          <m:t>𝑠</m:t>
+                        </m:r>
+                      </m:e>
+                      <m:sup>
+                        <m:r>
+                          <a:rPr lang="en-US" sz="1200" b="0" i="1" smtClean="0">
+                            <a:latin typeface="Cambria Math" panose="02040503050406030204" pitchFamily="18" charset="0"/>
+                          </a:rPr>
+                          <m:t>′</m:t>
+                        </m:r>
+                      </m:sup>
+                    </m:sSup>
+                  </m:oMath>
+                </a14:m>
+                <a:r>
+                  <a:rPr lang="en-US" sz="1200" dirty="0"/>
+                  <a:t> with action </a:t>
+                </a:r>
+                <a14:m>
+                  <m:oMath xmlns:m="http://schemas.openxmlformats.org/officeDocument/2006/math">
+                    <m:r>
+                      <a:rPr lang="en-US" sz="1200" i="1" dirty="0">
+                        <a:latin typeface="Cambria Math" panose="02040503050406030204" pitchFamily="18" charset="0"/>
+                      </a:rPr>
+                      <m:t>𝑎</m:t>
+                    </m:r>
+                    <m:r>
+                      <a:rPr lang="en-US" sz="1200" b="0" i="1" dirty="0" smtClean="0">
+                        <a:latin typeface="Cambria Math" panose="02040503050406030204" pitchFamily="18" charset="0"/>
+                      </a:rPr>
+                      <m:t>.</m:t>
+                    </m:r>
+                  </m:oMath>
+                </a14:m>
+                <a:endParaRPr lang="en-US" sz="1200" i="1" dirty="0">
+                  <a:latin typeface="Cambria Math" panose="02040503050406030204" pitchFamily="18" charset="0"/>
+                </a:endParaRPr>
+              </a:p>
+              <a:p>
+                <a:pPr marL="0" indent="0">
+                  <a:spcBef>
+                    <a:spcPts val="0"/>
+                  </a:spcBef>
+                  <a:buNone/>
+                </a:pPr>
+                <a:endParaRPr lang="en-US" sz="1200" i="1" dirty="0">
+                  <a:latin typeface="Cambria Math" panose="02040503050406030204" pitchFamily="18" charset="0"/>
+                </a:endParaRPr>
+              </a:p>
+              <a:p>
+                <a:pPr marL="0" indent="0">
+                  <a:spcBef>
+                    <a:spcPts val="0"/>
+                  </a:spcBef>
+                  <a:buNone/>
+                </a:pPr>
+                <a14:m>
+                  <m:oMath xmlns:m="http://schemas.openxmlformats.org/officeDocument/2006/math">
+                    <m:r>
+                      <a:rPr lang="en-US" sz="1200" i="1" dirty="0">
+                        <a:latin typeface="Cambria Math" panose="02040503050406030204" pitchFamily="18" charset="0"/>
+                      </a:rPr>
+                      <m:t>𝜋</m:t>
+                    </m:r>
+                    <m:r>
+                      <a:rPr lang="en-US" sz="1200" i="1" dirty="0">
+                        <a:latin typeface="Cambria Math" panose="02040503050406030204" pitchFamily="18" charset="0"/>
+                      </a:rPr>
+                      <m:t>(</m:t>
+                    </m:r>
+                    <m:r>
+                      <a:rPr lang="en-US" sz="1200" i="1" dirty="0" err="1">
+                        <a:latin typeface="Cambria Math" panose="02040503050406030204" pitchFamily="18" charset="0"/>
+                      </a:rPr>
+                      <m:t>𝑎</m:t>
+                    </m:r>
+                    <m:r>
+                      <a:rPr lang="en-US" sz="1200" i="1" dirty="0" err="1">
+                        <a:latin typeface="Cambria Math" panose="02040503050406030204" pitchFamily="18" charset="0"/>
+                      </a:rPr>
+                      <m:t>|</m:t>
+                    </m:r>
+                    <m:r>
+                      <a:rPr lang="en-US" sz="1200" i="1" dirty="0" err="1">
+                        <a:latin typeface="Cambria Math" panose="02040503050406030204" pitchFamily="18" charset="0"/>
+                      </a:rPr>
+                      <m:t>𝑠</m:t>
+                    </m:r>
+                    <m:r>
+                      <a:rPr lang="en-US" sz="1200" i="1" dirty="0">
+                        <a:latin typeface="Cambria Math" panose="02040503050406030204" pitchFamily="18" charset="0"/>
+                      </a:rPr>
+                      <m:t>)</m:t>
+                    </m:r>
+                  </m:oMath>
+                </a14:m>
+                <a:r>
+                  <a:rPr lang="en-US" sz="1200" dirty="0"/>
+                  <a:t>	probability of taking action </a:t>
+                </a:r>
+                <a14:m>
+                  <m:oMath xmlns:m="http://schemas.openxmlformats.org/officeDocument/2006/math">
+                    <m:r>
+                      <a:rPr lang="en-US" sz="1200" i="1" dirty="0">
+                        <a:latin typeface="Cambria Math" panose="02040503050406030204" pitchFamily="18" charset="0"/>
+                      </a:rPr>
+                      <m:t>𝑎</m:t>
+                    </m:r>
+                  </m:oMath>
+                </a14:m>
+                <a:r>
+                  <a:rPr lang="en-US" sz="1200" dirty="0"/>
+                  <a:t> in state </a:t>
+                </a:r>
+                <a14:m>
+                  <m:oMath xmlns:m="http://schemas.openxmlformats.org/officeDocument/2006/math">
+                    <m:r>
+                      <a:rPr lang="en-US" sz="1200" i="1" dirty="0">
+                        <a:latin typeface="Cambria Math" panose="02040503050406030204" pitchFamily="18" charset="0"/>
+                      </a:rPr>
+                      <m:t>𝑠</m:t>
+                    </m:r>
+                  </m:oMath>
+                </a14:m>
+                <a:r>
+                  <a:rPr lang="en-US" sz="1200" dirty="0"/>
+                  <a:t> under stochastic policy </a:t>
+                </a:r>
+                <a14:m>
+                  <m:oMath xmlns:m="http://schemas.openxmlformats.org/officeDocument/2006/math">
+                    <m:r>
+                      <a:rPr lang="en-US" sz="1200" i="1" dirty="0">
+                        <a:latin typeface="Cambria Math" panose="02040503050406030204" pitchFamily="18" charset="0"/>
+                      </a:rPr>
+                      <m:t>𝜋</m:t>
+                    </m:r>
+                  </m:oMath>
+                </a14:m>
+                <a:endParaRPr lang="en-US" sz="1200" dirty="0">
+                  <a:ea typeface="Cambria Math" panose="02040503050406030204" pitchFamily="18" charset="0"/>
+                </a:endParaRPr>
+              </a:p>
+              <a:p>
+                <a:pPr marL="0" indent="0">
+                  <a:spcBef>
+                    <a:spcPts val="0"/>
+                  </a:spcBef>
+                  <a:buNone/>
+                </a:pPr>
+                <a14:m>
+                  <m:oMath xmlns:m="http://schemas.openxmlformats.org/officeDocument/2006/math">
+                    <m:r>
+                      <a:rPr lang="en-US" sz="1200" i="1" dirty="0" smtClean="0">
+                        <a:latin typeface="Cambria Math" panose="02040503050406030204" pitchFamily="18" charset="0"/>
+                      </a:rPr>
+                      <m:t>𝜋</m:t>
+                    </m:r>
+                    <m:r>
+                      <a:rPr lang="en-US" sz="1200" i="1" dirty="0" smtClean="0">
+                        <a:latin typeface="Cambria Math" panose="02040503050406030204" pitchFamily="18" charset="0"/>
+                      </a:rPr>
+                      <m:t>(</m:t>
+                    </m:r>
+                    <m:r>
+                      <a:rPr lang="en-US" sz="1200" i="1" dirty="0" smtClean="0">
+                        <a:latin typeface="Cambria Math" panose="02040503050406030204" pitchFamily="18" charset="0"/>
+                      </a:rPr>
+                      <m:t>𝑠</m:t>
+                    </m:r>
+                    <m:r>
+                      <a:rPr lang="en-US" sz="1200" i="1" dirty="0" smtClean="0">
+                        <a:latin typeface="Cambria Math" panose="02040503050406030204" pitchFamily="18" charset="0"/>
+                      </a:rPr>
+                      <m:t>)</m:t>
+                    </m:r>
+                  </m:oMath>
+                </a14:m>
+                <a:r>
+                  <a:rPr lang="en-US" sz="1200" dirty="0"/>
+                  <a:t>	action taken in state </a:t>
+                </a:r>
+                <a14:m>
+                  <m:oMath xmlns:m="http://schemas.openxmlformats.org/officeDocument/2006/math">
+                    <m:r>
+                      <a:rPr lang="en-US" sz="1200" i="1" dirty="0" smtClean="0">
+                        <a:latin typeface="Cambria Math" panose="02040503050406030204" pitchFamily="18" charset="0"/>
+                      </a:rPr>
+                      <m:t>𝑠</m:t>
+                    </m:r>
+                  </m:oMath>
+                </a14:m>
+                <a:r>
+                  <a:rPr lang="en-US" sz="1200" dirty="0"/>
+                  <a:t> under deterministic policy </a:t>
+                </a:r>
+                <a14:m>
+                  <m:oMath xmlns:m="http://schemas.openxmlformats.org/officeDocument/2006/math">
+                    <m:r>
+                      <a:rPr lang="en-US" sz="1200" b="0" i="1" dirty="0" smtClean="0">
+                        <a:latin typeface="Cambria Math" panose="02040503050406030204" pitchFamily="18" charset="0"/>
+                      </a:rPr>
+                      <m:t>𝜋</m:t>
+                    </m:r>
+                  </m:oMath>
+                </a14:m>
+                <a:endParaRPr lang="en-US" sz="1200" dirty="0"/>
+              </a:p>
+            </p:txBody>
+          </p:sp>
+        </mc:Choice>
+        <mc:Fallback xmlns="">
+          <p:sp>
+            <p:nvSpPr>
+              <p:cNvPr id="11" name="Content Placeholder 2" descr="MDP. s, s prime states. a an action. r a reward. S set of all (nonterminal) states, S to the power plus are all states. A(s) set of all actions available in state s. gamma discount-rate parameter. t discrete time step. T final time step of an episode (a.k.a. horizon). A sub t random variable for the action at time t. S sub t random variable for the state at time t. R sub t random variable for the reward at time t. p (s prime,r | s, a) probability of transition to state s prime and receiving reward r, from state s taking action a . p (s prime | s, a) probability of transition to state s prime fom state s taking action a . r(s,a) expected immediate reward from state s after action a. r(s,a,s prime) expected immediate reward from state s to s prime with action a. pi (a given s) probability of taking action a in state s under stochastic policy pi. pi (s) action taken in state s under deterministic policy pi">
+                <a:extLst>
+                  <a:ext uri="{FF2B5EF4-FFF2-40B4-BE49-F238E27FC236}">
+                    <a16:creationId xmlns:a16="http://schemas.microsoft.com/office/drawing/2014/main" id="{6F45EA4F-65F9-5141-0B09-C395CF9CA7A0}"/>
+                  </a:ext>
+                </a:extLst>
+              </p:cNvPr>
+              <p:cNvSpPr txBox="1">
+                <a:spLocks noRot="1" noChangeAspect="1" noMove="1" noResize="1" noEditPoints="1" noAdjustHandles="1" noChangeArrowheads="1" noChangeShapeType="1" noTextEdit="1"/>
+              </p:cNvSpPr>
+              <p:nvPr/>
+            </p:nvSpPr>
+            <p:spPr>
+              <a:xfrm>
+                <a:off x="6267338" y="1124198"/>
+                <a:ext cx="5273179" cy="3693383"/>
+              </a:xfrm>
+              <a:prstGeom prst="rect">
+                <a:avLst/>
+              </a:prstGeom>
+              <a:blipFill>
+                <a:blip r:embed="rId4"/>
+                <a:stretch>
+                  <a:fillRect t="-328"/>
+                </a:stretch>
+              </a:blipFill>
+            </p:spPr>
+            <p:txBody>
+              <a:bodyPr/>
+              <a:lstStyle/>
+              <a:p>
+                <a:r>
+                  <a:rPr lang="en-US">
+                    <a:noFill/>
+                  </a:rPr>
+                  <a:t> </a:t>
+                </a:r>
+              </a:p>
+            </p:txBody>
+          </p:sp>
+        </mc:Fallback>
+      </mc:AlternateContent>
+      <mc:AlternateContent xmlns:mc="http://schemas.openxmlformats.org/markup-compatibility/2006" xmlns:a14="http://schemas.microsoft.com/office/drawing/2010/main">
+        <mc:Choice Requires="a14">
+          <p:sp>
+            <p:nvSpPr>
+              <p:cNvPr id="5" name="Content Placeholder 2" descr="Approximation. mu (s) on policy distribution (fraction of time spent in state). alpha step size (gradient descent learning rate). v hat (s, w) approximate value function q hat (s, a, w) approximate action-value function pi (a given s, theta) approximate policy. VE hat mean squared value error. gradient of f(x) gradient of function f evaluated at x">
                 <a:extLst>
                   <a:ext uri="{FF2B5EF4-FFF2-40B4-BE49-F238E27FC236}">
                     <a16:creationId xmlns:a16="http://schemas.microsoft.com/office/drawing/2014/main" id="{9FA76CFB-B55E-EFC6-DA3D-BEB7A8763838}"/>
@@ -18347,7 +18422,7 @@
                       <m:accPr>
                         <m:chr m:val="̂"/>
                         <m:ctrlPr>
-                          <a:rPr lang="en-US" sz="1200" i="1" dirty="0" smtClean="0">
+                          <a:rPr lang="en-US" sz="1200" b="0" i="1" dirty="0" smtClean="0">
                             <a:solidFill>
                               <a:schemeClr val="tx1"/>
                             </a:solidFill>
@@ -18426,7 +18501,7 @@
                       <m:accPr>
                         <m:chr m:val="̂"/>
                         <m:ctrlPr>
-                          <a:rPr lang="en-US" sz="1200" i="1" dirty="0">
+                          <a:rPr lang="en-US" sz="1200" b="0" i="1" dirty="0" smtClean="0">
                             <a:solidFill>
                               <a:schemeClr val="tx1"/>
                             </a:solidFill>
@@ -18612,7 +18687,7 @@
                       <m:accPr>
                         <m:chr m:val="̂"/>
                         <m:ctrlPr>
-                          <a:rPr lang="en-US" sz="1200" i="1" dirty="0" smtClean="0">
+                          <a:rPr lang="en-US" sz="1200" b="0" i="1" dirty="0" smtClean="0">
                             <a:solidFill>
                               <a:schemeClr val="tx1"/>
                             </a:solidFill>
@@ -18764,7 +18839,7 @@
         <mc:Fallback xmlns="">
           <p:sp>
             <p:nvSpPr>
-              <p:cNvPr id="5" name="Content Placeholder 2">
+              <p:cNvPr id="5" name="Content Placeholder 2" descr="Approximation. mu (s) on policy distribution (fraction of time spent in state). alpha step size (gradient descent learning rate). v hat (s, w) approximate value function q hat (s, a, w) approximate action-value function pi (a given s, theta) approximate policy. VE hat mean squared value error. gradient of f(x) gradient of function f evaluated at x">
                 <a:extLst>
                   <a:ext uri="{FF2B5EF4-FFF2-40B4-BE49-F238E27FC236}">
                     <a16:creationId xmlns:a16="http://schemas.microsoft.com/office/drawing/2014/main" id="{9FA76CFB-B55E-EFC6-DA3D-BEB7A8763838}"/>
@@ -18960,7 +19035,7 @@
         <mc:Choice Requires="a14">
           <p:sp>
             <p:nvSpPr>
-              <p:cNvPr id="5" name="Content Placeholder 4">
+              <p:cNvPr id="5" name="Content Placeholder 4" descr="Up to now: Learn parameters for an approximate action-value function q hat and then extract a greedy policy. New idea: Use a policy-based method that learn parameters for a policy. Parameterized stochastic policy: pi (a given s, theta) equals Pr{A_t equals a given S_t equals s, theta _t equals theta}, theta in the real numbers to the power d. Learn theta given a performance measure J(theta) using approximate gradient ascent. Update rule: theta sub t plus 1, equals theta sub t plus alpha gradient of J(theta sub t) hat where gradient of J(theta sub t) hat in the real numbers to the power d is a stochastic estimate of the gradient of the performance measure with respect to theta . We use an estimate because getting the exact gradient is hard">
                 <a:extLst>
                   <a:ext uri="{FF2B5EF4-FFF2-40B4-BE49-F238E27FC236}">
                     <a16:creationId xmlns:a16="http://schemas.microsoft.com/office/drawing/2014/main" id="{EB2BB561-37FB-9C12-3C5B-EFF321CBC8EB}"/>
@@ -19247,7 +19322,7 @@
                     <m:sSup>
                       <m:sSupPr>
                         <m:ctrlPr>
-                          <a:rPr lang="en-US" b="0" i="1" dirty="0" smtClean="0">
+                          <a:rPr lang="en-US" i="1" dirty="0">
                             <a:latin typeface="Cambria Math" panose="02040503050406030204" pitchFamily="18" charset="0"/>
                             <a:ea typeface="Cambria Math" panose="02040503050406030204" pitchFamily="18" charset="0"/>
                           </a:rPr>
@@ -19373,7 +19448,7 @@
                     <m:sSub>
                       <m:sSubPr>
                         <m:ctrlPr>
-                          <a:rPr lang="en-US" i="1">
+                          <a:rPr lang="en-US" b="1" i="1">
                             <a:latin typeface="Cambria Math" panose="02040503050406030204" pitchFamily="18" charset="0"/>
                           </a:rPr>
                         </m:ctrlPr>
@@ -19410,7 +19485,7 @@
                     <m:sSub>
                       <m:sSubPr>
                         <m:ctrlPr>
-                          <a:rPr lang="en-US" i="1">
+                          <a:rPr lang="en-US" b="1" i="1">
                             <a:latin typeface="Cambria Math" panose="02040503050406030204" pitchFamily="18" charset="0"/>
                           </a:rPr>
                         </m:ctrlPr>
@@ -19448,8 +19523,9 @@
                       <m:accPr>
                         <m:chr m:val="̂"/>
                         <m:ctrlPr>
-                          <a:rPr lang="en-US" b="0" i="1" smtClean="0">
-                            <a:latin typeface="Cambria Math" panose="02040503050406030204" pitchFamily="18" charset="0"/>
+                          <a:rPr lang="en-US" i="1">
+                            <a:latin typeface="Cambria Math" panose="02040503050406030204" pitchFamily="18" charset="0"/>
+                            <a:ea typeface="Cambria Math" panose="02040503050406030204" pitchFamily="18" charset="0"/>
                           </a:rPr>
                         </m:ctrlPr>
                       </m:accPr>
@@ -19481,7 +19557,7 @@
                         <m:sSub>
                           <m:sSubPr>
                             <m:ctrlPr>
-                              <a:rPr lang="en-US" i="1">
+                              <a:rPr lang="en-US" b="1" i="1">
                                 <a:latin typeface="Cambria Math" panose="02040503050406030204" pitchFamily="18" charset="0"/>
                                 <a:ea typeface="Cambria Math" panose="02040503050406030204" pitchFamily="18" charset="0"/>
                               </a:rPr>
@@ -19538,6 +19614,7 @@
                         <m:ctrlPr>
                           <a:rPr lang="en-US" i="1">
                             <a:latin typeface="Cambria Math" panose="02040503050406030204" pitchFamily="18" charset="0"/>
+                            <a:ea typeface="Cambria Math" panose="02040503050406030204" pitchFamily="18" charset="0"/>
                           </a:rPr>
                         </m:ctrlPr>
                       </m:accPr>
@@ -19569,7 +19646,7 @@
                         <m:sSub>
                           <m:sSubPr>
                             <m:ctrlPr>
-                              <a:rPr lang="en-US" i="1">
+                              <a:rPr lang="en-US" b="1" i="1">
                                 <a:latin typeface="Cambria Math" panose="02040503050406030204" pitchFamily="18" charset="0"/>
                                 <a:ea typeface="Cambria Math" panose="02040503050406030204" pitchFamily="18" charset="0"/>
                               </a:rPr>
@@ -19673,7 +19750,7 @@
         <mc:Fallback xmlns="">
           <p:sp>
             <p:nvSpPr>
-              <p:cNvPr id="5" name="Content Placeholder 4">
+              <p:cNvPr id="5" name="Content Placeholder 4" descr="Up to now: Learn parameters for an approximate action-value function q hat and then extract a greedy policy. New idea: Use a policy-based method that learn parameters for a policy. Parameterized stochastic policy: pi (a given s, theta) equals Pr{A_t equals a given S_t equals s, theta _t equals theta}, theta in the real numbers to the power d. Learn theta given a performance measure J(theta) using approximate gradient ascent. Update rule: theta sub t plus 1, equals theta sub t plus alpha gradient of J(theta sub t) hat where gradient of J(theta sub t) hat in the real numbers to the power d is a stochastic estimate of the gradient of the performance measure with respect to theta . We use an estimate because getting the exact gradient is hard">
                 <a:extLst>
                   <a:ext uri="{FF2B5EF4-FFF2-40B4-BE49-F238E27FC236}">
                     <a16:creationId xmlns:a16="http://schemas.microsoft.com/office/drawing/2014/main" id="{EB2BB561-37FB-9C12-3C5B-EFF321CBC8EB}"/>
@@ -19956,7 +20033,7 @@
         <mc:Choice Requires="a14">
           <p:sp>
             <p:nvSpPr>
-              <p:cNvPr id="3" name="Content Placeholder 2">
+              <p:cNvPr id="3" name="Content Placeholder 2" descr="We define the performance measure as the true value of following pi sub theta from the start state s sub 0 J (theta) is defined as v sub pi sub theta, (s sub 0) equals E sub pi sub theta, [the sum over t equals 0 to infinity, of gamma to the power t R sub t given S sub 0 equals s sub 0]. The policy gradient theorem gives us an analytical expression for the unbiased gradient of the performance with respect to the policy parameters: gradient of J (theta) equals E sub pi [q sub pi (s,a) gradient of log of pi (a given s)] is proportional to the sum over s, of mu (s) the sum over a, of q sub pi (s,a) gradient of pi (a given s, theta). Convergence?. Does NOT guarantee: convergence to (global) optimum, fast convergence or stability!">
                 <a:extLst>
                   <a:ext uri="{FF2B5EF4-FFF2-40B4-BE49-F238E27FC236}">
                     <a16:creationId xmlns:a16="http://schemas.microsoft.com/office/drawing/2014/main" id="{DC916755-DC24-827E-6C02-5FFE23FDC906}"/>
@@ -20456,7 +20533,7 @@
                     <m:d>
                       <m:dPr>
                         <m:ctrlPr>
-                          <a:rPr lang="en-US" b="0" i="1" smtClean="0">
+                          <a:rPr lang="en-US" b="1" i="1" smtClean="0">
                             <a:latin typeface="Cambria Math" panose="02040503050406030204" pitchFamily="18" charset="0"/>
                             <a:ea typeface="Cambria Math" panose="02040503050406030204" pitchFamily="18" charset="0"/>
                           </a:rPr>
@@ -20512,7 +20589,7 @@
                         <m:begChr m:val="["/>
                         <m:endChr m:val="]"/>
                         <m:ctrlPr>
-                          <a:rPr lang="en-US" i="1" smtClean="0">
+                          <a:rPr lang="en-US" i="1">
                             <a:latin typeface="Cambria Math" panose="02040503050406030204" pitchFamily="18" charset="0"/>
                             <a:ea typeface="Cambria Math" panose="02040503050406030204" pitchFamily="18" charset="0"/>
                           </a:rPr>
@@ -20600,7 +20677,7 @@
                         <m:func>
                           <m:funcPr>
                             <m:ctrlPr>
-                              <a:rPr lang="en-US" b="0" i="1" smtClean="0">
+                              <a:rPr lang="en-US" b="0" i="0" smtClean="0">
                                 <a:latin typeface="Cambria Math" panose="02040503050406030204" pitchFamily="18" charset="0"/>
                                 <a:ea typeface="Cambria Math" panose="02040503050406030204" pitchFamily="18" charset="0"/>
                               </a:rPr>
@@ -20912,7 +20989,7 @@
         <mc:Fallback xmlns="">
           <p:sp>
             <p:nvSpPr>
-              <p:cNvPr id="3" name="Content Placeholder 2">
+              <p:cNvPr id="3" name="Content Placeholder 2" descr="We define the performance measure as the true value of following pi sub theta from the start state s sub 0 J (theta) is defined as v sub pi sub theta, (s sub 0) equals E sub pi sub theta, [the sum over t equals 0 to infinity, of gamma to the power t R sub t given S sub 0 equals s sub 0]. The policy gradient theorem gives us an analytical expression for the unbiased gradient of the performance with respect to the policy parameters: gradient of J (theta) equals E sub pi [q sub pi (s,a) gradient of log of pi (a given s)] is proportional to the sum over s, of mu (s) the sum over a, of q sub pi (s,a) gradient of pi (a given s, theta). Convergence?. Does NOT guarantee: convergence to (global) optimum, fast convergence or stability!">
                 <a:extLst>
                   <a:ext uri="{FF2B5EF4-FFF2-40B4-BE49-F238E27FC236}">
                     <a16:creationId xmlns:a16="http://schemas.microsoft.com/office/drawing/2014/main" id="{DC916755-DC24-827E-6C02-5FFE23FDC906}"/>
@@ -20953,14 +21030,17 @@
           </p:sp>
         </mc:Fallback>
       </mc:AlternateContent>
-      <mc:AlternateContent xmlns:mc="http://schemas.openxmlformats.org/markup-compatibility/2006" xmlns:a14="http://schemas.microsoft.com/office/drawing/2010/main">
-        <mc:Choice Requires="a14">
+      <mc:AlternateContent xmlns:mc="http://schemas.openxmlformats.org/markup-compatibility/2006">
+        <mc:Choice xmlns:a14="http://schemas.microsoft.com/office/drawing/2010/main" Requires="a14">
           <p:sp>
             <p:nvSpPr>
               <p:cNvPr id="4" name="Speech Bubble: Rectangle with Corners Rounded 3">
                 <a:extLst>
                   <a:ext uri="{FF2B5EF4-FFF2-40B4-BE49-F238E27FC236}">
                     <a16:creationId xmlns:a16="http://schemas.microsoft.com/office/drawing/2014/main" id="{F64E8030-CB20-D32A-3DF5-495F0FBC37E1}"/>
+                  </a:ext>
+                  <a:ext uri="{C183D7F6-B498-43B3-948B-1728B52AA6E4}">
+                    <adec:decorative xmlns:adec="http://schemas.microsoft.com/office/drawing/2017/decorative" val="1"/>
                   </a:ext>
                 </a:extLst>
               </p:cNvPr>
@@ -21020,13 +21100,16 @@
             </p:txBody>
           </p:sp>
         </mc:Choice>
-        <mc:Fallback xmlns="">
+        <mc:Fallback>
           <p:sp>
             <p:nvSpPr>
               <p:cNvPr id="4" name="Speech Bubble: Rectangle with Corners Rounded 3">
                 <a:extLst>
                   <a:ext uri="{FF2B5EF4-FFF2-40B4-BE49-F238E27FC236}">
                     <a16:creationId xmlns:a16="http://schemas.microsoft.com/office/drawing/2014/main" id="{F64E8030-CB20-D32A-3DF5-495F0FBC37E1}"/>
+                  </a:ext>
+                  <a:ext uri="{C183D7F6-B498-43B3-948B-1728B52AA6E4}">
+                    <adec:decorative xmlns:adec="http://schemas.microsoft.com/office/drawing/2017/decorative" val="1"/>
                   </a:ext>
                 </a:extLst>
               </p:cNvPr>
@@ -21050,7 +21133,7 @@
               <a:blipFill>
                 <a:blip r:embed="rId3"/>
                 <a:stretch>
-                  <a:fillRect b="-9333"/>
+                  <a:fillRect b="-9589"/>
                 </a:stretch>
               </a:blipFill>
             </p:spPr>
@@ -21075,6 +21158,9 @@
             <a:extLst>
               <a:ext uri="{FF2B5EF4-FFF2-40B4-BE49-F238E27FC236}">
                 <a16:creationId xmlns:a16="http://schemas.microsoft.com/office/drawing/2014/main" id="{697DAF61-031E-194F-48E3-7DEA0929C087}"/>
+              </a:ext>
+              <a:ext uri="{C183D7F6-B498-43B3-948B-1728B52AA6E4}">
+                <adec:decorative xmlns:adec="http://schemas.microsoft.com/office/drawing/2017/decorative" val="1"/>
               </a:ext>
             </a:extLst>
           </p:cNvPr>
@@ -21123,14 +21209,17 @@
           </a:p>
         </p:txBody>
       </p:sp>
-      <mc:AlternateContent xmlns:mc="http://schemas.openxmlformats.org/markup-compatibility/2006" xmlns:a14="http://schemas.microsoft.com/office/drawing/2010/main">
-        <mc:Choice Requires="a14">
+      <mc:AlternateContent xmlns:mc="http://schemas.openxmlformats.org/markup-compatibility/2006">
+        <mc:Choice xmlns:a14="http://schemas.microsoft.com/office/drawing/2010/main" Requires="a14">
           <p:sp>
             <p:nvSpPr>
               <p:cNvPr id="10" name="Speech Bubble: Rectangle with Corners Rounded 9">
                 <a:extLst>
                   <a:ext uri="{FF2B5EF4-FFF2-40B4-BE49-F238E27FC236}">
                     <a16:creationId xmlns:a16="http://schemas.microsoft.com/office/drawing/2014/main" id="{8CBD3B62-118E-3C2C-74E7-15BD5B192BE0}"/>
+                  </a:ext>
+                  <a:ext uri="{C183D7F6-B498-43B3-948B-1728B52AA6E4}">
+                    <adec:decorative xmlns:adec="http://schemas.microsoft.com/office/drawing/2017/decorative" val="1"/>
                   </a:ext>
                 </a:extLst>
               </p:cNvPr>
@@ -21149,6 +21238,9 @@
                   <a:gd name="adj3" fmla="val 16667"/>
                 </a:avLst>
               </a:prstGeom>
+              <a:solidFill>
+                <a:srgbClr val="C35115"/>
+              </a:solidFill>
             </p:spPr>
             <p:style>
               <a:lnRef idx="2">
@@ -21190,13 +21282,16 @@
             </p:txBody>
           </p:sp>
         </mc:Choice>
-        <mc:Fallback xmlns="">
+        <mc:Fallback>
           <p:sp>
             <p:nvSpPr>
               <p:cNvPr id="10" name="Speech Bubble: Rectangle with Corners Rounded 9">
                 <a:extLst>
                   <a:ext uri="{FF2B5EF4-FFF2-40B4-BE49-F238E27FC236}">
                     <a16:creationId xmlns:a16="http://schemas.microsoft.com/office/drawing/2014/main" id="{8CBD3B62-118E-3C2C-74E7-15BD5B192BE0}"/>
+                  </a:ext>
+                  <a:ext uri="{C183D7F6-B498-43B3-948B-1728B52AA6E4}">
+                    <adec:decorative xmlns:adec="http://schemas.microsoft.com/office/drawing/2017/decorative" val="1"/>
                   </a:ext>
                 </a:extLst>
               </p:cNvPr>
@@ -21220,7 +21315,7 @@
               <a:blipFill>
                 <a:blip r:embed="rId4"/>
                 <a:stretch>
-                  <a:fillRect b="-9272"/>
+                  <a:fillRect b="-9589"/>
                 </a:stretch>
               </a:blipFill>
             </p:spPr>
@@ -21614,7 +21709,7 @@
         <mc:Choice Requires="a14">
           <p:sp>
             <p:nvSpPr>
-              <p:cNvPr id="3" name="Content Placeholder 2">
+              <p:cNvPr id="3" name="Content Placeholder 2" descr="Requirements. pi (a given s, theta) needs to be differentiable with respect to theta so that gradient of pi (a given s, theta) exists and is finite. pi needs to stay soft to guarantee exploration and convergence. Popular for a small, discrete action space: Soft-max in action preferences. Define a numerical preference function where you prefer state-action combinations with larger scores. h (s,a, theta) in the real numbers Some options:. Linear approximation with state (transformed) features h (s,a, theta) equals theta transpose x(s,a). ANN with theta as network weights. Giving the action with the highest preference in each state the highest probability is done using soft-max: pi (a given s, theta) equals the fraction e to the power h (s,a, theta), over the sum over b, of e to the power h (s,b, theta), end fraction. Gradient: gradient of ln of pi (s given a, theta) equals x (s,a) minus the sum over b, of pi (b given s, theta)x (s,b)">
                 <a:extLst>
                   <a:ext uri="{FF2B5EF4-FFF2-40B4-BE49-F238E27FC236}">
                     <a16:creationId xmlns:a16="http://schemas.microsoft.com/office/drawing/2014/main" id="{15977774-6B6B-EE26-5A32-0B807E450D44}"/>
@@ -21863,7 +21958,7 @@
                       <a:rPr lang="en-US" i="1">
                         <a:latin typeface="Cambria Math" panose="02040503050406030204" pitchFamily="18" charset="0"/>
                       </a:rPr>
-                      <m:t>h</m:t>
+                      <m:t>ℎ</m:t>
                     </m:r>
                     <m:d>
                       <m:dPr>
@@ -21944,7 +22039,7 @@
                       <a:rPr lang="en-US" i="1">
                         <a:latin typeface="Cambria Math" panose="02040503050406030204" pitchFamily="18" charset="0"/>
                       </a:rPr>
-                      <m:t>h</m:t>
+                      <m:t>ℎ</m:t>
                     </m:r>
                     <m:d>
                       <m:dPr>
@@ -22160,7 +22255,7 @@
                     <m:f>
                       <m:fPr>
                         <m:ctrlPr>
-                          <a:rPr lang="en-US" i="1" smtClean="0">
+                          <a:rPr lang="en-US" b="0" i="1" smtClean="0">
                             <a:latin typeface="Cambria Math" panose="02040503050406030204" pitchFamily="18" charset="0"/>
                           </a:rPr>
                         </m:ctrlPr>
@@ -22187,7 +22282,7 @@
                               <a:rPr lang="en-US" i="1">
                                 <a:latin typeface="Cambria Math" panose="02040503050406030204" pitchFamily="18" charset="0"/>
                               </a:rPr>
-                              <m:t>h</m:t>
+                              <m:t>ℎ</m:t>
                             </m:r>
                             <m:d>
                               <m:dPr>
@@ -22275,7 +22370,7 @@
                                   <a:rPr lang="en-US" i="1">
                                     <a:latin typeface="Cambria Math" panose="02040503050406030204" pitchFamily="18" charset="0"/>
                                   </a:rPr>
-                                  <m:t>h</m:t>
+                                  <m:t>ℎ</m:t>
                                 </m:r>
                                 <m:d>
                                   <m:dPr>
@@ -22368,7 +22463,7 @@
                     <m:func>
                       <m:funcPr>
                         <m:ctrlPr>
-                          <a:rPr lang="en-US" i="1">
+                          <a:rPr lang="en-US">
                             <a:latin typeface="Cambria Math" panose="02040503050406030204" pitchFamily="18" charset="0"/>
                             <a:ea typeface="Cambria Math" panose="02040503050406030204" pitchFamily="18" charset="0"/>
                           </a:rPr>
@@ -22497,7 +22592,7 @@
                         <m:chr m:val="∑"/>
                         <m:supHide m:val="on"/>
                         <m:ctrlPr>
-                          <a:rPr lang="en-US" i="1" smtClean="0">
+                          <a:rPr lang="en-US" b="0" i="1" smtClean="0">
                             <a:latin typeface="Cambria Math" panose="02040503050406030204" pitchFamily="18" charset="0"/>
                             <a:ea typeface="Cambria Math" panose="02040503050406030204" pitchFamily="18" charset="0"/>
                           </a:rPr>
@@ -22625,7 +22720,7 @@
         <mc:Fallback xmlns="">
           <p:sp>
             <p:nvSpPr>
-              <p:cNvPr id="3" name="Content Placeholder 2">
+              <p:cNvPr id="3" name="Content Placeholder 2" descr="Requirements. pi (a given s, theta) needs to be differentiable with respect to theta so that gradient of pi (a given s, theta) exists and is finite. pi needs to stay soft to guarantee exploration and convergence. Popular for a small, discrete action space: Soft-max in action preferences. Define a numerical preference function where you prefer state-action combinations with larger scores. h (s,a, theta) in the real numbers Some options:. Linear approximation with state (transformed) features h (s,a, theta) equals theta transpose x(s,a). ANN with theta as network weights. Giving the action with the highest preference in each state the highest probability is done using soft-max: pi (a given s, theta) equals the fraction e to the power h (s,a, theta), over the sum over b, of e to the power h (s,b, theta), end fraction. Gradient: gradient of ln of pi (s given a, theta) equals x (s,a) minus the sum over b, of pi (b given s, theta)x (s,b)">
                 <a:extLst>
                   <a:ext uri="{FF2B5EF4-FFF2-40B4-BE49-F238E27FC236}">
                     <a16:creationId xmlns:a16="http://schemas.microsoft.com/office/drawing/2014/main" id="{15977774-6B6B-EE26-5A32-0B807E450D44}"/>
@@ -23139,7 +23234,7 @@
         <mc:Choice Requires="a14">
           <p:sp>
             <p:nvSpPr>
-              <p:cNvPr id="2" name="Title 1">
+              <p:cNvPr id="2" name="Title 1" descr="Advantages Over epsilon -Greedy Action Selection">
                 <a:extLst>
                   <a:ext uri="{FF2B5EF4-FFF2-40B4-BE49-F238E27FC236}">
                     <a16:creationId xmlns:a16="http://schemas.microsoft.com/office/drawing/2014/main" id="{DAFACA19-50B4-D3C5-BCE2-036A25E0E6F4}"/>
@@ -23183,7 +23278,7 @@
         <mc:Fallback xmlns="">
           <p:sp>
             <p:nvSpPr>
-              <p:cNvPr id="2" name="Title 1">
+              <p:cNvPr id="2" name="Title 1" descr="Advantages Over epsilon -Greedy Action Selection">
                 <a:extLst>
                   <a:ext uri="{FF2B5EF4-FFF2-40B4-BE49-F238E27FC236}">
                     <a16:creationId xmlns:a16="http://schemas.microsoft.com/office/drawing/2014/main" id="{DAFACA19-50B4-D3C5-BCE2-036A25E0E6F4}"/>
@@ -23224,7 +23319,7 @@
         <mc:Choice Requires="a14">
           <p:sp>
             <p:nvSpPr>
-              <p:cNvPr id="3" name="Content Placeholder 2">
+              <p:cNvPr id="3" name="Content Placeholder 2" descr="Learns stochastic policies. The stochastic policy will be driven to the optimal policy which can also approach a deterministic policy. Stochastic policies perform exploration implicitly. The amount of exploration is automatically reduced when it converges to the best action. Note: value-action methods cannot learn stochastic policies and are often stuck with learning an epsilon -greedy policy!. Smooth updates. Parameterized policy changes action probability smoothly while epsilon -greedy policies jump when a different action becomes the maximum. Incorporating prior knowledge is easier. Prior knowledge about the form of the policy can be incorporated into the way the policy is parameterized (i.e., the approximation can be biased). This can improve learning significantly">
                 <a:extLst>
                   <a:ext uri="{FF2B5EF4-FFF2-40B4-BE49-F238E27FC236}">
                     <a16:creationId xmlns:a16="http://schemas.microsoft.com/office/drawing/2014/main" id="{E7AE168A-03EA-0E9A-AF35-DD24AAAC3FD9}"/>
@@ -23370,7 +23465,7 @@
         <mc:Fallback xmlns="">
           <p:sp>
             <p:nvSpPr>
-              <p:cNvPr id="3" name="Content Placeholder 2">
+              <p:cNvPr id="3" name="Content Placeholder 2" descr="Learns stochastic policies. The stochastic policy will be driven to the optimal policy which can also approach a deterministic policy. Stochastic policies perform exploration implicitly. The amount of exploration is automatically reduced when it converges to the best action. Note: value-action methods cannot learn stochastic policies and are often stuck with learning an epsilon -greedy policy!. Smooth updates. Parameterized policy changes action probability smoothly while epsilon -greedy policies jump when a different action becomes the maximum. Incorporating prior knowledge is easier. Prior knowledge about the form of the policy can be incorporated into the way the policy is parameterized (i.e., the approximation can be biased). This can improve learning significantly">
                 <a:extLst>
                   <a:ext uri="{FF2B5EF4-FFF2-40B4-BE49-F238E27FC236}">
                     <a16:creationId xmlns:a16="http://schemas.microsoft.com/office/drawing/2014/main" id="{E7AE168A-03EA-0E9A-AF35-DD24AAAC3FD9}"/>
